--- a/decks/Day 2/Day2-Section3-RAG-Pipelines.pptx
+++ b/decks/Day 2/Day2-Section3-RAG-Pipelines.pptx
@@ -18,10 +18,7 @@
     <p:sldId id="266" r:id="rId12"/>
     <p:sldId id="267" r:id="rId13"/>
   </p:sldIdLst>
-  <p:notesMasterIdLst>
-    <p:notesMasterId r:id="rId14"/>
-  </p:notesMasterIdLst>
-  <p:sldSz cx="9144000" cy="5143500"/>
+  <p:sldSz cx="9144000" cy="5143500" type="screen16x9"/>
   <p:notesSz cx="5143500" cy="9144000"/>
   <p:defaultTextStyle>
     <a:lvl1pPr marL="0" algn="l" defTabSz="914400" rtl="0" eaLnBrk="1" latinLnBrk="0" hangingPunct="1">
@@ -115,356 +112,12 @@
       </a:defRPr>
     </a:lvl9pPr>
   </p:defaultTextStyle>
+  <p:extLst>
+    <p:ext uri="{EFAFB233-063F-42B5-8137-9DF3F51BA10A}">
+      <p15:sldGuideLst xmlns:p15="http://schemas.microsoft.com/office/powerpoint/2012/main"/>
+    </p:ext>
+  </p:extLst>
 </p:presentation>
-</file>
-
-<file path=ppt/notesMasters/notesMaster1.xml><?xml version="1.0" encoding="utf-8"?>
-<p:notesMaster xmlns:a="http://schemas.openxmlformats.org/drawingml/2006/main" xmlns:r="http://schemas.openxmlformats.org/officeDocument/2006/relationships" xmlns:p="http://schemas.openxmlformats.org/presentationml/2006/main">
-  <p:cSld>
-    <p:bg>
-      <p:bgRef idx="1001">
-        <a:schemeClr val="bg1"/>
-      </p:bgRef>
-    </p:bg>
-    <p:spTree>
-      <p:nvGrpSpPr>
-        <p:cNvPr id="1" name=""/>
-        <p:cNvGrpSpPr/>
-        <p:nvPr/>
-      </p:nvGrpSpPr>
-      <p:grpSpPr>
-        <a:xfrm>
-          <a:off x="0" y="0"/>
-          <a:ext cx="0" cy="0"/>
-          <a:chOff x="0" y="0"/>
-          <a:chExt cx="0" cy="0"/>
-        </a:xfrm>
-      </p:grpSpPr>
-      <p:sp>
-        <p:nvSpPr>
-          <p:cNvPr id="2" name="Header Placeholder 1"/>
-          <p:cNvSpPr>
-            <a:spLocks noGrp="1"/>
-          </p:cNvSpPr>
-          <p:nvPr>
-            <p:ph type="hdr" sz="quarter"/>
-          </p:nvPr>
-        </p:nvSpPr>
-        <p:spPr>
-          <a:xfrm>
-            <a:off x="0" y="0"/>
-            <a:ext cx="2971800" cy="458788"/>
-          </a:xfrm>
-          <a:prstGeom prst="rect">
-            <a:avLst/>
-          </a:prstGeom>
-        </p:spPr>
-        <p:txBody>
-          <a:bodyPr vert="horz" lIns="91440" tIns="45720" rIns="91440" bIns="45720" rtlCol="0"/>
-          <a:lstStyle>
-            <a:lvl1pPr algn="l">
-              <a:defRPr sz="1200"/>
-            </a:lvl1pPr>
-          </a:lstStyle>
-          <a:p>
-            <a:endParaRPr lang="en-US"/>
-          </a:p>
-        </p:txBody>
-      </p:sp>
-      <p:sp>
-        <p:nvSpPr>
-          <p:cNvPr id="3" name="Date Placeholder 2"/>
-          <p:cNvSpPr>
-            <a:spLocks noGrp="1"/>
-          </p:cNvSpPr>
-          <p:nvPr>
-            <p:ph type="dt" idx="1"/>
-          </p:nvPr>
-        </p:nvSpPr>
-        <p:spPr>
-          <a:xfrm>
-            <a:off x="3884613" y="0"/>
-            <a:ext cx="2971800" cy="458788"/>
-          </a:xfrm>
-          <a:prstGeom prst="rect">
-            <a:avLst/>
-          </a:prstGeom>
-        </p:spPr>
-        <p:txBody>
-          <a:bodyPr vert="horz" lIns="91440" tIns="45720" rIns="91440" bIns="45720" rtlCol="0"/>
-          <a:lstStyle>
-            <a:lvl1pPr algn="r">
-              <a:defRPr sz="1200"/>
-            </a:lvl1pPr>
-          </a:lstStyle>
-          <a:p>
-            <a:fld id="{5282F153-3F37-0F45-9E97-73ACFA13230C}" type="datetimeFigureOut">
-              <a:rPr lang="en-US"/>
-              <a:t>7/23/19</a:t>
-            </a:fld>
-            <a:endParaRPr lang="en-US"/>
-          </a:p>
-        </p:txBody>
-      </p:sp>
-      <p:sp>
-        <p:nvSpPr>
-          <p:cNvPr id="4" name="Slide Image Placeholder 3"/>
-          <p:cNvSpPr>
-            <a:spLocks noGrp="1" noRot="1" noChangeAspect="1"/>
-          </p:cNvSpPr>
-          <p:nvPr>
-            <p:ph type="sldImg" idx="2"/>
-          </p:nvPr>
-        </p:nvSpPr>
-        <p:spPr>
-          <a:xfrm>
-            <a:off x="685800" y="1143000"/>
-            <a:ext cx="5486400" cy="3086100"/>
-          </a:xfrm>
-          <a:prstGeom prst="rect">
-            <a:avLst/>
-          </a:prstGeom>
-          <a:noFill/>
-          <a:ln w="12700">
-            <a:solidFill>
-              <a:prstClr val="black"/>
-            </a:solidFill>
-          </a:ln>
-        </p:spPr>
-        <p:txBody>
-          <a:bodyPr vert="horz" lIns="91440" tIns="45720" rIns="91440" bIns="45720" rtlCol="0" anchor="ctr"/>
-          <a:lstStyle/>
-          <a:p>
-            <a:endParaRPr lang="en-US"/>
-          </a:p>
-        </p:txBody>
-      </p:sp>
-      <p:sp>
-        <p:nvSpPr>
-          <p:cNvPr id="5" name="Notes Placeholder 4"/>
-          <p:cNvSpPr>
-            <a:spLocks noGrp="1"/>
-          </p:cNvSpPr>
-          <p:nvPr>
-            <p:ph type="body" sz="quarter" idx="3"/>
-          </p:nvPr>
-        </p:nvSpPr>
-        <p:spPr>
-          <a:xfrm>
-            <a:off x="685800" y="4400550"/>
-            <a:ext cx="5486400" cy="3600450"/>
-          </a:xfrm>
-          <a:prstGeom prst="rect">
-            <a:avLst/>
-          </a:prstGeom>
-        </p:spPr>
-        <p:txBody>
-          <a:bodyPr vert="horz" lIns="91440" tIns="45720" rIns="91440" bIns="45720" rtlCol="0"/>
-          <a:lstStyle/>
-          <a:p>
-            <a:pPr lvl="0"/>
-            <a:r>
-              <a:rPr lang="en-US"/>
-              <a:t>Click to edit Master text styles</a:t>
-            </a:r>
-          </a:p>
-          <a:p>
-            <a:pPr lvl="1"/>
-            <a:r>
-              <a:rPr lang="en-US"/>
-              <a:t>Second level</a:t>
-            </a:r>
-          </a:p>
-          <a:p>
-            <a:pPr lvl="2"/>
-            <a:r>
-              <a:rPr lang="en-US"/>
-              <a:t>Third level</a:t>
-            </a:r>
-          </a:p>
-          <a:p>
-            <a:pPr lvl="3"/>
-            <a:r>
-              <a:rPr lang="en-US"/>
-              <a:t>Fourth level</a:t>
-            </a:r>
-          </a:p>
-          <a:p>
-            <a:pPr lvl="4"/>
-            <a:r>
-              <a:rPr lang="en-US"/>
-              <a:t>Fifth level</a:t>
-            </a:r>
-          </a:p>
-        </p:txBody>
-      </p:sp>
-      <p:sp>
-        <p:nvSpPr>
-          <p:cNvPr id="6" name="Footer Placeholder 5"/>
-          <p:cNvSpPr>
-            <a:spLocks noGrp="1"/>
-          </p:cNvSpPr>
-          <p:nvPr>
-            <p:ph type="ftr" sz="quarter" idx="4"/>
-          </p:nvPr>
-        </p:nvSpPr>
-        <p:spPr>
-          <a:xfrm>
-            <a:off x="0" y="8685213"/>
-            <a:ext cx="2971800" cy="458787"/>
-          </a:xfrm>
-          <a:prstGeom prst="rect">
-            <a:avLst/>
-          </a:prstGeom>
-        </p:spPr>
-        <p:txBody>
-          <a:bodyPr vert="horz" lIns="91440" tIns="45720" rIns="91440" bIns="45720" rtlCol="0" anchor="b"/>
-          <a:lstStyle>
-            <a:lvl1pPr algn="l">
-              <a:defRPr sz="1200"/>
-            </a:lvl1pPr>
-          </a:lstStyle>
-          <a:p>
-            <a:endParaRPr lang="en-US"/>
-          </a:p>
-        </p:txBody>
-      </p:sp>
-      <p:sp>
-        <p:nvSpPr>
-          <p:cNvPr id="7" name="Slide Number Placeholder 6"/>
-          <p:cNvSpPr>
-            <a:spLocks noGrp="1"/>
-          </p:cNvSpPr>
-          <p:nvPr>
-            <p:ph type="sldNum" sz="quarter" idx="5"/>
-          </p:nvPr>
-        </p:nvSpPr>
-        <p:spPr>
-          <a:xfrm>
-            <a:off x="3884613" y="8685213"/>
-            <a:ext cx="2971800" cy="458787"/>
-          </a:xfrm>
-          <a:prstGeom prst="rect">
-            <a:avLst/>
-          </a:prstGeom>
-        </p:spPr>
-        <p:txBody>
-          <a:bodyPr vert="horz" lIns="91440" tIns="45720" rIns="91440" bIns="45720" rtlCol="0" anchor="b"/>
-          <a:lstStyle>
-            <a:lvl1pPr algn="r">
-              <a:defRPr sz="1200"/>
-            </a:lvl1pPr>
-          </a:lstStyle>
-          <a:p>
-            <a:fld id="{CE5E9CC1-C706-0F49-92D6-E571CC5EEA8F}" type="slidenum">
-              <a:rPr lang="en-US"/>
-              <a:t>‹#›</a:t>
-            </a:fld>
-            <a:endParaRPr lang="en-US"/>
-          </a:p>
-        </p:txBody>
-      </p:sp>
-    </p:spTree>
-    <p:extLst>
-      <p:ext uri="{BB962C8B-B14F-4D97-AF65-F5344CB8AC3E}">
-        <p14:creationId xmlns:p14="http://schemas.microsoft.com/office/powerpoint/2010/main" val="1024086991"/>
-      </p:ext>
-    </p:extLst>
-  </p:cSld>
-  <p:clrMap bg1="lt1" tx1="dk1" bg2="lt2" tx2="dk2" accent1="accent1" accent2="accent2" accent3="accent3" accent4="accent4" accent5="accent5" accent6="accent6" hlink="hlink" folHlink="folHlink"/>
-  <p:notesStyle>
-    <a:lvl1pPr marL="0" algn="l" defTabSz="914400" rtl="0" eaLnBrk="1" latinLnBrk="0" hangingPunct="1">
-      <a:defRPr sz="1200" kern="1200">
-        <a:solidFill>
-          <a:schemeClr val="tx1"/>
-        </a:solidFill>
-        <a:latin typeface="+mn-lt"/>
-        <a:ea typeface="+mn-ea"/>
-        <a:cs typeface="+mn-cs"/>
-      </a:defRPr>
-    </a:lvl1pPr>
-    <a:lvl2pPr marL="457200" algn="l" defTabSz="914400" rtl="0" eaLnBrk="1" latinLnBrk="0" hangingPunct="1">
-      <a:defRPr sz="1200" kern="1200">
-        <a:solidFill>
-          <a:schemeClr val="tx1"/>
-        </a:solidFill>
-        <a:latin typeface="+mn-lt"/>
-        <a:ea typeface="+mn-ea"/>
-        <a:cs typeface="+mn-cs"/>
-      </a:defRPr>
-    </a:lvl2pPr>
-    <a:lvl3pPr marL="914400" algn="l" defTabSz="914400" rtl="0" eaLnBrk="1" latinLnBrk="0" hangingPunct="1">
-      <a:defRPr sz="1200" kern="1200">
-        <a:solidFill>
-          <a:schemeClr val="tx1"/>
-        </a:solidFill>
-        <a:latin typeface="+mn-lt"/>
-        <a:ea typeface="+mn-ea"/>
-        <a:cs typeface="+mn-cs"/>
-      </a:defRPr>
-    </a:lvl3pPr>
-    <a:lvl4pPr marL="1371600" algn="l" defTabSz="914400" rtl="0" eaLnBrk="1" latinLnBrk="0" hangingPunct="1">
-      <a:defRPr sz="1200" kern="1200">
-        <a:solidFill>
-          <a:schemeClr val="tx1"/>
-        </a:solidFill>
-        <a:latin typeface="+mn-lt"/>
-        <a:ea typeface="+mn-ea"/>
-        <a:cs typeface="+mn-cs"/>
-      </a:defRPr>
-    </a:lvl4pPr>
-    <a:lvl5pPr marL="1828800" algn="l" defTabSz="914400" rtl="0" eaLnBrk="1" latinLnBrk="0" hangingPunct="1">
-      <a:defRPr sz="1200" kern="1200">
-        <a:solidFill>
-          <a:schemeClr val="tx1"/>
-        </a:solidFill>
-        <a:latin typeface="+mn-lt"/>
-        <a:ea typeface="+mn-ea"/>
-        <a:cs typeface="+mn-cs"/>
-      </a:defRPr>
-    </a:lvl5pPr>
-    <a:lvl6pPr marL="2286000" algn="l" defTabSz="914400" rtl="0" eaLnBrk="1" latinLnBrk="0" hangingPunct="1">
-      <a:defRPr sz="1200" kern="1200">
-        <a:solidFill>
-          <a:schemeClr val="tx1"/>
-        </a:solidFill>
-        <a:latin typeface="+mn-lt"/>
-        <a:ea typeface="+mn-ea"/>
-        <a:cs typeface="+mn-cs"/>
-      </a:defRPr>
-    </a:lvl6pPr>
-    <a:lvl7pPr marL="2743200" algn="l" defTabSz="914400" rtl="0" eaLnBrk="1" latinLnBrk="0" hangingPunct="1">
-      <a:defRPr sz="1200" kern="1200">
-        <a:solidFill>
-          <a:schemeClr val="tx1"/>
-        </a:solidFill>
-        <a:latin typeface="+mn-lt"/>
-        <a:ea typeface="+mn-ea"/>
-        <a:cs typeface="+mn-cs"/>
-      </a:defRPr>
-    </a:lvl7pPr>
-    <a:lvl8pPr marL="3200400" algn="l" defTabSz="914400" rtl="0" eaLnBrk="1" latinLnBrk="0" hangingPunct="1">
-      <a:defRPr sz="1200" kern="1200">
-        <a:solidFill>
-          <a:schemeClr val="tx1"/>
-        </a:solidFill>
-        <a:latin typeface="+mn-lt"/>
-        <a:ea typeface="+mn-ea"/>
-        <a:cs typeface="+mn-cs"/>
-      </a:defRPr>
-    </a:lvl8pPr>
-    <a:lvl9pPr marL="3657600" algn="l" defTabSz="914400" rtl="0" eaLnBrk="1" latinLnBrk="0" hangingPunct="1">
-      <a:defRPr sz="1200" kern="1200">
-        <a:solidFill>
-          <a:schemeClr val="tx1"/>
-        </a:solidFill>
-        <a:latin typeface="+mn-lt"/>
-        <a:ea typeface="+mn-ea"/>
-        <a:cs typeface="+mn-cs"/>
-      </a:defRPr>
-    </a:lvl9pPr>
-  </p:notesStyle>
-</p:notesMaster>
 </file>
 
 <file path=ppt/slideLayouts/slideLayout1.xml><?xml version="1.0" encoding="utf-8"?>
@@ -500,6 +153,11 @@
 <file path=ppt/slideMasters/slideMaster1.xml><?xml version="1.0" encoding="utf-8"?>
 <p:sldMaster xmlns:a="http://schemas.openxmlformats.org/drawingml/2006/main" xmlns:r="http://schemas.openxmlformats.org/officeDocument/2006/relationships" xmlns:p="http://schemas.openxmlformats.org/presentationml/2006/main">
   <p:cSld>
+    <p:bg>
+      <p:bgRef idx="1001">
+        <a:schemeClr val="bg1"/>
+      </p:bgRef>
+    </p:bg>
     <p:spTree>
       <p:nvGrpSpPr>
         <p:cNvPr id="1" name=""/>
@@ -782,6 +440,7 @@
         <a:solidFill>
           <a:srgbClr val="F0EEE6"/>
         </a:solidFill>
+        <a:effectLst/>
       </p:bgPr>
     </p:bg>
     <p:spTree>
@@ -817,6 +476,13 @@
           </a:solidFill>
           <a:ln/>
         </p:spPr>
+        <p:txBody>
+          <a:bodyPr/>
+          <a:lstStyle/>
+          <a:p>
+            <a:endParaRPr lang="en-US"/>
+          </a:p>
+        </p:txBody>
       </p:sp>
       <p:sp>
         <p:nvSpPr>
@@ -837,17 +503,24 @@
           </a:solidFill>
           <a:ln/>
         </p:spPr>
+        <p:txBody>
+          <a:bodyPr/>
+          <a:lstStyle/>
+          <a:p>
+            <a:endParaRPr lang="en-US"/>
+          </a:p>
+        </p:txBody>
       </p:sp>
       <p:pic>
         <p:nvPicPr>
-          <p:cNvPr id="4" name="Image 0" descr="preencoded.png">    </p:cNvPr>
+          <p:cNvPr id="4" name="Image 0" descr="preencoded.png"/>
           <p:cNvPicPr>
             <a:picLocks noChangeAspect="1"/>
           </p:cNvPicPr>
           <p:nvPr/>
         </p:nvPicPr>
         <p:blipFill>
-          <a:blip r:embed="rId1"/>
+          <a:blip r:embed="rId2"/>
           <a:stretch>
             <a:fillRect/>
           </a:stretch>
@@ -883,11 +556,11 @@
           <a:bodyPr wrap="square" lIns="0" tIns="0" rIns="0" bIns="0" rtlCol="0" anchor="ctr"/>
           <a:lstStyle/>
           <a:p>
-            <a:pPr indent="0" marL="0">
-              <a:buNone/>
-            </a:pPr>
-            <a:r>
-              <a:rPr lang="en-US" sz="1400" b="1" spc="300" kern="0" dirty="0">
+            <a:pPr marL="0" indent="0">
+              <a:buNone/>
+            </a:pPr>
+            <a:r>
+              <a:rPr lang="en-US" sz="1400" b="1" kern="0" spc="300" dirty="0">
                 <a:solidFill>
                   <a:srgbClr val="C25E40"/>
                 </a:solidFill>
@@ -922,7 +595,7 @@
           <a:bodyPr wrap="square" lIns="0" tIns="0" rIns="0" bIns="0" rtlCol="0" anchor="ctr"/>
           <a:lstStyle/>
           <a:p>
-            <a:pPr indent="0" marL="0">
+            <a:pPr marL="0" indent="0">
               <a:lnSpc>
                 <a:spcPct val="100000"/>
               </a:lnSpc>
@@ -942,7 +615,7 @@
             <a:endParaRPr lang="en-US" sz="5000" dirty="0"/>
           </a:p>
           <a:p>
-            <a:pPr indent="0" marL="0">
+            <a:pPr marL="0" indent="0">
               <a:lnSpc>
                 <a:spcPct val="100000"/>
               </a:lnSpc>
@@ -985,6 +658,13 @@
             <a:prstDash val="solid"/>
           </a:ln>
         </p:spPr>
+        <p:txBody>
+          <a:bodyPr/>
+          <a:lstStyle/>
+          <a:p>
+            <a:endParaRPr lang="en-US"/>
+          </a:p>
+        </p:txBody>
       </p:sp>
       <p:sp>
         <p:nvSpPr>
@@ -1007,7 +687,7 @@
           <a:bodyPr wrap="square" lIns="0" tIns="0" rIns="0" bIns="0" rtlCol="0" anchor="ctr"/>
           <a:lstStyle/>
           <a:p>
-            <a:pPr indent="0" marL="0">
+            <a:pPr marL="0" indent="0">
               <a:buNone/>
             </a:pPr>
             <a:r>
@@ -1022,45 +702,6 @@
               <a:t>75 min  ·  35 lecture / demo  +  40 lab</a:t>
             </a:r>
             <a:endParaRPr lang="en-US" sz="1600" dirty="0"/>
-          </a:p>
-        </p:txBody>
-      </p:sp>
-      <p:sp>
-        <p:nvSpPr>
-          <p:cNvPr id="9" name="Text 6"/>
-          <p:cNvSpPr/>
-          <p:nvPr/>
-        </p:nvSpPr>
-        <p:spPr>
-          <a:xfrm>
-            <a:off x="640080" y="4462272"/>
-            <a:ext cx="8046720" cy="292608"/>
-          </a:xfrm>
-          <a:prstGeom prst="rect">
-            <a:avLst/>
-          </a:prstGeom>
-          <a:noFill/>
-          <a:ln/>
-        </p:spPr>
-        <p:txBody>
-          <a:bodyPr wrap="square" lIns="0" tIns="0" rIns="0" bIns="0" rtlCol="0" anchor="ctr"/>
-          <a:lstStyle/>
-          <a:p>
-            <a:pPr indent="0" marL="0">
-              <a:buNone/>
-            </a:pPr>
-            <a:r>
-              <a:rPr lang="en-US" sz="1000" i="1" dirty="0">
-                <a:solidFill>
-                  <a:srgbClr val="615C52"/>
-                </a:solidFill>
-                <a:latin typeface="Inter" pitchFamily="34" charset="0"/>
-                <a:ea typeface="Inter" pitchFamily="34" charset="-122"/>
-                <a:cs typeface="Inter" pitchFamily="34" charset="-120"/>
-              </a:rPr>
-              <a:t>dotnetclaude.com  ·  .NET AI with Claude Workshop</a:t>
-            </a:r>
-            <a:endParaRPr lang="en-US" sz="1000" dirty="0"/>
           </a:p>
         </p:txBody>
       </p:sp>
@@ -1080,6 +721,7 @@
         <a:solidFill>
           <a:srgbClr val="F0EEE6"/>
         </a:solidFill>
+        <a:effectLst/>
       </p:bgPr>
     </p:bg>
     <p:spTree>
@@ -1117,11 +759,11 @@
           <a:bodyPr wrap="square" lIns="0" tIns="0" rIns="0" bIns="0" rtlCol="0" anchor="ctr"/>
           <a:lstStyle/>
           <a:p>
-            <a:pPr indent="0" marL="0">
-              <a:buNone/>
-            </a:pPr>
-            <a:r>
-              <a:rPr lang="en-US" sz="1100" b="1" spc="200" kern="0" dirty="0">
+            <a:pPr marL="0" indent="0">
+              <a:buNone/>
+            </a:pPr>
+            <a:r>
+              <a:rPr lang="en-US" sz="1100" b="1" kern="0" spc="200" dirty="0">
                 <a:solidFill>
                   <a:srgbClr val="C25E40"/>
                 </a:solidFill>
@@ -1156,7 +798,7 @@
           <a:bodyPr wrap="square" lIns="0" tIns="0" rIns="0" bIns="0" rtlCol="0" anchor="ctr"/>
           <a:lstStyle/>
           <a:p>
-            <a:pPr indent="0" marL="0">
+            <a:pPr marL="0" indent="0">
               <a:buNone/>
             </a:pPr>
             <a:r>
@@ -1176,14 +818,14 @@
       </p:sp>
       <p:pic>
         <p:nvPicPr>
-          <p:cNvPr id="4" name="Image 0" descr="preencoded.png">    </p:cNvPr>
+          <p:cNvPr id="4" name="Image 0" descr="preencoded.png"/>
           <p:cNvPicPr>
             <a:picLocks noChangeAspect="1"/>
           </p:cNvPicPr>
           <p:nvPr/>
         </p:nvPicPr>
         <p:blipFill>
-          <a:blip r:embed="rId1"/>
+          <a:blip r:embed="rId2"/>
           <a:stretch>
             <a:fillRect/>
           </a:stretch>
@@ -1224,13 +866,20 @@
             <a:prstDash val="solid"/>
           </a:ln>
           <a:effectLst>
-            <a:outerShdw sx="100000" sy="100000" kx="0" ky="0" algn="bl" rotWithShape="0" blurRad="88900" dist="38100" dir="5400000">
+            <a:outerShdw blurRad="88900" dist="38100" dir="5400000" algn="bl" rotWithShape="0">
               <a:srgbClr val="000000">
                 <a:alpha val="10000"/>
               </a:srgbClr>
             </a:outerShdw>
           </a:effectLst>
         </p:spPr>
+        <p:txBody>
+          <a:bodyPr/>
+          <a:lstStyle/>
+          <a:p>
+            <a:endParaRPr lang="en-US"/>
+          </a:p>
+        </p:txBody>
       </p:sp>
       <p:sp>
         <p:nvSpPr>
@@ -1251,17 +900,24 @@
           </a:solidFill>
           <a:ln/>
         </p:spPr>
+        <p:txBody>
+          <a:bodyPr/>
+          <a:lstStyle/>
+          <a:p>
+            <a:endParaRPr lang="en-US"/>
+          </a:p>
+        </p:txBody>
       </p:sp>
       <p:pic>
         <p:nvPicPr>
-          <p:cNvPr id="7" name="Image 1" descr="preencoded.png">    </p:cNvPr>
+          <p:cNvPr id="7" name="Image 1" descr="preencoded.png"/>
           <p:cNvPicPr>
             <a:picLocks noChangeAspect="1"/>
           </p:cNvPicPr>
           <p:nvPr/>
         </p:nvPicPr>
         <p:blipFill>
-          <a:blip r:embed="rId2"/>
+          <a:blip r:embed="rId3"/>
           <a:stretch>
             <a:fillRect/>
           </a:stretch>
@@ -1297,7 +953,7 @@
           <a:bodyPr wrap="square" lIns="0" tIns="0" rIns="0" bIns="0" rtlCol="0" anchor="ctr"/>
           <a:lstStyle/>
           <a:p>
-            <a:pPr algn="ctr" indent="0" marL="0">
+            <a:pPr marL="0" indent="0" algn="ctr">
               <a:buNone/>
             </a:pPr>
             <a:r>
@@ -1336,7 +992,7 @@
           <a:bodyPr wrap="square" lIns="0" tIns="0" rIns="0" bIns="0" rtlCol="0" anchor="ctr"/>
           <a:lstStyle/>
           <a:p>
-            <a:pPr algn="ctr" indent="0" marL="0">
+            <a:pPr marL="0" indent="0" algn="ctr">
               <a:buNone/>
             </a:pPr>
             <a:r>
@@ -1375,7 +1031,7 @@
           <a:bodyPr wrap="square" lIns="0" tIns="0" rIns="0" bIns="0" rtlCol="0" anchor="ctr"/>
           <a:lstStyle/>
           <a:p>
-            <a:pPr algn="ctr" indent="0" marL="0">
+            <a:pPr marL="0" indent="0" algn="ctr">
               <a:buNone/>
             </a:pPr>
             <a:r>
@@ -1419,13 +1075,20 @@
             <a:prstDash val="solid"/>
           </a:ln>
           <a:effectLst>
-            <a:outerShdw sx="100000" sy="100000" kx="0" ky="0" algn="bl" rotWithShape="0" blurRad="88900" dist="38100" dir="5400000">
+            <a:outerShdw blurRad="88900" dist="38100" dir="5400000" algn="bl" rotWithShape="0">
               <a:srgbClr val="000000">
                 <a:alpha val="10000"/>
               </a:srgbClr>
             </a:outerShdw>
           </a:effectLst>
         </p:spPr>
+        <p:txBody>
+          <a:bodyPr/>
+          <a:lstStyle/>
+          <a:p>
+            <a:endParaRPr lang="en-US"/>
+          </a:p>
+        </p:txBody>
       </p:sp>
       <p:sp>
         <p:nvSpPr>
@@ -1446,17 +1109,24 @@
           </a:solidFill>
           <a:ln/>
         </p:spPr>
+        <p:txBody>
+          <a:bodyPr/>
+          <a:lstStyle/>
+          <a:p>
+            <a:endParaRPr lang="en-US"/>
+          </a:p>
+        </p:txBody>
       </p:sp>
       <p:pic>
         <p:nvPicPr>
-          <p:cNvPr id="13" name="Image 2" descr="preencoded.png">    </p:cNvPr>
+          <p:cNvPr id="13" name="Image 2" descr="preencoded.png"/>
           <p:cNvPicPr>
             <a:picLocks noChangeAspect="1"/>
           </p:cNvPicPr>
           <p:nvPr/>
         </p:nvPicPr>
         <p:blipFill>
-          <a:blip r:embed="rId3"/>
+          <a:blip r:embed="rId4"/>
           <a:stretch>
             <a:fillRect/>
           </a:stretch>
@@ -1492,7 +1162,7 @@
           <a:bodyPr wrap="square" lIns="0" tIns="0" rIns="0" bIns="0" rtlCol="0" anchor="ctr"/>
           <a:lstStyle/>
           <a:p>
-            <a:pPr algn="ctr" indent="0" marL="0">
+            <a:pPr marL="0" indent="0" algn="ctr">
               <a:buNone/>
             </a:pPr>
             <a:r>
@@ -1531,7 +1201,7 @@
           <a:bodyPr wrap="square" lIns="0" tIns="0" rIns="0" bIns="0" rtlCol="0" anchor="ctr"/>
           <a:lstStyle/>
           <a:p>
-            <a:pPr algn="ctr" indent="0" marL="0">
+            <a:pPr marL="0" indent="0" algn="ctr">
               <a:buNone/>
             </a:pPr>
             <a:r>
@@ -1570,7 +1240,7 @@
           <a:bodyPr wrap="square" lIns="0" tIns="0" rIns="0" bIns="0" rtlCol="0" anchor="ctr"/>
           <a:lstStyle/>
           <a:p>
-            <a:pPr algn="ctr" indent="0" marL="0">
+            <a:pPr marL="0" indent="0" algn="ctr">
               <a:buNone/>
             </a:pPr>
             <a:r>
@@ -1614,13 +1284,20 @@
             <a:prstDash val="solid"/>
           </a:ln>
           <a:effectLst>
-            <a:outerShdw sx="100000" sy="100000" kx="0" ky="0" algn="bl" rotWithShape="0" blurRad="88900" dist="38100" dir="5400000">
+            <a:outerShdw blurRad="88900" dist="38100" dir="5400000" algn="bl" rotWithShape="0">
               <a:srgbClr val="000000">
                 <a:alpha val="10000"/>
               </a:srgbClr>
             </a:outerShdw>
           </a:effectLst>
         </p:spPr>
+        <p:txBody>
+          <a:bodyPr/>
+          <a:lstStyle/>
+          <a:p>
+            <a:endParaRPr lang="en-US"/>
+          </a:p>
+        </p:txBody>
       </p:sp>
       <p:sp>
         <p:nvSpPr>
@@ -1641,161 +1318,17 @@
           </a:solidFill>
           <a:ln/>
         </p:spPr>
+        <p:txBody>
+          <a:bodyPr/>
+          <a:lstStyle/>
+          <a:p>
+            <a:endParaRPr lang="en-US"/>
+          </a:p>
+        </p:txBody>
       </p:sp>
       <p:pic>
         <p:nvPicPr>
-          <p:cNvPr id="19" name="Image 3" descr="preencoded.png">    </p:cNvPr>
-          <p:cNvPicPr>
-            <a:picLocks noChangeAspect="1"/>
-          </p:cNvPicPr>
-          <p:nvPr/>
-        </p:nvPicPr>
-        <p:blipFill>
-          <a:blip r:embed="rId4"/>
-          <a:stretch>
-            <a:fillRect/>
-          </a:stretch>
-        </p:blipFill>
-        <p:spPr>
-          <a:xfrm>
-            <a:off x="7258507" y="1877263"/>
-            <a:ext cx="241402" cy="241402"/>
-          </a:xfrm>
-          <a:prstGeom prst="rect">
-            <a:avLst/>
-          </a:prstGeom>
-        </p:spPr>
-      </p:pic>
-      <p:sp>
-        <p:nvSpPr>
-          <p:cNvPr id="20" name="Text 14"/>
-          <p:cNvSpPr/>
-          <p:nvPr/>
-        </p:nvSpPr>
-        <p:spPr>
-          <a:xfrm>
-            <a:off x="6121908" y="2350008"/>
-            <a:ext cx="2514600" cy="320040"/>
-          </a:xfrm>
-          <a:prstGeom prst="rect">
-            <a:avLst/>
-          </a:prstGeom>
-          <a:noFill/>
-          <a:ln/>
-        </p:spPr>
-        <p:txBody>
-          <a:bodyPr wrap="square" lIns="0" tIns="0" rIns="0" bIns="0" rtlCol="0" anchor="ctr"/>
-          <a:lstStyle/>
-          <a:p>
-            <a:pPr algn="ctr" indent="0" marL="0">
-              <a:buNone/>
-            </a:pPr>
-            <a:r>
-              <a:rPr lang="en-US" sz="1500" b="1" dirty="0">
-                <a:solidFill>
-                  <a:srgbClr val="141413"/>
-                </a:solidFill>
-                <a:latin typeface="Inter" pitchFamily="34" charset="0"/>
-                <a:ea typeface="Inter" pitchFamily="34" charset="-122"/>
-                <a:cs typeface="Inter" pitchFamily="34" charset="-120"/>
-              </a:rPr>
-              <a:t>Grounded answer</a:t>
-            </a:r>
-            <a:endParaRPr lang="en-US" sz="1500" dirty="0"/>
-          </a:p>
-        </p:txBody>
-      </p:sp>
-      <p:sp>
-        <p:nvSpPr>
-          <p:cNvPr id="21" name="Text 15"/>
-          <p:cNvSpPr/>
-          <p:nvPr/>
-        </p:nvSpPr>
-        <p:spPr>
-          <a:xfrm>
-            <a:off x="6121908" y="2670048"/>
-            <a:ext cx="2514600" cy="320040"/>
-          </a:xfrm>
-          <a:prstGeom prst="rect">
-            <a:avLst/>
-          </a:prstGeom>
-          <a:noFill/>
-          <a:ln/>
-        </p:spPr>
-        <p:txBody>
-          <a:bodyPr wrap="square" lIns="0" tIns="0" rIns="0" bIns="0" rtlCol="0" anchor="ctr"/>
-          <a:lstStyle/>
-          <a:p>
-            <a:pPr algn="ctr" indent="0" marL="0">
-              <a:buNone/>
-            </a:pPr>
-            <a:r>
-              <a:rPr lang="en-US" sz="1200" dirty="0">
-                <a:solidFill>
-                  <a:srgbClr val="615C52"/>
-                </a:solidFill>
-                <a:latin typeface="Inter" pitchFamily="34" charset="0"/>
-                <a:ea typeface="Inter" pitchFamily="34" charset="-122"/>
-                <a:cs typeface="Inter" pitchFamily="34" charset="-120"/>
-              </a:rPr>
-              <a:t>Cited from your data</a:t>
-            </a:r>
-            <a:endParaRPr lang="en-US" sz="1200" dirty="0"/>
-          </a:p>
-        </p:txBody>
-      </p:sp>
-      <p:sp>
-        <p:nvSpPr>
-          <p:cNvPr id="22" name="Shape 16"/>
-          <p:cNvSpPr/>
-          <p:nvPr/>
-        </p:nvSpPr>
-        <p:spPr>
-          <a:xfrm>
-            <a:off x="548640" y="3383280"/>
-            <a:ext cx="8046720" cy="777240"/>
-          </a:xfrm>
-          <a:prstGeom prst="roundRect">
-            <a:avLst>
-              <a:gd name="adj" fmla="val 11765"/>
-            </a:avLst>
-          </a:prstGeom>
-          <a:solidFill>
-            <a:srgbClr val="F4E4DC"/>
-          </a:solidFill>
-          <a:ln/>
-          <a:effectLst>
-            <a:outerShdw sx="100000" sy="100000" kx="0" ky="0" algn="bl" rotWithShape="0" blurRad="88900" dist="38100" dir="5400000">
-              <a:srgbClr val="000000">
-                <a:alpha val="10000"/>
-              </a:srgbClr>
-            </a:outerShdw>
-          </a:effectLst>
-        </p:spPr>
-      </p:sp>
-      <p:sp>
-        <p:nvSpPr>
-          <p:cNvPr id="23" name="Shape 17"/>
-          <p:cNvSpPr/>
-          <p:nvPr/>
-        </p:nvSpPr>
-        <p:spPr>
-          <a:xfrm>
-            <a:off x="777240" y="3529584"/>
-            <a:ext cx="457200" cy="457200"/>
-          </a:xfrm>
-          <a:prstGeom prst="ellipse">
-            <a:avLst/>
-          </a:prstGeom>
-          <a:solidFill>
-            <a:srgbClr val="D97757"/>
-          </a:solidFill>
-          <a:ln/>
-        </p:spPr>
-      </p:sp>
-      <p:pic>
-        <p:nvPicPr>
-          <p:cNvPr id="24" name="Image 4" descr="preencoded.png">    </p:cNvPr>
+          <p:cNvPr id="19" name="Image 3" descr="preencoded.png"/>
           <p:cNvPicPr>
             <a:picLocks noChangeAspect="1"/>
           </p:cNvPicPr>
@@ -1809,6 +1342,171 @@
         </p:blipFill>
         <p:spPr>
           <a:xfrm>
+            <a:off x="7258507" y="1877263"/>
+            <a:ext cx="241402" cy="241402"/>
+          </a:xfrm>
+          <a:prstGeom prst="rect">
+            <a:avLst/>
+          </a:prstGeom>
+        </p:spPr>
+      </p:pic>
+      <p:sp>
+        <p:nvSpPr>
+          <p:cNvPr id="20" name="Text 14"/>
+          <p:cNvSpPr/>
+          <p:nvPr/>
+        </p:nvSpPr>
+        <p:spPr>
+          <a:xfrm>
+            <a:off x="6121908" y="2350008"/>
+            <a:ext cx="2514600" cy="320040"/>
+          </a:xfrm>
+          <a:prstGeom prst="rect">
+            <a:avLst/>
+          </a:prstGeom>
+          <a:noFill/>
+          <a:ln/>
+        </p:spPr>
+        <p:txBody>
+          <a:bodyPr wrap="square" lIns="0" tIns="0" rIns="0" bIns="0" rtlCol="0" anchor="ctr"/>
+          <a:lstStyle/>
+          <a:p>
+            <a:pPr marL="0" indent="0" algn="ctr">
+              <a:buNone/>
+            </a:pPr>
+            <a:r>
+              <a:rPr lang="en-US" sz="1500" b="1" dirty="0">
+                <a:solidFill>
+                  <a:srgbClr val="141413"/>
+                </a:solidFill>
+                <a:latin typeface="Inter" pitchFamily="34" charset="0"/>
+                <a:ea typeface="Inter" pitchFamily="34" charset="-122"/>
+                <a:cs typeface="Inter" pitchFamily="34" charset="-120"/>
+              </a:rPr>
+              <a:t>Grounded answer</a:t>
+            </a:r>
+            <a:endParaRPr lang="en-US" sz="1500" dirty="0"/>
+          </a:p>
+        </p:txBody>
+      </p:sp>
+      <p:sp>
+        <p:nvSpPr>
+          <p:cNvPr id="21" name="Text 15"/>
+          <p:cNvSpPr/>
+          <p:nvPr/>
+        </p:nvSpPr>
+        <p:spPr>
+          <a:xfrm>
+            <a:off x="6121908" y="2670048"/>
+            <a:ext cx="2514600" cy="320040"/>
+          </a:xfrm>
+          <a:prstGeom prst="rect">
+            <a:avLst/>
+          </a:prstGeom>
+          <a:noFill/>
+          <a:ln/>
+        </p:spPr>
+        <p:txBody>
+          <a:bodyPr wrap="square" lIns="0" tIns="0" rIns="0" bIns="0" rtlCol="0" anchor="ctr"/>
+          <a:lstStyle/>
+          <a:p>
+            <a:pPr marL="0" indent="0" algn="ctr">
+              <a:buNone/>
+            </a:pPr>
+            <a:r>
+              <a:rPr lang="en-US" sz="1200" dirty="0">
+                <a:solidFill>
+                  <a:srgbClr val="615C52"/>
+                </a:solidFill>
+                <a:latin typeface="Inter" pitchFamily="34" charset="0"/>
+                <a:ea typeface="Inter" pitchFamily="34" charset="-122"/>
+                <a:cs typeface="Inter" pitchFamily="34" charset="-120"/>
+              </a:rPr>
+              <a:t>Cited from your data</a:t>
+            </a:r>
+            <a:endParaRPr lang="en-US" sz="1200" dirty="0"/>
+          </a:p>
+        </p:txBody>
+      </p:sp>
+      <p:sp>
+        <p:nvSpPr>
+          <p:cNvPr id="22" name="Shape 16"/>
+          <p:cNvSpPr/>
+          <p:nvPr/>
+        </p:nvSpPr>
+        <p:spPr>
+          <a:xfrm>
+            <a:off x="548640" y="3383280"/>
+            <a:ext cx="8046720" cy="777240"/>
+          </a:xfrm>
+          <a:prstGeom prst="roundRect">
+            <a:avLst>
+              <a:gd name="adj" fmla="val 11765"/>
+            </a:avLst>
+          </a:prstGeom>
+          <a:solidFill>
+            <a:srgbClr val="F4E4DC"/>
+          </a:solidFill>
+          <a:ln/>
+          <a:effectLst>
+            <a:outerShdw blurRad="88900" dist="38100" dir="5400000" algn="bl" rotWithShape="0">
+              <a:srgbClr val="000000">
+                <a:alpha val="10000"/>
+              </a:srgbClr>
+            </a:outerShdw>
+          </a:effectLst>
+        </p:spPr>
+        <p:txBody>
+          <a:bodyPr/>
+          <a:lstStyle/>
+          <a:p>
+            <a:endParaRPr lang="en-US"/>
+          </a:p>
+        </p:txBody>
+      </p:sp>
+      <p:sp>
+        <p:nvSpPr>
+          <p:cNvPr id="23" name="Shape 17"/>
+          <p:cNvSpPr/>
+          <p:nvPr/>
+        </p:nvSpPr>
+        <p:spPr>
+          <a:xfrm>
+            <a:off x="777240" y="3529584"/>
+            <a:ext cx="457200" cy="457200"/>
+          </a:xfrm>
+          <a:prstGeom prst="ellipse">
+            <a:avLst/>
+          </a:prstGeom>
+          <a:solidFill>
+            <a:srgbClr val="D97757"/>
+          </a:solidFill>
+          <a:ln/>
+        </p:spPr>
+        <p:txBody>
+          <a:bodyPr/>
+          <a:lstStyle/>
+          <a:p>
+            <a:endParaRPr lang="en-US"/>
+          </a:p>
+        </p:txBody>
+      </p:sp>
+      <p:pic>
+        <p:nvPicPr>
+          <p:cNvPr id="24" name="Image 4" descr="preencoded.png"/>
+          <p:cNvPicPr>
+            <a:picLocks noChangeAspect="1"/>
+          </p:cNvPicPr>
+          <p:nvPr/>
+        </p:nvPicPr>
+        <p:blipFill>
+          <a:blip r:embed="rId5"/>
+          <a:stretch>
+            <a:fillRect/>
+          </a:stretch>
+        </p:blipFill>
+        <p:spPr>
+          <a:xfrm>
             <a:off x="896112" y="3648456"/>
             <a:ext cx="219456" cy="219456"/>
           </a:xfrm>
@@ -1838,7 +1536,7 @@
           <a:bodyPr wrap="square" lIns="0" tIns="0" rIns="0" bIns="0" rtlCol="0" anchor="ctr"/>
           <a:lstStyle/>
           <a:p>
-            <a:pPr indent="0" marL="0">
+            <a:pPr marL="0" indent="0">
               <a:buNone/>
             </a:pPr>
             <a:r>
@@ -1852,9 +1550,6 @@
               </a:rPr>
               <a:t>Cache the static context portion — </a:t>
             </a:r>
-            <a:pPr indent="0" marL="0">
-              <a:buNone/>
-            </a:pPr>
             <a:r>
               <a:rPr lang="en-US" sz="1400" dirty="0">
                 <a:solidFill>
@@ -1891,7 +1586,7 @@
           <a:bodyPr wrap="square" rtlCol="0" anchor="ctr"/>
           <a:lstStyle/>
           <a:p>
-            <a:pPr indent="0" marL="0">
+            <a:pPr marL="0" indent="0">
               <a:buNone/>
             </a:pPr>
             <a:r>
@@ -1930,7 +1625,7 @@
           <a:bodyPr wrap="square" rtlCol="0" anchor="ctr"/>
           <a:lstStyle/>
           <a:p>
-            <a:pPr algn="r" indent="0" marL="0">
+            <a:pPr marL="0" indent="0" algn="r">
               <a:buNone/>
             </a:pPr>
             <a:r>
@@ -1945,45 +1640,6 @@
               <a:t>Day 2 · Section 3  ·  10/12</a:t>
             </a:r>
             <a:endParaRPr lang="en-US" sz="900" dirty="0"/>
-          </a:p>
-        </p:txBody>
-      </p:sp>
-      <p:sp>
-        <p:nvSpPr>
-          <p:cNvPr id="28" name="Text 21"/>
-          <p:cNvSpPr/>
-          <p:nvPr/>
-        </p:nvSpPr>
-        <p:spPr>
-          <a:xfrm>
-            <a:off x="548640" y="4462272"/>
-            <a:ext cx="8046720" cy="274320"/>
-          </a:xfrm>
-          <a:prstGeom prst="rect">
-            <a:avLst/>
-          </a:prstGeom>
-          <a:noFill/>
-          <a:ln/>
-        </p:spPr>
-        <p:txBody>
-          <a:bodyPr wrap="square" lIns="0" tIns="0" rIns="0" bIns="0" rtlCol="0" anchor="ctr"/>
-          <a:lstStyle/>
-          <a:p>
-            <a:pPr indent="0" marL="0">
-              <a:buNone/>
-            </a:pPr>
-            <a:r>
-              <a:rPr lang="en-US" sz="1000" i="1" dirty="0">
-                <a:solidFill>
-                  <a:srgbClr val="615C52"/>
-                </a:solidFill>
-                <a:latin typeface="Inter" pitchFamily="34" charset="0"/>
-                <a:ea typeface="Inter" pitchFamily="34" charset="-122"/>
-                <a:cs typeface="Inter" pitchFamily="34" charset="-120"/>
-              </a:rPr>
-              <a:t>▸ Retrieve, stuff the prompt, generate — and cache the stable context to cut cost.</a:t>
-            </a:r>
-            <a:endParaRPr lang="en-US" sz="1000" dirty="0"/>
           </a:p>
         </p:txBody>
       </p:sp>
@@ -2003,6 +1659,7 @@
         <a:solidFill>
           <a:srgbClr val="F0EEE6"/>
         </a:solidFill>
+        <a:effectLst/>
       </p:bgPr>
     </p:bg>
     <p:spTree>
@@ -2021,210 +1678,7 @@
       </p:grpSpPr>
       <p:pic>
         <p:nvPicPr>
-          <p:cNvPr id="2" name="Image 0" descr="preencoded.png">    </p:cNvPr>
-          <p:cNvPicPr>
-            <a:picLocks noChangeAspect="1"/>
-          </p:cNvPicPr>
-          <p:nvPr/>
-        </p:nvPicPr>
-        <p:blipFill>
-          <a:blip r:embed="rId1"/>
-          <a:stretch>
-            <a:fillRect/>
-          </a:stretch>
-        </p:blipFill>
-        <p:spPr>
-          <a:xfrm>
-            <a:off x="8339328" y="402336"/>
-            <a:ext cx="310896" cy="310896"/>
-          </a:xfrm>
-          <a:prstGeom prst="rect">
-            <a:avLst/>
-          </a:prstGeom>
-        </p:spPr>
-      </p:pic>
-      <p:sp>
-        <p:nvSpPr>
-          <p:cNvPr id="3" name="Shape 0"/>
-          <p:cNvSpPr/>
-          <p:nvPr/>
-        </p:nvSpPr>
-        <p:spPr>
-          <a:xfrm>
-            <a:off x="548640" y="822960"/>
-            <a:ext cx="3200400" cy="548640"/>
-          </a:xfrm>
-          <a:prstGeom prst="roundRect">
-            <a:avLst>
-              <a:gd name="adj" fmla="val 50000"/>
-            </a:avLst>
-          </a:prstGeom>
-          <a:solidFill>
-            <a:srgbClr val="C0392B"/>
-          </a:solidFill>
-          <a:ln/>
-        </p:spPr>
-      </p:sp>
-      <p:sp>
-        <p:nvSpPr>
-          <p:cNvPr id="4" name="Shape 1"/>
-          <p:cNvSpPr/>
-          <p:nvPr/>
-        </p:nvSpPr>
-        <p:spPr>
-          <a:xfrm>
-            <a:off x="804672" y="1014984"/>
-            <a:ext cx="164592" cy="164592"/>
-          </a:xfrm>
-          <a:prstGeom prst="ellipse">
-            <a:avLst/>
-          </a:prstGeom>
-          <a:solidFill>
-            <a:srgbClr val="FFFFFF"/>
-          </a:solidFill>
-          <a:ln/>
-        </p:spPr>
-      </p:sp>
-      <p:sp>
-        <p:nvSpPr>
-          <p:cNvPr id="5" name="Text 2"/>
-          <p:cNvSpPr/>
-          <p:nvPr/>
-        </p:nvSpPr>
-        <p:spPr>
-          <a:xfrm>
-            <a:off x="1051560" y="822960"/>
-            <a:ext cx="2560320" cy="548640"/>
-          </a:xfrm>
-          <a:prstGeom prst="rect">
-            <a:avLst/>
-          </a:prstGeom>
-          <a:noFill/>
-          <a:ln/>
-        </p:spPr>
-        <p:txBody>
-          <a:bodyPr wrap="square" lIns="0" tIns="0" rIns="0" bIns="0" rtlCol="0" anchor="ctr"/>
-          <a:lstStyle/>
-          <a:p>
-            <a:pPr indent="0" marL="0">
-              <a:buNone/>
-            </a:pPr>
-            <a:r>
-              <a:rPr lang="en-US" sz="1700" b="1" spc="100" kern="0" dirty="0">
-                <a:solidFill>
-                  <a:srgbClr val="FFFFFF"/>
-                </a:solidFill>
-                <a:latin typeface="Inter" pitchFamily="34" charset="0"/>
-                <a:ea typeface="Inter" pitchFamily="34" charset="-122"/>
-                <a:cs typeface="Inter" pitchFamily="34" charset="-120"/>
-              </a:rPr>
-              <a:t>LIVE DEMO</a:t>
-            </a:r>
-            <a:endParaRPr lang="en-US" sz="1700" dirty="0"/>
-          </a:p>
-        </p:txBody>
-      </p:sp>
-      <p:sp>
-        <p:nvSpPr>
-          <p:cNvPr id="6" name="Text 3"/>
-          <p:cNvSpPr/>
-          <p:nvPr/>
-        </p:nvSpPr>
-        <p:spPr>
-          <a:xfrm>
-            <a:off x="548640" y="1572768"/>
-            <a:ext cx="8046720" cy="457200"/>
-          </a:xfrm>
-          <a:prstGeom prst="rect">
-            <a:avLst/>
-          </a:prstGeom>
-          <a:noFill/>
-          <a:ln/>
-        </p:spPr>
-        <p:txBody>
-          <a:bodyPr wrap="square" lIns="0" tIns="0" rIns="0" bIns="0" rtlCol="0" anchor="ctr"/>
-          <a:lstStyle/>
-          <a:p>
-            <a:pPr indent="0" marL="0">
-              <a:buNone/>
-            </a:pPr>
-            <a:r>
-              <a:rPr lang="en-US" sz="2600" b="1" dirty="0">
-                <a:solidFill>
-                  <a:srgbClr val="141413"/>
-                </a:solidFill>
-                <a:latin typeface="Georgia" pitchFamily="34" charset="0"/>
-                <a:ea typeface="Georgia" pitchFamily="34" charset="-122"/>
-                <a:cs typeface="Georgia" pitchFamily="34" charset="-120"/>
-              </a:rPr>
-              <a:t>Ingestion → grounded recommendation</a:t>
-            </a:r>
-            <a:endParaRPr lang="en-US" sz="2600" dirty="0"/>
-          </a:p>
-        </p:txBody>
-      </p:sp>
-      <p:sp>
-        <p:nvSpPr>
-          <p:cNvPr id="7" name="Text 4"/>
-          <p:cNvSpPr/>
-          <p:nvPr/>
-        </p:nvSpPr>
-        <p:spPr>
-          <a:xfrm>
-            <a:off x="548640" y="2048256"/>
-            <a:ext cx="8046720" cy="365760"/>
-          </a:xfrm>
-          <a:prstGeom prst="rect">
-            <a:avLst/>
-          </a:prstGeom>
-          <a:noFill/>
-          <a:ln/>
-        </p:spPr>
-        <p:txBody>
-          <a:bodyPr wrap="square" lIns="0" tIns="0" rIns="0" bIns="0" rtlCol="0" anchor="ctr"/>
-          <a:lstStyle/>
-          <a:p>
-            <a:pPr indent="0" marL="0">
-              <a:buNone/>
-            </a:pPr>
-            <a:r>
-              <a:rPr lang="en-US" sz="1500" b="1" dirty="0">
-                <a:solidFill>
-                  <a:srgbClr val="C25E40"/>
-                </a:solidFill>
-                <a:latin typeface="Inter" pitchFamily="34" charset="0"/>
-                <a:ea typeface="Inter" pitchFamily="34" charset="-122"/>
-                <a:cs typeface="Inter" pitchFamily="34" charset="-120"/>
-              </a:rPr>
-              <a:t>Grounded vs ungrounded — the difference is obvious</a:t>
-            </a:r>
-            <a:endParaRPr lang="en-US" sz="1500" dirty="0"/>
-          </a:p>
-        </p:txBody>
-      </p:sp>
-      <p:sp>
-        <p:nvSpPr>
-          <p:cNvPr id="8" name="Shape 5"/>
-          <p:cNvSpPr/>
-          <p:nvPr/>
-        </p:nvSpPr>
-        <p:spPr>
-          <a:xfrm>
-            <a:off x="566928" y="2651760"/>
-            <a:ext cx="274320" cy="274320"/>
-          </a:xfrm>
-          <a:prstGeom prst="ellipse">
-            <a:avLst/>
-          </a:prstGeom>
-          <a:solidFill>
-            <a:srgbClr val="C0392B"/>
-          </a:solidFill>
-          <a:ln/>
-        </p:spPr>
-      </p:sp>
-      <p:pic>
-        <p:nvPicPr>
-          <p:cNvPr id="9" name="Image 1" descr="preencoded.png">    </p:cNvPr>
+          <p:cNvPr id="2" name="Image 0" descr="preencoded.png"/>
           <p:cNvPicPr>
             <a:picLocks noChangeAspect="1"/>
           </p:cNvPicPr>
@@ -2238,8 +1692,8 @@
         </p:blipFill>
         <p:spPr>
           <a:xfrm>
-            <a:off x="638251" y="2723083"/>
-            <a:ext cx="131674" cy="131674"/>
+            <a:off x="8339328" y="402336"/>
+            <a:ext cx="310896" cy="310896"/>
           </a:xfrm>
           <a:prstGeom prst="rect">
             <a:avLst/>
@@ -2248,66 +1702,207 @@
       </p:pic>
       <p:sp>
         <p:nvSpPr>
-          <p:cNvPr id="10" name="Text 6"/>
-          <p:cNvSpPr/>
-          <p:nvPr/>
-        </p:nvSpPr>
-        <p:spPr>
-          <a:xfrm>
-            <a:off x="960120" y="2633472"/>
-            <a:ext cx="7406640" cy="310896"/>
-          </a:xfrm>
-          <a:prstGeom prst="rect">
-            <a:avLst/>
-          </a:prstGeom>
-          <a:noFill/>
-          <a:ln/>
-        </p:spPr>
-        <p:txBody>
-          <a:bodyPr wrap="square" lIns="0" tIns="0" rIns="0" bIns="0" rtlCol="0" anchor="ctr"/>
-          <a:lstStyle/>
-          <a:p>
-            <a:pPr indent="0" marL="0">
-              <a:buNone/>
-            </a:pPr>
-            <a:r>
-              <a:rPr lang="en-US" sz="1450" dirty="0">
-                <a:solidFill>
-                  <a:srgbClr val="141413"/>
-                </a:solidFill>
-                <a:latin typeface="Inter" pitchFamily="34" charset="0"/>
-                <a:ea typeface="Inter" pitchFamily="34" charset="-122"/>
-                <a:cs typeface="Inter" pitchFamily="34" charset="-120"/>
-              </a:rPr>
-              <a:t>Run ingestion + embedding over the catalog</a:t>
-            </a:r>
-            <a:endParaRPr lang="en-US" sz="1450" dirty="0"/>
-          </a:p>
-        </p:txBody>
-      </p:sp>
-      <p:sp>
-        <p:nvSpPr>
-          <p:cNvPr id="11" name="Shape 7"/>
-          <p:cNvSpPr/>
-          <p:nvPr/>
-        </p:nvSpPr>
-        <p:spPr>
-          <a:xfrm>
-            <a:off x="566928" y="3035808"/>
-            <a:ext cx="274320" cy="274320"/>
-          </a:xfrm>
-          <a:prstGeom prst="ellipse">
-            <a:avLst/>
+          <p:cNvPr id="3" name="Shape 0"/>
+          <p:cNvSpPr/>
+          <p:nvPr/>
+        </p:nvSpPr>
+        <p:spPr>
+          <a:xfrm>
+            <a:off x="548640" y="822960"/>
+            <a:ext cx="3200400" cy="548640"/>
+          </a:xfrm>
+          <a:prstGeom prst="roundRect">
+            <a:avLst>
+              <a:gd name="adj" fmla="val 50000"/>
+            </a:avLst>
           </a:prstGeom>
           <a:solidFill>
             <a:srgbClr val="C0392B"/>
           </a:solidFill>
           <a:ln/>
         </p:spPr>
+        <p:txBody>
+          <a:bodyPr/>
+          <a:lstStyle/>
+          <a:p>
+            <a:endParaRPr lang="en-US"/>
+          </a:p>
+        </p:txBody>
+      </p:sp>
+      <p:sp>
+        <p:nvSpPr>
+          <p:cNvPr id="4" name="Shape 1"/>
+          <p:cNvSpPr/>
+          <p:nvPr/>
+        </p:nvSpPr>
+        <p:spPr>
+          <a:xfrm>
+            <a:off x="804672" y="1014984"/>
+            <a:ext cx="164592" cy="164592"/>
+          </a:xfrm>
+          <a:prstGeom prst="ellipse">
+            <a:avLst/>
+          </a:prstGeom>
+          <a:solidFill>
+            <a:srgbClr val="FFFFFF"/>
+          </a:solidFill>
+          <a:ln/>
+        </p:spPr>
+        <p:txBody>
+          <a:bodyPr/>
+          <a:lstStyle/>
+          <a:p>
+            <a:endParaRPr lang="en-US"/>
+          </a:p>
+        </p:txBody>
+      </p:sp>
+      <p:sp>
+        <p:nvSpPr>
+          <p:cNvPr id="5" name="Text 2"/>
+          <p:cNvSpPr/>
+          <p:nvPr/>
+        </p:nvSpPr>
+        <p:spPr>
+          <a:xfrm>
+            <a:off x="1051560" y="822960"/>
+            <a:ext cx="2560320" cy="548640"/>
+          </a:xfrm>
+          <a:prstGeom prst="rect">
+            <a:avLst/>
+          </a:prstGeom>
+          <a:noFill/>
+          <a:ln/>
+        </p:spPr>
+        <p:txBody>
+          <a:bodyPr wrap="square" lIns="0" tIns="0" rIns="0" bIns="0" rtlCol="0" anchor="ctr"/>
+          <a:lstStyle/>
+          <a:p>
+            <a:pPr marL="0" indent="0">
+              <a:buNone/>
+            </a:pPr>
+            <a:r>
+              <a:rPr lang="en-US" sz="1700" b="1" kern="0" spc="100" dirty="0">
+                <a:solidFill>
+                  <a:srgbClr val="FFFFFF"/>
+                </a:solidFill>
+                <a:latin typeface="Inter" pitchFamily="34" charset="0"/>
+                <a:ea typeface="Inter" pitchFamily="34" charset="-122"/>
+                <a:cs typeface="Inter" pitchFamily="34" charset="-120"/>
+              </a:rPr>
+              <a:t>LIVE DEMO</a:t>
+            </a:r>
+            <a:endParaRPr lang="en-US" sz="1700" dirty="0"/>
+          </a:p>
+        </p:txBody>
+      </p:sp>
+      <p:sp>
+        <p:nvSpPr>
+          <p:cNvPr id="6" name="Text 3"/>
+          <p:cNvSpPr/>
+          <p:nvPr/>
+        </p:nvSpPr>
+        <p:spPr>
+          <a:xfrm>
+            <a:off x="548640" y="1572768"/>
+            <a:ext cx="8046720" cy="457200"/>
+          </a:xfrm>
+          <a:prstGeom prst="rect">
+            <a:avLst/>
+          </a:prstGeom>
+          <a:noFill/>
+          <a:ln/>
+        </p:spPr>
+        <p:txBody>
+          <a:bodyPr wrap="square" lIns="0" tIns="0" rIns="0" bIns="0" rtlCol="0" anchor="ctr"/>
+          <a:lstStyle/>
+          <a:p>
+            <a:pPr marL="0" indent="0">
+              <a:buNone/>
+            </a:pPr>
+            <a:r>
+              <a:rPr lang="en-US" sz="2600" b="1" dirty="0">
+                <a:solidFill>
+                  <a:srgbClr val="141413"/>
+                </a:solidFill>
+                <a:latin typeface="Georgia" pitchFamily="34" charset="0"/>
+                <a:ea typeface="Georgia" pitchFamily="34" charset="-122"/>
+                <a:cs typeface="Georgia" pitchFamily="34" charset="-120"/>
+              </a:rPr>
+              <a:t>Ingestion → grounded recommendation</a:t>
+            </a:r>
+            <a:endParaRPr lang="en-US" sz="2600" dirty="0"/>
+          </a:p>
+        </p:txBody>
+      </p:sp>
+      <p:sp>
+        <p:nvSpPr>
+          <p:cNvPr id="7" name="Text 4"/>
+          <p:cNvSpPr/>
+          <p:nvPr/>
+        </p:nvSpPr>
+        <p:spPr>
+          <a:xfrm>
+            <a:off x="548640" y="2048256"/>
+            <a:ext cx="8046720" cy="365760"/>
+          </a:xfrm>
+          <a:prstGeom prst="rect">
+            <a:avLst/>
+          </a:prstGeom>
+          <a:noFill/>
+          <a:ln/>
+        </p:spPr>
+        <p:txBody>
+          <a:bodyPr wrap="square" lIns="0" tIns="0" rIns="0" bIns="0" rtlCol="0" anchor="ctr"/>
+          <a:lstStyle/>
+          <a:p>
+            <a:pPr marL="0" indent="0">
+              <a:buNone/>
+            </a:pPr>
+            <a:r>
+              <a:rPr lang="en-US" sz="1500" b="1" dirty="0">
+                <a:solidFill>
+                  <a:srgbClr val="C25E40"/>
+                </a:solidFill>
+                <a:latin typeface="Inter" pitchFamily="34" charset="0"/>
+                <a:ea typeface="Inter" pitchFamily="34" charset="-122"/>
+                <a:cs typeface="Inter" pitchFamily="34" charset="-120"/>
+              </a:rPr>
+              <a:t>Grounded vs ungrounded — the difference is obvious</a:t>
+            </a:r>
+            <a:endParaRPr lang="en-US" sz="1500" dirty="0"/>
+          </a:p>
+        </p:txBody>
+      </p:sp>
+      <p:sp>
+        <p:nvSpPr>
+          <p:cNvPr id="8" name="Shape 5"/>
+          <p:cNvSpPr/>
+          <p:nvPr/>
+        </p:nvSpPr>
+        <p:spPr>
+          <a:xfrm>
+            <a:off x="566928" y="2651760"/>
+            <a:ext cx="274320" cy="274320"/>
+          </a:xfrm>
+          <a:prstGeom prst="ellipse">
+            <a:avLst/>
+          </a:prstGeom>
+          <a:solidFill>
+            <a:srgbClr val="C0392B"/>
+          </a:solidFill>
+          <a:ln/>
+        </p:spPr>
+        <p:txBody>
+          <a:bodyPr/>
+          <a:lstStyle/>
+          <a:p>
+            <a:endParaRPr lang="en-US"/>
+          </a:p>
+        </p:txBody>
       </p:sp>
       <p:pic>
         <p:nvPicPr>
-          <p:cNvPr id="12" name="Image 2" descr="preencoded.png">    </p:cNvPr>
+          <p:cNvPr id="9" name="Image 1" descr="preencoded.png"/>
           <p:cNvPicPr>
             <a:picLocks noChangeAspect="1"/>
           </p:cNvPicPr>
@@ -2321,7 +1916,7 @@
         </p:blipFill>
         <p:spPr>
           <a:xfrm>
-            <a:off x="638251" y="3107131"/>
+            <a:off x="638251" y="2723083"/>
             <a:ext cx="131674" cy="131674"/>
           </a:xfrm>
           <a:prstGeom prst="rect">
@@ -2331,13 +1926,13 @@
       </p:pic>
       <p:sp>
         <p:nvSpPr>
-          <p:cNvPr id="13" name="Text 8"/>
-          <p:cNvSpPr/>
-          <p:nvPr/>
-        </p:nvSpPr>
-        <p:spPr>
-          <a:xfrm>
-            <a:off x="960120" y="3017520"/>
+          <p:cNvPr id="10" name="Text 6"/>
+          <p:cNvSpPr/>
+          <p:nvPr/>
+        </p:nvSpPr>
+        <p:spPr>
+          <a:xfrm>
+            <a:off x="960120" y="2633472"/>
             <a:ext cx="7406640" cy="310896"/>
           </a:xfrm>
           <a:prstGeom prst="rect">
@@ -2350,7 +1945,7 @@
           <a:bodyPr wrap="square" lIns="0" tIns="0" rIns="0" bIns="0" rtlCol="0" anchor="ctr"/>
           <a:lstStyle/>
           <a:p>
-            <a:pPr indent="0" marL="0">
+            <a:pPr marL="0" indent="0">
               <a:buNone/>
             </a:pPr>
             <a:r>
@@ -2362,7 +1957,7 @@
                 <a:ea typeface="Inter" pitchFamily="34" charset="-122"/>
                 <a:cs typeface="Inter" pitchFamily="34" charset="-120"/>
               </a:rPr>
-              <a:t>Call /api/recommend — grounded in real data</a:t>
+              <a:t>Run ingestion + embedding over the catalog</a:t>
             </a:r>
             <a:endParaRPr lang="en-US" sz="1450" dirty="0"/>
           </a:p>
@@ -2370,13 +1965,13 @@
       </p:sp>
       <p:sp>
         <p:nvSpPr>
-          <p:cNvPr id="14" name="Shape 9"/>
-          <p:cNvSpPr/>
-          <p:nvPr/>
-        </p:nvSpPr>
-        <p:spPr>
-          <a:xfrm>
-            <a:off x="566928" y="3419856"/>
+          <p:cNvPr id="11" name="Shape 7"/>
+          <p:cNvSpPr/>
+          <p:nvPr/>
+        </p:nvSpPr>
+        <p:spPr>
+          <a:xfrm>
+            <a:off x="566928" y="3035808"/>
             <a:ext cx="274320" cy="274320"/>
           </a:xfrm>
           <a:prstGeom prst="ellipse">
@@ -2387,23 +1982,120 @@
           </a:solidFill>
           <a:ln/>
         </p:spPr>
+        <p:txBody>
+          <a:bodyPr/>
+          <a:lstStyle/>
+          <a:p>
+            <a:endParaRPr lang="en-US"/>
+          </a:p>
+        </p:txBody>
       </p:sp>
       <p:pic>
         <p:nvPicPr>
-          <p:cNvPr id="15" name="Image 3" descr="preencoded.png">    </p:cNvPr>
+          <p:cNvPr id="12" name="Image 2" descr="preencoded.png"/>
           <p:cNvPicPr>
             <a:picLocks noChangeAspect="1"/>
           </p:cNvPicPr>
           <p:nvPr/>
         </p:nvPicPr>
         <p:blipFill>
-          <a:blip r:embed="rId4"/>
+          <a:blip r:embed="rId3"/>
           <a:stretch>
             <a:fillRect/>
           </a:stretch>
         </p:blipFill>
         <p:spPr>
           <a:xfrm>
+            <a:off x="638251" y="3107131"/>
+            <a:ext cx="131674" cy="131674"/>
+          </a:xfrm>
+          <a:prstGeom prst="rect">
+            <a:avLst/>
+          </a:prstGeom>
+        </p:spPr>
+      </p:pic>
+      <p:sp>
+        <p:nvSpPr>
+          <p:cNvPr id="13" name="Text 8"/>
+          <p:cNvSpPr/>
+          <p:nvPr/>
+        </p:nvSpPr>
+        <p:spPr>
+          <a:xfrm>
+            <a:off x="960120" y="3017520"/>
+            <a:ext cx="7406640" cy="310896"/>
+          </a:xfrm>
+          <a:prstGeom prst="rect">
+            <a:avLst/>
+          </a:prstGeom>
+          <a:noFill/>
+          <a:ln/>
+        </p:spPr>
+        <p:txBody>
+          <a:bodyPr wrap="square" lIns="0" tIns="0" rIns="0" bIns="0" rtlCol="0" anchor="ctr"/>
+          <a:lstStyle/>
+          <a:p>
+            <a:pPr marL="0" indent="0">
+              <a:buNone/>
+            </a:pPr>
+            <a:r>
+              <a:rPr lang="en-US" sz="1450" dirty="0">
+                <a:solidFill>
+                  <a:srgbClr val="141413"/>
+                </a:solidFill>
+                <a:latin typeface="Inter" pitchFamily="34" charset="0"/>
+                <a:ea typeface="Inter" pitchFamily="34" charset="-122"/>
+                <a:cs typeface="Inter" pitchFamily="34" charset="-120"/>
+              </a:rPr>
+              <a:t>Call /api/recommend — grounded in real data</a:t>
+            </a:r>
+            <a:endParaRPr lang="en-US" sz="1450" dirty="0"/>
+          </a:p>
+        </p:txBody>
+      </p:sp>
+      <p:sp>
+        <p:nvSpPr>
+          <p:cNvPr id="14" name="Shape 9"/>
+          <p:cNvSpPr/>
+          <p:nvPr/>
+        </p:nvSpPr>
+        <p:spPr>
+          <a:xfrm>
+            <a:off x="566928" y="3419856"/>
+            <a:ext cx="274320" cy="274320"/>
+          </a:xfrm>
+          <a:prstGeom prst="ellipse">
+            <a:avLst/>
+          </a:prstGeom>
+          <a:solidFill>
+            <a:srgbClr val="C0392B"/>
+          </a:solidFill>
+          <a:ln/>
+        </p:spPr>
+        <p:txBody>
+          <a:bodyPr/>
+          <a:lstStyle/>
+          <a:p>
+            <a:endParaRPr lang="en-US"/>
+          </a:p>
+        </p:txBody>
+      </p:sp>
+      <p:pic>
+        <p:nvPicPr>
+          <p:cNvPr id="15" name="Image 3" descr="preencoded.png"/>
+          <p:cNvPicPr>
+            <a:picLocks noChangeAspect="1"/>
+          </p:cNvPicPr>
+          <p:nvPr/>
+        </p:nvPicPr>
+        <p:blipFill>
+          <a:blip r:embed="rId3"/>
+          <a:stretch>
+            <a:fillRect/>
+          </a:stretch>
+        </p:blipFill>
+        <p:spPr>
+          <a:xfrm>
             <a:off x="638251" y="3491179"/>
             <a:ext cx="131674" cy="131674"/>
           </a:xfrm>
@@ -2433,7 +2125,7 @@
           <a:bodyPr wrap="square" lIns="0" tIns="0" rIns="0" bIns="0" rtlCol="0" anchor="ctr"/>
           <a:lstStyle/>
           <a:p>
-            <a:pPr indent="0" marL="0">
+            <a:pPr marL="0" indent="0">
               <a:buNone/>
             </a:pPr>
             <a:r>
@@ -2472,6 +2164,13 @@
           </a:solidFill>
           <a:ln/>
         </p:spPr>
+        <p:txBody>
+          <a:bodyPr/>
+          <a:lstStyle/>
+          <a:p>
+            <a:endParaRPr lang="en-US"/>
+          </a:p>
+        </p:txBody>
       </p:sp>
       <p:sp>
         <p:nvSpPr>
@@ -2494,7 +2193,7 @@
           <a:bodyPr wrap="square" lIns="0" tIns="0" rIns="0" bIns="0" rtlCol="0" anchor="ctr"/>
           <a:lstStyle/>
           <a:p>
-            <a:pPr indent="0" marL="0">
+            <a:pPr marL="0" indent="0">
               <a:buNone/>
             </a:pPr>
             <a:r>
@@ -2508,9 +2207,6 @@
               </a:rPr>
               <a:t>Watch for it:  </a:t>
             </a:r>
-            <a:pPr indent="0" marL="0">
-              <a:buNone/>
-            </a:pPr>
             <a:r>
               <a:rPr lang="en-US" sz="1250" dirty="0">
                 <a:solidFill>
@@ -2547,7 +2243,7 @@
           <a:bodyPr wrap="square" rtlCol="0" anchor="ctr"/>
           <a:lstStyle/>
           <a:p>
-            <a:pPr indent="0" marL="0">
+            <a:pPr marL="0" indent="0">
               <a:buNone/>
             </a:pPr>
             <a:r>
@@ -2586,7 +2282,7 @@
           <a:bodyPr wrap="square" rtlCol="0" anchor="ctr"/>
           <a:lstStyle/>
           <a:p>
-            <a:pPr algn="r" indent="0" marL="0">
+            <a:pPr marL="0" indent="0" algn="r">
               <a:buNone/>
             </a:pPr>
             <a:r>
@@ -2601,45 +2297,6 @@
               <a:t>Day 2 · Section 3  ·  11/12</a:t>
             </a:r>
             <a:endParaRPr lang="en-US" sz="900" dirty="0"/>
-          </a:p>
-        </p:txBody>
-      </p:sp>
-      <p:sp>
-        <p:nvSpPr>
-          <p:cNvPr id="21" name="Text 15"/>
-          <p:cNvSpPr/>
-          <p:nvPr/>
-        </p:nvSpPr>
-        <p:spPr>
-          <a:xfrm>
-            <a:off x="548640" y="4462272"/>
-            <a:ext cx="8046720" cy="274320"/>
-          </a:xfrm>
-          <a:prstGeom prst="rect">
-            <a:avLst/>
-          </a:prstGeom>
-          <a:noFill/>
-          <a:ln/>
-        </p:spPr>
-        <p:txBody>
-          <a:bodyPr wrap="square" lIns="0" tIns="0" rIns="0" bIns="0" rtlCol="0" anchor="ctr"/>
-          <a:lstStyle/>
-          <a:p>
-            <a:pPr indent="0" marL="0">
-              <a:buNone/>
-            </a:pPr>
-            <a:r>
-              <a:rPr lang="en-US" sz="1000" i="1" dirty="0">
-                <a:solidFill>
-                  <a:srgbClr val="615C52"/>
-                </a:solidFill>
-                <a:latin typeface="Inter" pitchFamily="34" charset="0"/>
-                <a:ea typeface="Inter" pitchFamily="34" charset="-122"/>
-                <a:cs typeface="Inter" pitchFamily="34" charset="-120"/>
-              </a:rPr>
-              <a:t>▸ Run both side by side — the hallucinated vs cited contrast sells RAG instantly.</a:t>
-            </a:r>
-            <a:endParaRPr lang="en-US" sz="1000" dirty="0"/>
           </a:p>
         </p:txBody>
       </p:sp>
@@ -2659,6 +2316,7 @@
         <a:solidFill>
           <a:srgbClr val="F0EEE6"/>
         </a:solidFill>
+        <a:effectLst/>
       </p:bgPr>
     </p:bg>
     <p:spTree>
@@ -2677,60 +2335,7 @@
       </p:grpSpPr>
       <p:pic>
         <p:nvPicPr>
-          <p:cNvPr id="2" name="Image 0" descr="preencoded.png">    </p:cNvPr>
-          <p:cNvPicPr>
-            <a:picLocks noChangeAspect="1"/>
-          </p:cNvPicPr>
-          <p:nvPr/>
-        </p:nvPicPr>
-        <p:blipFill>
-          <a:blip r:embed="rId1"/>
-          <a:stretch>
-            <a:fillRect/>
-          </a:stretch>
-        </p:blipFill>
-        <p:spPr>
-          <a:xfrm>
-            <a:off x="8339328" y="402336"/>
-            <a:ext cx="310896" cy="310896"/>
-          </a:xfrm>
-          <a:prstGeom prst="rect">
-            <a:avLst/>
-          </a:prstGeom>
-        </p:spPr>
-      </p:pic>
-      <p:sp>
-        <p:nvSpPr>
-          <p:cNvPr id="3" name="Shape 0"/>
-          <p:cNvSpPr/>
-          <p:nvPr/>
-        </p:nvSpPr>
-        <p:spPr>
-          <a:xfrm>
-            <a:off x="548640" y="822960"/>
-            <a:ext cx="3154680" cy="3429000"/>
-          </a:xfrm>
-          <a:prstGeom prst="roundRect">
-            <a:avLst>
-              <a:gd name="adj" fmla="val 3478"/>
-            </a:avLst>
-          </a:prstGeom>
-          <a:solidFill>
-            <a:srgbClr val="D97757"/>
-          </a:solidFill>
-          <a:ln/>
-          <a:effectLst>
-            <a:outerShdw sx="100000" sy="100000" kx="0" ky="0" algn="bl" rotWithShape="0" blurRad="88900" dist="38100" dir="5400000">
-              <a:srgbClr val="000000">
-                <a:alpha val="10000"/>
-              </a:srgbClr>
-            </a:outerShdw>
-          </a:effectLst>
-        </p:spPr>
-      </p:sp>
-      <p:pic>
-        <p:nvPicPr>
-          <p:cNvPr id="4" name="Image 1" descr="preencoded.png">    </p:cNvPr>
+          <p:cNvPr id="2" name="Image 0" descr="preencoded.png"/>
           <p:cNvPicPr>
             <a:picLocks noChangeAspect="1"/>
           </p:cNvPicPr>
@@ -2744,6 +2349,66 @@
         </p:blipFill>
         <p:spPr>
           <a:xfrm>
+            <a:off x="8339328" y="402336"/>
+            <a:ext cx="310896" cy="310896"/>
+          </a:xfrm>
+          <a:prstGeom prst="rect">
+            <a:avLst/>
+          </a:prstGeom>
+        </p:spPr>
+      </p:pic>
+      <p:sp>
+        <p:nvSpPr>
+          <p:cNvPr id="3" name="Shape 0"/>
+          <p:cNvSpPr/>
+          <p:nvPr/>
+        </p:nvSpPr>
+        <p:spPr>
+          <a:xfrm>
+            <a:off x="548640" y="822960"/>
+            <a:ext cx="3154680" cy="3429000"/>
+          </a:xfrm>
+          <a:prstGeom prst="roundRect">
+            <a:avLst>
+              <a:gd name="adj" fmla="val 3478"/>
+            </a:avLst>
+          </a:prstGeom>
+          <a:solidFill>
+            <a:srgbClr val="D97757"/>
+          </a:solidFill>
+          <a:ln/>
+          <a:effectLst>
+            <a:outerShdw blurRad="88900" dist="38100" dir="5400000" algn="bl" rotWithShape="0">
+              <a:srgbClr val="000000">
+                <a:alpha val="10000"/>
+              </a:srgbClr>
+            </a:outerShdw>
+          </a:effectLst>
+        </p:spPr>
+        <p:txBody>
+          <a:bodyPr/>
+          <a:lstStyle/>
+          <a:p>
+            <a:endParaRPr lang="en-US"/>
+          </a:p>
+        </p:txBody>
+      </p:sp>
+      <p:pic>
+        <p:nvPicPr>
+          <p:cNvPr id="4" name="Image 1" descr="preencoded.png"/>
+          <p:cNvPicPr>
+            <a:picLocks noChangeAspect="1"/>
+          </p:cNvPicPr>
+          <p:nvPr/>
+        </p:nvPicPr>
+        <p:blipFill>
+          <a:blip r:embed="rId3"/>
+          <a:stretch>
+            <a:fillRect/>
+          </a:stretch>
+        </p:blipFill>
+        <p:spPr>
+          <a:xfrm>
             <a:off x="868680" y="1133856"/>
             <a:ext cx="548640" cy="548640"/>
           </a:xfrm>
@@ -2773,7 +2438,7 @@
           <a:bodyPr wrap="square" lIns="0" tIns="0" rIns="0" bIns="0" rtlCol="0" anchor="ctr"/>
           <a:lstStyle/>
           <a:p>
-            <a:pPr indent="0" marL="0">
+            <a:pPr marL="0" indent="0">
               <a:buNone/>
             </a:pPr>
             <a:r>
@@ -2812,7 +2477,7 @@
           <a:bodyPr wrap="square" lIns="0" tIns="0" rIns="0" bIns="0" rtlCol="0" anchor="ctr"/>
           <a:lstStyle/>
           <a:p>
-            <a:pPr indent="0" marL="0">
+            <a:pPr marL="0" indent="0">
               <a:buNone/>
             </a:pPr>
             <a:r>
@@ -2852,6 +2517,13 @@
             <a:prstDash val="solid"/>
           </a:ln>
         </p:spPr>
+        <p:txBody>
+          <a:bodyPr/>
+          <a:lstStyle/>
+          <a:p>
+            <a:endParaRPr lang="en-US"/>
+          </a:p>
+        </p:txBody>
       </p:sp>
       <p:sp>
         <p:nvSpPr>
@@ -2874,11 +2546,11 @@
           <a:bodyPr wrap="square" lIns="0" tIns="0" rIns="0" bIns="0" rtlCol="0" anchor="ctr"/>
           <a:lstStyle/>
           <a:p>
-            <a:pPr indent="0" marL="0">
-              <a:buNone/>
-            </a:pPr>
-            <a:r>
-              <a:rPr lang="en-US" sz="1100" b="1" spc="100" kern="0" dirty="0">
+            <a:pPr marL="0" indent="0">
+              <a:buNone/>
+            </a:pPr>
+            <a:r>
+              <a:rPr lang="en-US" sz="1100" b="1" kern="0" spc="100" dirty="0">
                 <a:solidFill>
                   <a:srgbClr val="FBE9E2"/>
                 </a:solidFill>
@@ -2913,7 +2585,7 @@
           <a:bodyPr wrap="square" lIns="0" tIns="0" rIns="0" bIns="0" rtlCol="0" anchor="ctr"/>
           <a:lstStyle/>
           <a:p>
-            <a:pPr indent="0" marL="0">
+            <a:pPr marL="0" indent="0">
               <a:buNone/>
             </a:pPr>
             <a:r>
@@ -2952,11 +2624,11 @@
           <a:bodyPr wrap="square" lIns="0" tIns="0" rIns="0" bIns="0" rtlCol="0" anchor="ctr"/>
           <a:lstStyle/>
           <a:p>
-            <a:pPr indent="0" marL="0">
-              <a:buNone/>
-            </a:pPr>
-            <a:r>
-              <a:rPr lang="en-US" sz="1100" b="1" spc="200" kern="0" dirty="0">
+            <a:pPr marL="0" indent="0">
+              <a:buNone/>
+            </a:pPr>
+            <a:r>
+              <a:rPr lang="en-US" sz="1100" b="1" kern="0" spc="200" dirty="0">
                 <a:solidFill>
                   <a:srgbClr val="C25E40"/>
                 </a:solidFill>
@@ -2989,6 +2661,13 @@
           </a:solidFill>
           <a:ln/>
         </p:spPr>
+        <p:txBody>
+          <a:bodyPr/>
+          <a:lstStyle/>
+          <a:p>
+            <a:endParaRPr lang="en-US"/>
+          </a:p>
+        </p:txBody>
       </p:sp>
       <p:sp>
         <p:nvSpPr>
@@ -3011,7 +2690,7 @@
           <a:bodyPr wrap="square" lIns="0" tIns="0" rIns="0" bIns="0" rtlCol="0" anchor="ctr"/>
           <a:lstStyle/>
           <a:p>
-            <a:pPr algn="ctr" indent="0" marL="0">
+            <a:pPr marL="0" indent="0" algn="ctr">
               <a:buNone/>
             </a:pPr>
             <a:r>
@@ -3050,7 +2729,7 @@
           <a:bodyPr wrap="square" lIns="0" tIns="0" rIns="0" bIns="0" rtlCol="0" anchor="ctr"/>
           <a:lstStyle/>
           <a:p>
-            <a:pPr indent="0" marL="0">
+            <a:pPr marL="0" indent="0">
               <a:buNone/>
             </a:pPr>
             <a:r>
@@ -3087,6 +2766,13 @@
           </a:solidFill>
           <a:ln/>
         </p:spPr>
+        <p:txBody>
+          <a:bodyPr/>
+          <a:lstStyle/>
+          <a:p>
+            <a:endParaRPr lang="en-US"/>
+          </a:p>
+        </p:txBody>
       </p:sp>
       <p:sp>
         <p:nvSpPr>
@@ -3109,7 +2795,7 @@
           <a:bodyPr wrap="square" lIns="0" tIns="0" rIns="0" bIns="0" rtlCol="0" anchor="ctr"/>
           <a:lstStyle/>
           <a:p>
-            <a:pPr algn="ctr" indent="0" marL="0">
+            <a:pPr marL="0" indent="0" algn="ctr">
               <a:buNone/>
             </a:pPr>
             <a:r>
@@ -3148,7 +2834,7 @@
           <a:bodyPr wrap="square" lIns="0" tIns="0" rIns="0" bIns="0" rtlCol="0" anchor="ctr"/>
           <a:lstStyle/>
           <a:p>
-            <a:pPr indent="0" marL="0">
+            <a:pPr marL="0" indent="0">
               <a:buNone/>
             </a:pPr>
             <a:r>
@@ -3185,6 +2871,13 @@
           </a:solidFill>
           <a:ln/>
         </p:spPr>
+        <p:txBody>
+          <a:bodyPr/>
+          <a:lstStyle/>
+          <a:p>
+            <a:endParaRPr lang="en-US"/>
+          </a:p>
+        </p:txBody>
       </p:sp>
       <p:sp>
         <p:nvSpPr>
@@ -3207,7 +2900,7 @@
           <a:bodyPr wrap="square" lIns="0" tIns="0" rIns="0" bIns="0" rtlCol="0" anchor="ctr"/>
           <a:lstStyle/>
           <a:p>
-            <a:pPr algn="ctr" indent="0" marL="0">
+            <a:pPr marL="0" indent="0" algn="ctr">
               <a:buNone/>
             </a:pPr>
             <a:r>
@@ -3246,7 +2939,7 @@
           <a:bodyPr wrap="square" lIns="0" tIns="0" rIns="0" bIns="0" rtlCol="0" anchor="ctr"/>
           <a:lstStyle/>
           <a:p>
-            <a:pPr indent="0" marL="0">
+            <a:pPr marL="0" indent="0">
               <a:buNone/>
             </a:pPr>
             <a:r>
@@ -3290,6 +2983,13 @@
             <a:prstDash val="solid"/>
           </a:ln>
         </p:spPr>
+        <p:txBody>
+          <a:bodyPr/>
+          <a:lstStyle/>
+          <a:p>
+            <a:endParaRPr lang="en-US"/>
+          </a:p>
+        </p:txBody>
       </p:sp>
       <p:sp>
         <p:nvSpPr>
@@ -3312,11 +3012,11 @@
           <a:bodyPr wrap="square" lIns="0" tIns="0" rIns="0" bIns="0" rtlCol="0" anchor="ctr"/>
           <a:lstStyle/>
           <a:p>
-            <a:pPr indent="0" marL="0">
-              <a:buNone/>
-            </a:pPr>
-            <a:r>
-              <a:rPr lang="en-US" sz="1050" b="1" spc="100" kern="0" dirty="0">
+            <a:pPr marL="0" indent="0">
+              <a:buNone/>
+            </a:pPr>
+            <a:r>
+              <a:rPr lang="en-US" sz="1050" b="1" kern="0" spc="100" dirty="0">
                 <a:solidFill>
                   <a:srgbClr val="615C52"/>
                 </a:solidFill>
@@ -3332,70 +3032,7 @@
       </p:sp>
       <p:pic>
         <p:nvPicPr>
-          <p:cNvPr id="22" name="Image 2" descr="preencoded.png">    </p:cNvPr>
-          <p:cNvPicPr>
-            <a:picLocks noChangeAspect="1"/>
-          </p:cNvPicPr>
-          <p:nvPr/>
-        </p:nvPicPr>
-        <p:blipFill>
-          <a:blip r:embed="rId3"/>
-          <a:stretch>
-            <a:fillRect/>
-          </a:stretch>
-        </p:blipFill>
-        <p:spPr>
-          <a:xfrm>
-            <a:off x="4297680" y="2898648"/>
-            <a:ext cx="182880" cy="182880"/>
-          </a:xfrm>
-          <a:prstGeom prst="rect">
-            <a:avLst/>
-          </a:prstGeom>
-        </p:spPr>
-      </p:pic>
-      <p:sp>
-        <p:nvSpPr>
-          <p:cNvPr id="23" name="Text 18"/>
-          <p:cNvSpPr/>
-          <p:nvPr/>
-        </p:nvSpPr>
-        <p:spPr>
-          <a:xfrm>
-            <a:off x="4572000" y="2852928"/>
-            <a:ext cx="3931920" cy="256032"/>
-          </a:xfrm>
-          <a:prstGeom prst="rect">
-            <a:avLst/>
-          </a:prstGeom>
-          <a:noFill/>
-          <a:ln/>
-        </p:spPr>
-        <p:txBody>
-          <a:bodyPr wrap="square" lIns="0" tIns="0" rIns="0" bIns="0" rtlCol="0" anchor="ctr"/>
-          <a:lstStyle/>
-          <a:p>
-            <a:pPr indent="0" marL="0">
-              <a:buNone/>
-            </a:pPr>
-            <a:r>
-              <a:rPr lang="en-US" sz="1250" dirty="0">
-                <a:solidFill>
-                  <a:srgbClr val="141413"/>
-                </a:solidFill>
-                <a:latin typeface="Inter" pitchFamily="34" charset="0"/>
-                <a:ea typeface="Inter" pitchFamily="34" charset="-122"/>
-                <a:cs typeface="Inter" pitchFamily="34" charset="-120"/>
-              </a:rPr>
-              <a:t>Qdrant collection, vector size matches</a:t>
-            </a:r>
-            <a:endParaRPr lang="en-US" sz="1250" dirty="0"/>
-          </a:p>
-        </p:txBody>
-      </p:sp>
-      <p:pic>
-        <p:nvPicPr>
-          <p:cNvPr id="24" name="Image 3" descr="preencoded.png">    </p:cNvPr>
+          <p:cNvPr id="22" name="Image 2" descr="preencoded.png"/>
           <p:cNvPicPr>
             <a:picLocks noChangeAspect="1"/>
           </p:cNvPicPr>
@@ -3409,7 +3046,7 @@
         </p:blipFill>
         <p:spPr>
           <a:xfrm>
-            <a:off x="4297680" y="3182112"/>
+            <a:off x="4297680" y="2898648"/>
             <a:ext cx="182880" cy="182880"/>
           </a:xfrm>
           <a:prstGeom prst="rect">
@@ -3419,13 +3056,13 @@
       </p:pic>
       <p:sp>
         <p:nvSpPr>
-          <p:cNvPr id="25" name="Text 19"/>
-          <p:cNvSpPr/>
-          <p:nvPr/>
-        </p:nvSpPr>
-        <p:spPr>
-          <a:xfrm>
-            <a:off x="4572000" y="3136392"/>
+          <p:cNvPr id="23" name="Text 18"/>
+          <p:cNvSpPr/>
+          <p:nvPr/>
+        </p:nvSpPr>
+        <p:spPr>
+          <a:xfrm>
+            <a:off x="4572000" y="2852928"/>
             <a:ext cx="3931920" cy="256032"/>
           </a:xfrm>
           <a:prstGeom prst="rect">
@@ -3438,7 +3075,7 @@
           <a:bodyPr wrap="square" lIns="0" tIns="0" rIns="0" bIns="0" rtlCol="0" anchor="ctr"/>
           <a:lstStyle/>
           <a:p>
-            <a:pPr indent="0" marL="0">
+            <a:pPr marL="0" indent="0">
               <a:buNone/>
             </a:pPr>
             <a:r>
@@ -3450,7 +3087,7 @@
                 <a:ea typeface="Inter" pitchFamily="34" charset="-122"/>
                 <a:cs typeface="Inter" pitchFamily="34" charset="-120"/>
               </a:rPr>
-              <a:t>Data ingested, chunked &amp; embedded</a:t>
+              <a:t>Qdrant collection, vector size matches</a:t>
             </a:r>
             <a:endParaRPr lang="en-US" sz="1250" dirty="0"/>
           </a:p>
@@ -3458,21 +3095,21 @@
       </p:sp>
       <p:pic>
         <p:nvPicPr>
-          <p:cNvPr id="26" name="Image 4" descr="preencoded.png">    </p:cNvPr>
+          <p:cNvPr id="24" name="Image 3" descr="preencoded.png"/>
           <p:cNvPicPr>
             <a:picLocks noChangeAspect="1"/>
           </p:cNvPicPr>
           <p:nvPr/>
         </p:nvPicPr>
         <p:blipFill>
-          <a:blip r:embed="rId5"/>
+          <a:blip r:embed="rId4"/>
           <a:stretch>
             <a:fillRect/>
           </a:stretch>
         </p:blipFill>
         <p:spPr>
           <a:xfrm>
-            <a:off x="4297680" y="3465576"/>
+            <a:off x="4297680" y="3182112"/>
             <a:ext cx="182880" cy="182880"/>
           </a:xfrm>
           <a:prstGeom prst="rect">
@@ -3482,13 +3119,13 @@
       </p:pic>
       <p:sp>
         <p:nvSpPr>
-          <p:cNvPr id="27" name="Text 20"/>
-          <p:cNvSpPr/>
-          <p:nvPr/>
-        </p:nvSpPr>
-        <p:spPr>
-          <a:xfrm>
-            <a:off x="4572000" y="3419856"/>
+          <p:cNvPr id="25" name="Text 19"/>
+          <p:cNvSpPr/>
+          <p:nvPr/>
+        </p:nvSpPr>
+        <p:spPr>
+          <a:xfrm>
+            <a:off x="4572000" y="3136392"/>
             <a:ext cx="3931920" cy="256032"/>
           </a:xfrm>
           <a:prstGeom prst="rect">
@@ -3501,7 +3138,7 @@
           <a:bodyPr wrap="square" lIns="0" tIns="0" rIns="0" bIns="0" rtlCol="0" anchor="ctr"/>
           <a:lstStyle/>
           <a:p>
-            <a:pPr indent="0" marL="0">
+            <a:pPr marL="0" indent="0">
               <a:buNone/>
             </a:pPr>
             <a:r>
@@ -3513,7 +3150,7 @@
                 <a:ea typeface="Inter" pitchFamily="34" charset="-122"/>
                 <a:cs typeface="Inter" pitchFamily="34" charset="-120"/>
               </a:rPr>
-              <a:t>Recommendations are grounded</a:t>
+              <a:t>Data ingested, chunked &amp; embedded</a:t>
             </a:r>
             <a:endParaRPr lang="en-US" sz="1250" dirty="0"/>
           </a:p>
@@ -3521,20 +3158,83 @@
       </p:sp>
       <p:pic>
         <p:nvPicPr>
-          <p:cNvPr id="28" name="Image 5" descr="preencoded.png">    </p:cNvPr>
+          <p:cNvPr id="26" name="Image 4" descr="preencoded.png"/>
           <p:cNvPicPr>
             <a:picLocks noChangeAspect="1"/>
           </p:cNvPicPr>
           <p:nvPr/>
         </p:nvPicPr>
         <p:blipFill>
-          <a:blip r:embed="rId6"/>
+          <a:blip r:embed="rId4"/>
           <a:stretch>
             <a:fillRect/>
           </a:stretch>
         </p:blipFill>
         <p:spPr>
           <a:xfrm>
+            <a:off x="4297680" y="3465576"/>
+            <a:ext cx="182880" cy="182880"/>
+          </a:xfrm>
+          <a:prstGeom prst="rect">
+            <a:avLst/>
+          </a:prstGeom>
+        </p:spPr>
+      </p:pic>
+      <p:sp>
+        <p:nvSpPr>
+          <p:cNvPr id="27" name="Text 20"/>
+          <p:cNvSpPr/>
+          <p:nvPr/>
+        </p:nvSpPr>
+        <p:spPr>
+          <a:xfrm>
+            <a:off x="4572000" y="3419856"/>
+            <a:ext cx="3931920" cy="256032"/>
+          </a:xfrm>
+          <a:prstGeom prst="rect">
+            <a:avLst/>
+          </a:prstGeom>
+          <a:noFill/>
+          <a:ln/>
+        </p:spPr>
+        <p:txBody>
+          <a:bodyPr wrap="square" lIns="0" tIns="0" rIns="0" bIns="0" rtlCol="0" anchor="ctr"/>
+          <a:lstStyle/>
+          <a:p>
+            <a:pPr marL="0" indent="0">
+              <a:buNone/>
+            </a:pPr>
+            <a:r>
+              <a:rPr lang="en-US" sz="1250" dirty="0">
+                <a:solidFill>
+                  <a:srgbClr val="141413"/>
+                </a:solidFill>
+                <a:latin typeface="Inter" pitchFamily="34" charset="0"/>
+                <a:ea typeface="Inter" pitchFamily="34" charset="-122"/>
+                <a:cs typeface="Inter" pitchFamily="34" charset="-120"/>
+              </a:rPr>
+              <a:t>Recommendations are grounded</a:t>
+            </a:r>
+            <a:endParaRPr lang="en-US" sz="1250" dirty="0"/>
+          </a:p>
+        </p:txBody>
+      </p:sp>
+      <p:pic>
+        <p:nvPicPr>
+          <p:cNvPr id="28" name="Image 5" descr="preencoded.png"/>
+          <p:cNvPicPr>
+            <a:picLocks noChangeAspect="1"/>
+          </p:cNvPicPr>
+          <p:nvPr/>
+        </p:nvPicPr>
+        <p:blipFill>
+          <a:blip r:embed="rId4"/>
+          <a:stretch>
+            <a:fillRect/>
+          </a:stretch>
+        </p:blipFill>
+        <p:spPr>
+          <a:xfrm>
             <a:off x="4297680" y="3749040"/>
             <a:ext cx="182880" cy="182880"/>
           </a:xfrm>
@@ -3564,7 +3264,7 @@
           <a:bodyPr wrap="square" lIns="0" tIns="0" rIns="0" bIns="0" rtlCol="0" anchor="ctr"/>
           <a:lstStyle/>
           <a:p>
-            <a:pPr indent="0" marL="0">
+            <a:pPr marL="0" indent="0">
               <a:buNone/>
             </a:pPr>
             <a:r>
@@ -3603,7 +3303,7 @@
           <a:bodyPr wrap="square" rtlCol="0" anchor="ctr"/>
           <a:lstStyle/>
           <a:p>
-            <a:pPr indent="0" marL="0">
+            <a:pPr marL="0" indent="0">
               <a:buNone/>
             </a:pPr>
             <a:r>
@@ -3642,7 +3342,7 @@
           <a:bodyPr wrap="square" rtlCol="0" anchor="ctr"/>
           <a:lstStyle/>
           <a:p>
-            <a:pPr algn="r" indent="0" marL="0">
+            <a:pPr marL="0" indent="0" algn="r">
               <a:buNone/>
             </a:pPr>
             <a:r>
@@ -3657,45 +3357,6 @@
               <a:t>Day 2 · Section 3  ·  12/12</a:t>
             </a:r>
             <a:endParaRPr lang="en-US" sz="900" dirty="0"/>
-          </a:p>
-        </p:txBody>
-      </p:sp>
-      <p:sp>
-        <p:nvSpPr>
-          <p:cNvPr id="32" name="Text 24"/>
-          <p:cNvSpPr/>
-          <p:nvPr/>
-        </p:nvSpPr>
-        <p:spPr>
-          <a:xfrm>
-            <a:off x="548640" y="4462272"/>
-            <a:ext cx="8046720" cy="274320"/>
-          </a:xfrm>
-          <a:prstGeom prst="rect">
-            <a:avLst/>
-          </a:prstGeom>
-          <a:noFill/>
-          <a:ln/>
-        </p:spPr>
-        <p:txBody>
-          <a:bodyPr wrap="square" lIns="0" tIns="0" rIns="0" bIns="0" rtlCol="0" anchor="ctr"/>
-          <a:lstStyle/>
-          <a:p>
-            <a:pPr indent="0" marL="0">
-              <a:buNone/>
-            </a:pPr>
-            <a:r>
-              <a:rPr lang="en-US" sz="1000" i="1" dirty="0">
-                <a:solidFill>
-                  <a:srgbClr val="615C52"/>
-                </a:solidFill>
-                <a:latin typeface="Inter" pitchFamily="34" charset="0"/>
-                <a:ea typeface="Inter" pitchFamily="34" charset="-122"/>
-                <a:cs typeface="Inter" pitchFamily="34" charset="-120"/>
-              </a:rPr>
-              <a:t>▸ Done = grounded /api/recommend plus a clear grounded-vs-ungrounded comparison.</a:t>
-            </a:r>
-            <a:endParaRPr lang="en-US" sz="1000" dirty="0"/>
           </a:p>
         </p:txBody>
       </p:sp>
@@ -3715,6 +3376,7 @@
         <a:solidFill>
           <a:srgbClr val="F0EEE6"/>
         </a:solidFill>
+        <a:effectLst/>
       </p:bgPr>
     </p:bg>
     <p:spTree>
@@ -3752,11 +3414,11 @@
           <a:bodyPr wrap="square" lIns="0" tIns="0" rIns="0" bIns="0" rtlCol="0" anchor="ctr"/>
           <a:lstStyle/>
           <a:p>
-            <a:pPr indent="0" marL="0">
-              <a:buNone/>
-            </a:pPr>
-            <a:r>
-              <a:rPr lang="en-US" sz="1100" b="1" spc="200" kern="0" dirty="0">
+            <a:pPr marL="0" indent="0">
+              <a:buNone/>
+            </a:pPr>
+            <a:r>
+              <a:rPr lang="en-US" sz="1100" b="1" kern="0" spc="200" dirty="0">
                 <a:solidFill>
                   <a:srgbClr val="C25E40"/>
                 </a:solidFill>
@@ -3791,7 +3453,7 @@
           <a:bodyPr wrap="square" lIns="0" tIns="0" rIns="0" bIns="0" rtlCol="0" anchor="ctr"/>
           <a:lstStyle/>
           <a:p>
-            <a:pPr indent="0" marL="0">
+            <a:pPr marL="0" indent="0">
               <a:buNone/>
             </a:pPr>
             <a:r>
@@ -3811,51 +3473,7 @@
       </p:sp>
       <p:pic>
         <p:nvPicPr>
-          <p:cNvPr id="4" name="Image 0" descr="preencoded.png">    </p:cNvPr>
-          <p:cNvPicPr>
-            <a:picLocks noChangeAspect="1"/>
-          </p:cNvPicPr>
-          <p:nvPr/>
-        </p:nvPicPr>
-        <p:blipFill>
-          <a:blip r:embed="rId1"/>
-          <a:stretch>
-            <a:fillRect/>
-          </a:stretch>
-        </p:blipFill>
-        <p:spPr>
-          <a:xfrm>
-            <a:off x="8339328" y="402336"/>
-            <a:ext cx="310896" cy="310896"/>
-          </a:xfrm>
-          <a:prstGeom prst="rect">
-            <a:avLst/>
-          </a:prstGeom>
-        </p:spPr>
-      </p:pic>
-      <p:sp>
-        <p:nvSpPr>
-          <p:cNvPr id="5" name="Shape 2"/>
-          <p:cNvSpPr/>
-          <p:nvPr/>
-        </p:nvSpPr>
-        <p:spPr>
-          <a:xfrm>
-            <a:off x="566928" y="1444752"/>
-            <a:ext cx="329184" cy="329184"/>
-          </a:xfrm>
-          <a:prstGeom prst="ellipse">
-            <a:avLst/>
-          </a:prstGeom>
-          <a:solidFill>
-            <a:srgbClr val="D97757"/>
-          </a:solidFill>
-          <a:ln/>
-        </p:spPr>
-      </p:sp>
-      <p:pic>
-        <p:nvPicPr>
-          <p:cNvPr id="6" name="Image 1" descr="preencoded.png">    </p:cNvPr>
+          <p:cNvPr id="4" name="Image 0" descr="preencoded.png"/>
           <p:cNvPicPr>
             <a:picLocks noChangeAspect="1"/>
           </p:cNvPicPr>
@@ -3869,8 +3487,8 @@
         </p:blipFill>
         <p:spPr>
           <a:xfrm>
-            <a:off x="652516" y="1530340"/>
-            <a:ext cx="158008" cy="158008"/>
+            <a:off x="8339328" y="402336"/>
+            <a:ext cx="310896" cy="310896"/>
           </a:xfrm>
           <a:prstGeom prst="rect">
             <a:avLst/>
@@ -3879,52 +3497,13 @@
       </p:pic>
       <p:sp>
         <p:nvSpPr>
-          <p:cNvPr id="7" name="Text 3"/>
-          <p:cNvSpPr/>
-          <p:nvPr/>
-        </p:nvSpPr>
-        <p:spPr>
-          <a:xfrm>
-            <a:off x="1051560" y="1417320"/>
-            <a:ext cx="7406640" cy="457200"/>
-          </a:xfrm>
-          <a:prstGeom prst="rect">
-            <a:avLst/>
-          </a:prstGeom>
-          <a:noFill/>
-          <a:ln/>
-        </p:spPr>
-        <p:txBody>
-          <a:bodyPr wrap="square" lIns="0" tIns="0" rIns="0" bIns="0" rtlCol="0" anchor="ctr"/>
-          <a:lstStyle/>
-          <a:p>
-            <a:pPr indent="0" marL="0">
-              <a:buNone/>
-            </a:pPr>
-            <a:r>
-              <a:rPr lang="en-US" sz="1600" dirty="0">
-                <a:solidFill>
-                  <a:srgbClr val="141413"/>
-                </a:solidFill>
-                <a:latin typeface="Inter" pitchFamily="34" charset="0"/>
-                <a:ea typeface="Inter" pitchFamily="34" charset="-122"/>
-                <a:cs typeface="Inter" pitchFamily="34" charset="-120"/>
-              </a:rPr>
-              <a:t>Explain RAG vs fine-tuning</a:t>
-            </a:r>
-            <a:endParaRPr lang="en-US" sz="1600" dirty="0"/>
-          </a:p>
-        </p:txBody>
-      </p:sp>
-      <p:sp>
-        <p:nvSpPr>
-          <p:cNvPr id="8" name="Shape 4"/>
-          <p:cNvSpPr/>
-          <p:nvPr/>
-        </p:nvSpPr>
-        <p:spPr>
-          <a:xfrm>
-            <a:off x="566928" y="1901952"/>
+          <p:cNvPr id="5" name="Shape 2"/>
+          <p:cNvSpPr/>
+          <p:nvPr/>
+        </p:nvSpPr>
+        <p:spPr>
+          <a:xfrm>
+            <a:off x="566928" y="1444752"/>
             <a:ext cx="329184" cy="329184"/>
           </a:xfrm>
           <a:prstGeom prst="ellipse">
@@ -3935,10 +3514,17 @@
           </a:solidFill>
           <a:ln/>
         </p:spPr>
+        <p:txBody>
+          <a:bodyPr/>
+          <a:lstStyle/>
+          <a:p>
+            <a:endParaRPr lang="en-US"/>
+          </a:p>
+        </p:txBody>
       </p:sp>
       <p:pic>
         <p:nvPicPr>
-          <p:cNvPr id="9" name="Image 2" descr="preencoded.png">    </p:cNvPr>
+          <p:cNvPr id="6" name="Image 1" descr="preencoded.png"/>
           <p:cNvPicPr>
             <a:picLocks noChangeAspect="1"/>
           </p:cNvPicPr>
@@ -3952,7 +3538,7 @@
         </p:blipFill>
         <p:spPr>
           <a:xfrm>
-            <a:off x="652516" y="1987540"/>
+            <a:off x="652516" y="1530340"/>
             <a:ext cx="158008" cy="158008"/>
           </a:xfrm>
           <a:prstGeom prst="rect">
@@ -3962,13 +3548,13 @@
       </p:pic>
       <p:sp>
         <p:nvSpPr>
-          <p:cNvPr id="10" name="Text 5"/>
-          <p:cNvSpPr/>
-          <p:nvPr/>
-        </p:nvSpPr>
-        <p:spPr>
-          <a:xfrm>
-            <a:off x="1051560" y="1874520"/>
+          <p:cNvPr id="7" name="Text 3"/>
+          <p:cNvSpPr/>
+          <p:nvPr/>
+        </p:nvSpPr>
+        <p:spPr>
+          <a:xfrm>
+            <a:off x="1051560" y="1417320"/>
             <a:ext cx="7406640" cy="457200"/>
           </a:xfrm>
           <a:prstGeom prst="rect">
@@ -3981,7 +3567,7 @@
           <a:bodyPr wrap="square" lIns="0" tIns="0" rIns="0" bIns="0" rtlCol="0" anchor="ctr"/>
           <a:lstStyle/>
           <a:p>
-            <a:pPr indent="0" marL="0">
+            <a:pPr marL="0" indent="0">
               <a:buNone/>
             </a:pPr>
             <a:r>
@@ -3993,7 +3579,7 @@
                 <a:ea typeface="Inter" pitchFamily="34" charset="-122"/>
                 <a:cs typeface="Inter" pitchFamily="34" charset="-120"/>
               </a:rPr>
-              <a:t>Apply chunking strategies in C#</a:t>
+              <a:t>Explain RAG vs fine-tuning</a:t>
             </a:r>
             <a:endParaRPr lang="en-US" sz="1600" dirty="0"/>
           </a:p>
@@ -4001,13 +3587,13 @@
       </p:sp>
       <p:sp>
         <p:nvSpPr>
-          <p:cNvPr id="11" name="Shape 6"/>
-          <p:cNvSpPr/>
-          <p:nvPr/>
-        </p:nvSpPr>
-        <p:spPr>
-          <a:xfrm>
-            <a:off x="566928" y="2359152"/>
+          <p:cNvPr id="8" name="Shape 4"/>
+          <p:cNvSpPr/>
+          <p:nvPr/>
+        </p:nvSpPr>
+        <p:spPr>
+          <a:xfrm>
+            <a:off x="566928" y="1901952"/>
             <a:ext cx="329184" cy="329184"/>
           </a:xfrm>
           <a:prstGeom prst="ellipse">
@@ -4018,24 +3604,31 @@
           </a:solidFill>
           <a:ln/>
         </p:spPr>
+        <p:txBody>
+          <a:bodyPr/>
+          <a:lstStyle/>
+          <a:p>
+            <a:endParaRPr lang="en-US"/>
+          </a:p>
+        </p:txBody>
       </p:sp>
       <p:pic>
         <p:nvPicPr>
-          <p:cNvPr id="12" name="Image 3" descr="preencoded.png">    </p:cNvPr>
+          <p:cNvPr id="9" name="Image 2" descr="preencoded.png"/>
           <p:cNvPicPr>
             <a:picLocks noChangeAspect="1"/>
           </p:cNvPicPr>
           <p:nvPr/>
         </p:nvPicPr>
         <p:blipFill>
-          <a:blip r:embed="rId4"/>
+          <a:blip r:embed="rId3"/>
           <a:stretch>
             <a:fillRect/>
           </a:stretch>
         </p:blipFill>
         <p:spPr>
           <a:xfrm>
-            <a:off x="652516" y="2444740"/>
+            <a:off x="652516" y="1987540"/>
             <a:ext cx="158008" cy="158008"/>
           </a:xfrm>
           <a:prstGeom prst="rect">
@@ -4045,13 +3638,13 @@
       </p:pic>
       <p:sp>
         <p:nvSpPr>
-          <p:cNvPr id="13" name="Text 7"/>
-          <p:cNvSpPr/>
-          <p:nvPr/>
-        </p:nvSpPr>
-        <p:spPr>
-          <a:xfrm>
-            <a:off x="1051560" y="2331720"/>
+          <p:cNvPr id="10" name="Text 5"/>
+          <p:cNvSpPr/>
+          <p:nvPr/>
+        </p:nvSpPr>
+        <p:spPr>
+          <a:xfrm>
+            <a:off x="1051560" y="1874520"/>
             <a:ext cx="7406640" cy="457200"/>
           </a:xfrm>
           <a:prstGeom prst="rect">
@@ -4064,7 +3657,7 @@
           <a:bodyPr wrap="square" lIns="0" tIns="0" rIns="0" bIns="0" rtlCol="0" anchor="ctr"/>
           <a:lstStyle/>
           <a:p>
-            <a:pPr indent="0" marL="0">
+            <a:pPr marL="0" indent="0">
               <a:buNone/>
             </a:pPr>
             <a:r>
@@ -4076,7 +3669,7 @@
                 <a:ea typeface="Inter" pitchFamily="34" charset="-122"/>
                 <a:cs typeface="Inter" pitchFamily="34" charset="-120"/>
               </a:rPr>
-              <a:t>Generate embeddings (OpenAI or local Ollama)</a:t>
+              <a:t>Apply chunking strategies in C#</a:t>
             </a:r>
             <a:endParaRPr lang="en-US" sz="1600" dirty="0"/>
           </a:p>
@@ -4084,13 +3677,13 @@
       </p:sp>
       <p:sp>
         <p:nvSpPr>
-          <p:cNvPr id="14" name="Shape 8"/>
-          <p:cNvSpPr/>
-          <p:nvPr/>
-        </p:nvSpPr>
-        <p:spPr>
-          <a:xfrm>
-            <a:off x="566928" y="2816352"/>
+          <p:cNvPr id="11" name="Shape 6"/>
+          <p:cNvSpPr/>
+          <p:nvPr/>
+        </p:nvSpPr>
+        <p:spPr>
+          <a:xfrm>
+            <a:off x="566928" y="2359152"/>
             <a:ext cx="329184" cy="329184"/>
           </a:xfrm>
           <a:prstGeom prst="ellipse">
@@ -4101,24 +3694,31 @@
           </a:solidFill>
           <a:ln/>
         </p:spPr>
+        <p:txBody>
+          <a:bodyPr/>
+          <a:lstStyle/>
+          <a:p>
+            <a:endParaRPr lang="en-US"/>
+          </a:p>
+        </p:txBody>
       </p:sp>
       <p:pic>
         <p:nvPicPr>
-          <p:cNvPr id="15" name="Image 4" descr="preencoded.png">    </p:cNvPr>
+          <p:cNvPr id="12" name="Image 3" descr="preencoded.png"/>
           <p:cNvPicPr>
             <a:picLocks noChangeAspect="1"/>
           </p:cNvPicPr>
           <p:nvPr/>
         </p:nvPicPr>
         <p:blipFill>
-          <a:blip r:embed="rId5"/>
+          <a:blip r:embed="rId3"/>
           <a:stretch>
             <a:fillRect/>
           </a:stretch>
         </p:blipFill>
         <p:spPr>
           <a:xfrm>
-            <a:off x="652516" y="2901940"/>
+            <a:off x="652516" y="2444740"/>
             <a:ext cx="158008" cy="158008"/>
           </a:xfrm>
           <a:prstGeom prst="rect">
@@ -4128,13 +3728,13 @@
       </p:pic>
       <p:sp>
         <p:nvSpPr>
-          <p:cNvPr id="16" name="Text 9"/>
-          <p:cNvSpPr/>
-          <p:nvPr/>
-        </p:nvSpPr>
-        <p:spPr>
-          <a:xfrm>
-            <a:off x="1051560" y="2788920"/>
+          <p:cNvPr id="13" name="Text 7"/>
+          <p:cNvSpPr/>
+          <p:nvPr/>
+        </p:nvSpPr>
+        <p:spPr>
+          <a:xfrm>
+            <a:off x="1051560" y="2331720"/>
             <a:ext cx="7406640" cy="457200"/>
           </a:xfrm>
           <a:prstGeom prst="rect">
@@ -4147,7 +3747,7 @@
           <a:bodyPr wrap="square" lIns="0" tIns="0" rIns="0" bIns="0" rtlCol="0" anchor="ctr"/>
           <a:lstStyle/>
           <a:p>
-            <a:pPr indent="0" marL="0">
+            <a:pPr marL="0" indent="0">
               <a:buNone/>
             </a:pPr>
             <a:r>
@@ -4159,7 +3759,7 @@
                 <a:ea typeface="Inter" pitchFamily="34" charset="-122"/>
                 <a:cs typeface="Inter" pitchFamily="34" charset="-120"/>
               </a:rPr>
-              <a:t>Store &amp; query vectors in Qdrant</a:t>
+              <a:t>Generate embeddings (OpenAI or local Ollama)</a:t>
             </a:r>
             <a:endParaRPr lang="en-US" sz="1600" dirty="0"/>
           </a:p>
@@ -4167,13 +3767,13 @@
       </p:sp>
       <p:sp>
         <p:nvSpPr>
-          <p:cNvPr id="17" name="Shape 10"/>
-          <p:cNvSpPr/>
-          <p:nvPr/>
-        </p:nvSpPr>
-        <p:spPr>
-          <a:xfrm>
-            <a:off x="566928" y="3273552"/>
+          <p:cNvPr id="14" name="Shape 8"/>
+          <p:cNvSpPr/>
+          <p:nvPr/>
+        </p:nvSpPr>
+        <p:spPr>
+          <a:xfrm>
+            <a:off x="566928" y="2816352"/>
             <a:ext cx="329184" cy="329184"/>
           </a:xfrm>
           <a:prstGeom prst="ellipse">
@@ -4184,24 +3784,31 @@
           </a:solidFill>
           <a:ln/>
         </p:spPr>
+        <p:txBody>
+          <a:bodyPr/>
+          <a:lstStyle/>
+          <a:p>
+            <a:endParaRPr lang="en-US"/>
+          </a:p>
+        </p:txBody>
       </p:sp>
       <p:pic>
         <p:nvPicPr>
-          <p:cNvPr id="18" name="Image 5" descr="preencoded.png">    </p:cNvPr>
+          <p:cNvPr id="15" name="Image 4" descr="preencoded.png"/>
           <p:cNvPicPr>
             <a:picLocks noChangeAspect="1"/>
           </p:cNvPicPr>
           <p:nvPr/>
         </p:nvPicPr>
         <p:blipFill>
-          <a:blip r:embed="rId6"/>
+          <a:blip r:embed="rId3"/>
           <a:stretch>
             <a:fillRect/>
           </a:stretch>
         </p:blipFill>
         <p:spPr>
           <a:xfrm>
-            <a:off x="652516" y="3359140"/>
+            <a:off x="652516" y="2901940"/>
             <a:ext cx="158008" cy="158008"/>
           </a:xfrm>
           <a:prstGeom prst="rect">
@@ -4211,13 +3818,13 @@
       </p:pic>
       <p:sp>
         <p:nvSpPr>
-          <p:cNvPr id="19" name="Text 11"/>
-          <p:cNvSpPr/>
-          <p:nvPr/>
-        </p:nvSpPr>
-        <p:spPr>
-          <a:xfrm>
-            <a:off x="1051560" y="3246120"/>
+          <p:cNvPr id="16" name="Text 9"/>
+          <p:cNvSpPr/>
+          <p:nvPr/>
+        </p:nvSpPr>
+        <p:spPr>
+          <a:xfrm>
+            <a:off x="1051560" y="2788920"/>
             <a:ext cx="7406640" cy="457200"/>
           </a:xfrm>
           <a:prstGeom prst="rect">
@@ -4230,7 +3837,7 @@
           <a:bodyPr wrap="square" lIns="0" tIns="0" rIns="0" bIns="0" rtlCol="0" anchor="ctr"/>
           <a:lstStyle/>
           <a:p>
-            <a:pPr indent="0" marL="0">
+            <a:pPr marL="0" indent="0">
               <a:buNone/>
             </a:pPr>
             <a:r>
@@ -4242,7 +3849,7 @@
                 <a:ea typeface="Inter" pitchFamily="34" charset="-122"/>
                 <a:cs typeface="Inter" pitchFamily="34" charset="-120"/>
               </a:rPr>
-              <a:t>Retrieve by cosine similarity &amp; augment prompts</a:t>
+              <a:t>Store &amp; query vectors in Qdrant</a:t>
             </a:r>
             <a:endParaRPr lang="en-US" sz="1600" dirty="0"/>
           </a:p>
@@ -4250,13 +3857,13 @@
       </p:sp>
       <p:sp>
         <p:nvSpPr>
-          <p:cNvPr id="20" name="Shape 12"/>
-          <p:cNvSpPr/>
-          <p:nvPr/>
-        </p:nvSpPr>
-        <p:spPr>
-          <a:xfrm>
-            <a:off x="566928" y="3730752"/>
+          <p:cNvPr id="17" name="Shape 10"/>
+          <p:cNvSpPr/>
+          <p:nvPr/>
+        </p:nvSpPr>
+        <p:spPr>
+          <a:xfrm>
+            <a:off x="566928" y="3273552"/>
             <a:ext cx="329184" cy="329184"/>
           </a:xfrm>
           <a:prstGeom prst="ellipse">
@@ -4267,23 +3874,120 @@
           </a:solidFill>
           <a:ln/>
         </p:spPr>
+        <p:txBody>
+          <a:bodyPr/>
+          <a:lstStyle/>
+          <a:p>
+            <a:endParaRPr lang="en-US"/>
+          </a:p>
+        </p:txBody>
       </p:sp>
       <p:pic>
         <p:nvPicPr>
-          <p:cNvPr id="21" name="Image 6" descr="preencoded.png">    </p:cNvPr>
+          <p:cNvPr id="18" name="Image 5" descr="preencoded.png"/>
           <p:cNvPicPr>
             <a:picLocks noChangeAspect="1"/>
           </p:cNvPicPr>
           <p:nvPr/>
         </p:nvPicPr>
         <p:blipFill>
-          <a:blip r:embed="rId7"/>
+          <a:blip r:embed="rId3"/>
           <a:stretch>
             <a:fillRect/>
           </a:stretch>
         </p:blipFill>
         <p:spPr>
           <a:xfrm>
+            <a:off x="652516" y="3359140"/>
+            <a:ext cx="158008" cy="158008"/>
+          </a:xfrm>
+          <a:prstGeom prst="rect">
+            <a:avLst/>
+          </a:prstGeom>
+        </p:spPr>
+      </p:pic>
+      <p:sp>
+        <p:nvSpPr>
+          <p:cNvPr id="19" name="Text 11"/>
+          <p:cNvSpPr/>
+          <p:nvPr/>
+        </p:nvSpPr>
+        <p:spPr>
+          <a:xfrm>
+            <a:off x="1051560" y="3246120"/>
+            <a:ext cx="7406640" cy="457200"/>
+          </a:xfrm>
+          <a:prstGeom prst="rect">
+            <a:avLst/>
+          </a:prstGeom>
+          <a:noFill/>
+          <a:ln/>
+        </p:spPr>
+        <p:txBody>
+          <a:bodyPr wrap="square" lIns="0" tIns="0" rIns="0" bIns="0" rtlCol="0" anchor="ctr"/>
+          <a:lstStyle/>
+          <a:p>
+            <a:pPr marL="0" indent="0">
+              <a:buNone/>
+            </a:pPr>
+            <a:r>
+              <a:rPr lang="en-US" sz="1600" dirty="0">
+                <a:solidFill>
+                  <a:srgbClr val="141413"/>
+                </a:solidFill>
+                <a:latin typeface="Inter" pitchFamily="34" charset="0"/>
+                <a:ea typeface="Inter" pitchFamily="34" charset="-122"/>
+                <a:cs typeface="Inter" pitchFamily="34" charset="-120"/>
+              </a:rPr>
+              <a:t>Retrieve by cosine similarity &amp; augment prompts</a:t>
+            </a:r>
+            <a:endParaRPr lang="en-US" sz="1600" dirty="0"/>
+          </a:p>
+        </p:txBody>
+      </p:sp>
+      <p:sp>
+        <p:nvSpPr>
+          <p:cNvPr id="20" name="Shape 12"/>
+          <p:cNvSpPr/>
+          <p:nvPr/>
+        </p:nvSpPr>
+        <p:spPr>
+          <a:xfrm>
+            <a:off x="566928" y="3730752"/>
+            <a:ext cx="329184" cy="329184"/>
+          </a:xfrm>
+          <a:prstGeom prst="ellipse">
+            <a:avLst/>
+          </a:prstGeom>
+          <a:solidFill>
+            <a:srgbClr val="D97757"/>
+          </a:solidFill>
+          <a:ln/>
+        </p:spPr>
+        <p:txBody>
+          <a:bodyPr/>
+          <a:lstStyle/>
+          <a:p>
+            <a:endParaRPr lang="en-US"/>
+          </a:p>
+        </p:txBody>
+      </p:sp>
+      <p:pic>
+        <p:nvPicPr>
+          <p:cNvPr id="21" name="Image 6" descr="preencoded.png"/>
+          <p:cNvPicPr>
+            <a:picLocks noChangeAspect="1"/>
+          </p:cNvPicPr>
+          <p:nvPr/>
+        </p:nvPicPr>
+        <p:blipFill>
+          <a:blip r:embed="rId3"/>
+          <a:stretch>
+            <a:fillRect/>
+          </a:stretch>
+        </p:blipFill>
+        <p:spPr>
+          <a:xfrm>
             <a:off x="652516" y="3816340"/>
             <a:ext cx="158008" cy="158008"/>
           </a:xfrm>
@@ -4313,7 +4017,7 @@
           <a:bodyPr wrap="square" lIns="0" tIns="0" rIns="0" bIns="0" rtlCol="0" anchor="ctr"/>
           <a:lstStyle/>
           <a:p>
-            <a:pPr indent="0" marL="0">
+            <a:pPr marL="0" indent="0">
               <a:buNone/>
             </a:pPr>
             <a:r>
@@ -4352,7 +4056,7 @@
           <a:bodyPr wrap="square" rtlCol="0" anchor="ctr"/>
           <a:lstStyle/>
           <a:p>
-            <a:pPr indent="0" marL="0">
+            <a:pPr marL="0" indent="0">
               <a:buNone/>
             </a:pPr>
             <a:r>
@@ -4391,7 +4095,7 @@
           <a:bodyPr wrap="square" rtlCol="0" anchor="ctr"/>
           <a:lstStyle/>
           <a:p>
-            <a:pPr algn="r" indent="0" marL="0">
+            <a:pPr marL="0" indent="0" algn="r">
               <a:buNone/>
             </a:pPr>
             <a:r>
@@ -4406,45 +4110,6 @@
               <a:t>Day 2 · Section 3  ·  2/12</a:t>
             </a:r>
             <a:endParaRPr lang="en-US" sz="900" dirty="0"/>
-          </a:p>
-        </p:txBody>
-      </p:sp>
-      <p:sp>
-        <p:nvSpPr>
-          <p:cNvPr id="25" name="Text 16"/>
-          <p:cNvSpPr/>
-          <p:nvPr/>
-        </p:nvSpPr>
-        <p:spPr>
-          <a:xfrm>
-            <a:off x="548640" y="4462272"/>
-            <a:ext cx="8046720" cy="274320"/>
-          </a:xfrm>
-          <a:prstGeom prst="rect">
-            <a:avLst/>
-          </a:prstGeom>
-          <a:noFill/>
-          <a:ln/>
-        </p:spPr>
-        <p:txBody>
-          <a:bodyPr wrap="square" lIns="0" tIns="0" rIns="0" bIns="0" rtlCol="0" anchor="ctr"/>
-          <a:lstStyle/>
-          <a:p>
-            <a:pPr indent="0" marL="0">
-              <a:buNone/>
-            </a:pPr>
-            <a:r>
-              <a:rPr lang="en-US" sz="1000" i="1" dirty="0">
-                <a:solidFill>
-                  <a:srgbClr val="615C52"/>
-                </a:solidFill>
-                <a:latin typeface="Inter" pitchFamily="34" charset="0"/>
-                <a:ea typeface="Inter" pitchFamily="34" charset="-122"/>
-                <a:cs typeface="Inter" pitchFamily="34" charset="-120"/>
-              </a:rPr>
-              <a:t>▸ Six objectives tracing the whole pipeline — chunk, embed, store, retrieve, evaluate.</a:t>
-            </a:r>
-            <a:endParaRPr lang="en-US" sz="1000" dirty="0"/>
           </a:p>
         </p:txBody>
       </p:sp>
@@ -4464,6 +4129,7 @@
         <a:solidFill>
           <a:srgbClr val="F0EEE6"/>
         </a:solidFill>
+        <a:effectLst/>
       </p:bgPr>
     </p:bg>
     <p:spTree>
@@ -4501,11 +4167,11 @@
           <a:bodyPr wrap="square" lIns="0" tIns="0" rIns="0" bIns="0" rtlCol="0" anchor="ctr"/>
           <a:lstStyle/>
           <a:p>
-            <a:pPr indent="0" marL="0">
-              <a:buNone/>
-            </a:pPr>
-            <a:r>
-              <a:rPr lang="en-US" sz="1100" b="1" spc="200" kern="0" dirty="0">
+            <a:pPr marL="0" indent="0">
+              <a:buNone/>
+            </a:pPr>
+            <a:r>
+              <a:rPr lang="en-US" sz="1100" b="1" kern="0" spc="200" dirty="0">
                 <a:solidFill>
                   <a:srgbClr val="C25E40"/>
                 </a:solidFill>
@@ -4540,7 +4206,7 @@
           <a:bodyPr wrap="square" lIns="0" tIns="0" rIns="0" bIns="0" rtlCol="0" anchor="ctr"/>
           <a:lstStyle/>
           <a:p>
-            <a:pPr indent="0" marL="0">
+            <a:pPr marL="0" indent="0">
               <a:buNone/>
             </a:pPr>
             <a:r>
@@ -4560,14 +4226,14 @@
       </p:sp>
       <p:pic>
         <p:nvPicPr>
-          <p:cNvPr id="4" name="Image 0" descr="preencoded.png">    </p:cNvPr>
+          <p:cNvPr id="4" name="Image 0" descr="preencoded.png"/>
           <p:cNvPicPr>
             <a:picLocks noChangeAspect="1"/>
           </p:cNvPicPr>
           <p:nvPr/>
         </p:nvPicPr>
         <p:blipFill>
-          <a:blip r:embed="rId1"/>
+          <a:blip r:embed="rId2"/>
           <a:stretch>
             <a:fillRect/>
           </a:stretch>
@@ -4608,13 +4274,20 @@
             <a:prstDash val="solid"/>
           </a:ln>
           <a:effectLst>
-            <a:outerShdw sx="100000" sy="100000" kx="0" ky="0" algn="bl" rotWithShape="0" blurRad="88900" dist="38100" dir="5400000">
+            <a:outerShdw blurRad="88900" dist="38100" dir="5400000" algn="bl" rotWithShape="0">
               <a:srgbClr val="000000">
                 <a:alpha val="10000"/>
               </a:srgbClr>
             </a:outerShdw>
           </a:effectLst>
         </p:spPr>
+        <p:txBody>
+          <a:bodyPr/>
+          <a:lstStyle/>
+          <a:p>
+            <a:endParaRPr lang="en-US"/>
+          </a:p>
+        </p:txBody>
       </p:sp>
       <p:sp>
         <p:nvSpPr>
@@ -4635,17 +4308,24 @@
           </a:solidFill>
           <a:ln/>
         </p:spPr>
+        <p:txBody>
+          <a:bodyPr/>
+          <a:lstStyle/>
+          <a:p>
+            <a:endParaRPr lang="en-US"/>
+          </a:p>
+        </p:txBody>
       </p:sp>
       <p:pic>
         <p:nvPicPr>
-          <p:cNvPr id="7" name="Image 1" descr="preencoded.png">    </p:cNvPr>
+          <p:cNvPr id="7" name="Image 1" descr="preencoded.png"/>
           <p:cNvPicPr>
             <a:picLocks noChangeAspect="1"/>
           </p:cNvPicPr>
           <p:nvPr/>
         </p:nvPicPr>
         <p:blipFill>
-          <a:blip r:embed="rId2"/>
+          <a:blip r:embed="rId3"/>
           <a:stretch>
             <a:fillRect/>
           </a:stretch>
@@ -4681,7 +4361,7 @@
           <a:bodyPr wrap="square" lIns="0" tIns="0" rIns="0" bIns="0" rtlCol="0" anchor="ctr"/>
           <a:lstStyle/>
           <a:p>
-            <a:pPr indent="0" marL="0">
+            <a:pPr marL="0" indent="0">
               <a:buNone/>
             </a:pPr>
             <a:r>
@@ -4720,7 +4400,7 @@
           <a:bodyPr wrap="square" lIns="0" tIns="0" rIns="0" bIns="0" rtlCol="0" anchor="ctr"/>
           <a:lstStyle/>
           <a:p>
-            <a:pPr indent="0" marL="0">
+            <a:pPr marL="0" indent="0">
               <a:buNone/>
             </a:pPr>
             <a:r>
@@ -4849,13 +4529,20 @@
             <a:prstDash val="solid"/>
           </a:ln>
           <a:effectLst>
-            <a:outerShdw sx="100000" sy="100000" kx="0" ky="0" algn="bl" rotWithShape="0" blurRad="88900" dist="38100" dir="5400000">
+            <a:outerShdw blurRad="88900" dist="38100" dir="5400000" algn="bl" rotWithShape="0">
               <a:srgbClr val="000000">
                 <a:alpha val="10000"/>
               </a:srgbClr>
             </a:outerShdw>
           </a:effectLst>
         </p:spPr>
+        <p:txBody>
+          <a:bodyPr/>
+          <a:lstStyle/>
+          <a:p>
+            <a:endParaRPr lang="en-US"/>
+          </a:p>
+        </p:txBody>
       </p:sp>
       <p:sp>
         <p:nvSpPr>
@@ -4876,17 +4563,24 @@
           </a:solidFill>
           <a:ln/>
         </p:spPr>
+        <p:txBody>
+          <a:bodyPr/>
+          <a:lstStyle/>
+          <a:p>
+            <a:endParaRPr lang="en-US"/>
+          </a:p>
+        </p:txBody>
       </p:sp>
       <p:pic>
         <p:nvPicPr>
-          <p:cNvPr id="13" name="Image 2" descr="preencoded.png">    </p:cNvPr>
+          <p:cNvPr id="13" name="Image 2" descr="preencoded.png"/>
           <p:cNvPicPr>
             <a:picLocks noChangeAspect="1"/>
           </p:cNvPicPr>
           <p:nvPr/>
         </p:nvPicPr>
         <p:blipFill>
-          <a:blip r:embed="rId3"/>
+          <a:blip r:embed="rId4"/>
           <a:stretch>
             <a:fillRect/>
           </a:stretch>
@@ -4922,7 +4616,7 @@
           <a:bodyPr wrap="square" lIns="0" tIns="0" rIns="0" bIns="0" rtlCol="0" anchor="ctr"/>
           <a:lstStyle/>
           <a:p>
-            <a:pPr indent="0" marL="0">
+            <a:pPr marL="0" indent="0">
               <a:buNone/>
             </a:pPr>
             <a:r>
@@ -4961,7 +4655,7 @@
           <a:bodyPr wrap="square" lIns="0" tIns="0" rIns="0" bIns="0" rtlCol="0" anchor="ctr"/>
           <a:lstStyle/>
           <a:p>
-            <a:pPr indent="0" marL="0">
+            <a:pPr marL="0" indent="0">
               <a:buNone/>
             </a:pPr>
             <a:r>
@@ -5085,7 +4779,7 @@
           <a:bodyPr wrap="square" lIns="0" tIns="0" rIns="0" bIns="0" rtlCol="0" anchor="ctr"/>
           <a:lstStyle/>
           <a:p>
-            <a:pPr algn="ctr" indent="0" marL="0">
+            <a:pPr marL="0" indent="0" algn="ctr">
               <a:buNone/>
             </a:pPr>
             <a:r>
@@ -5124,7 +4818,7 @@
           <a:bodyPr wrap="square" rtlCol="0" anchor="ctr"/>
           <a:lstStyle/>
           <a:p>
-            <a:pPr indent="0" marL="0">
+            <a:pPr marL="0" indent="0">
               <a:buNone/>
             </a:pPr>
             <a:r>
@@ -5163,7 +4857,7 @@
           <a:bodyPr wrap="square" rtlCol="0" anchor="ctr"/>
           <a:lstStyle/>
           <a:p>
-            <a:pPr algn="r" indent="0" marL="0">
+            <a:pPr marL="0" indent="0" algn="r">
               <a:buNone/>
             </a:pPr>
             <a:r>
@@ -5178,45 +4872,6 @@
               <a:t>Day 2 · Section 3  ·  3/12</a:t>
             </a:r>
             <a:endParaRPr lang="en-US" sz="900" dirty="0"/>
-          </a:p>
-        </p:txBody>
-      </p:sp>
-      <p:sp>
-        <p:nvSpPr>
-          <p:cNvPr id="20" name="Text 15"/>
-          <p:cNvSpPr/>
-          <p:nvPr/>
-        </p:nvSpPr>
-        <p:spPr>
-          <a:xfrm>
-            <a:off x="548640" y="4462272"/>
-            <a:ext cx="8046720" cy="274320"/>
-          </a:xfrm>
-          <a:prstGeom prst="rect">
-            <a:avLst/>
-          </a:prstGeom>
-          <a:noFill/>
-          <a:ln/>
-        </p:spPr>
-        <p:txBody>
-          <a:bodyPr wrap="square" lIns="0" tIns="0" rIns="0" bIns="0" rtlCol="0" anchor="ctr"/>
-          <a:lstStyle/>
-          <a:p>
-            <a:pPr indent="0" marL="0">
-              <a:buNone/>
-            </a:pPr>
-            <a:r>
-              <a:rPr lang="en-US" sz="1000" i="1" dirty="0">
-                <a:solidFill>
-                  <a:srgbClr val="615C52"/>
-                </a:solidFill>
-                <a:latin typeface="Inter" pitchFamily="34" charset="0"/>
-                <a:ea typeface="Inter" pitchFamily="34" charset="-122"/>
-                <a:cs typeface="Inter" pitchFamily="34" charset="-120"/>
-              </a:rPr>
-              <a:t>▸ Reach for RAG when the knowledge changes; fine-tune when the behavior must.</a:t>
-            </a:r>
-            <a:endParaRPr lang="en-US" sz="1000" dirty="0"/>
           </a:p>
         </p:txBody>
       </p:sp>
@@ -5236,6 +4891,7 @@
         <a:solidFill>
           <a:srgbClr val="F0EEE6"/>
         </a:solidFill>
+        <a:effectLst/>
       </p:bgPr>
     </p:bg>
     <p:spTree>
@@ -5273,11 +4929,11 @@
           <a:bodyPr wrap="square" lIns="0" tIns="0" rIns="0" bIns="0" rtlCol="0" anchor="ctr"/>
           <a:lstStyle/>
           <a:p>
-            <a:pPr indent="0" marL="0">
-              <a:buNone/>
-            </a:pPr>
-            <a:r>
-              <a:rPr lang="en-US" sz="1100" b="1" spc="200" kern="0" dirty="0">
+            <a:pPr marL="0" indent="0">
+              <a:buNone/>
+            </a:pPr>
+            <a:r>
+              <a:rPr lang="en-US" sz="1100" b="1" kern="0" spc="200" dirty="0">
                 <a:solidFill>
                   <a:srgbClr val="C25E40"/>
                 </a:solidFill>
@@ -5312,7 +4968,7 @@
           <a:bodyPr wrap="square" lIns="0" tIns="0" rIns="0" bIns="0" rtlCol="0" anchor="ctr"/>
           <a:lstStyle/>
           <a:p>
-            <a:pPr indent="0" marL="0">
+            <a:pPr marL="0" indent="0">
               <a:buNone/>
             </a:pPr>
             <a:r>
@@ -5332,14 +4988,14 @@
       </p:sp>
       <p:pic>
         <p:nvPicPr>
-          <p:cNvPr id="4" name="Image 0" descr="preencoded.png">    </p:cNvPr>
+          <p:cNvPr id="4" name="Image 0" descr="preencoded.png"/>
           <p:cNvPicPr>
             <a:picLocks noChangeAspect="1"/>
           </p:cNvPicPr>
           <p:nvPr/>
         </p:nvPicPr>
         <p:blipFill>
-          <a:blip r:embed="rId1"/>
+          <a:blip r:embed="rId2"/>
           <a:stretch>
             <a:fillRect/>
           </a:stretch>
@@ -5380,13 +5036,20 @@
             <a:prstDash val="solid"/>
           </a:ln>
           <a:effectLst>
-            <a:outerShdw sx="100000" sy="100000" kx="0" ky="0" algn="bl" rotWithShape="0" blurRad="88900" dist="38100" dir="5400000">
+            <a:outerShdw blurRad="88900" dist="38100" dir="5400000" algn="bl" rotWithShape="0">
               <a:srgbClr val="000000">
                 <a:alpha val="10000"/>
               </a:srgbClr>
             </a:outerShdw>
           </a:effectLst>
         </p:spPr>
+        <p:txBody>
+          <a:bodyPr/>
+          <a:lstStyle/>
+          <a:p>
+            <a:endParaRPr lang="en-US"/>
+          </a:p>
+        </p:txBody>
       </p:sp>
       <p:sp>
         <p:nvSpPr>
@@ -5407,17 +5070,24 @@
           </a:solidFill>
           <a:ln/>
         </p:spPr>
+        <p:txBody>
+          <a:bodyPr/>
+          <a:lstStyle/>
+          <a:p>
+            <a:endParaRPr lang="en-US"/>
+          </a:p>
+        </p:txBody>
       </p:sp>
       <p:pic>
         <p:nvPicPr>
-          <p:cNvPr id="7" name="Image 1" descr="preencoded.png">    </p:cNvPr>
+          <p:cNvPr id="7" name="Image 1" descr="preencoded.png"/>
           <p:cNvPicPr>
             <a:picLocks noChangeAspect="1"/>
           </p:cNvPicPr>
           <p:nvPr/>
         </p:nvPicPr>
         <p:blipFill>
-          <a:blip r:embed="rId2"/>
+          <a:blip r:embed="rId3"/>
           <a:stretch>
             <a:fillRect/>
           </a:stretch>
@@ -5453,7 +5123,7 @@
           <a:bodyPr wrap="square" lIns="0" tIns="0" rIns="0" bIns="0" rtlCol="0" anchor="t"/>
           <a:lstStyle/>
           <a:p>
-            <a:pPr algn="ctr" indent="0" marL="0">
+            <a:pPr marL="0" indent="0" algn="ctr">
               <a:buNone/>
             </a:pPr>
             <a:r>
@@ -5492,7 +5162,7 @@
           <a:bodyPr wrap="square" lIns="0" tIns="0" rIns="0" bIns="0" rtlCol="0" anchor="ctr"/>
           <a:lstStyle/>
           <a:p>
-            <a:pPr algn="ctr" indent="0" marL="0">
+            <a:pPr marL="0" indent="0" algn="ctr">
               <a:buNone/>
             </a:pPr>
             <a:r>
@@ -5536,13 +5206,20 @@
             <a:prstDash val="solid"/>
           </a:ln>
           <a:effectLst>
-            <a:outerShdw sx="100000" sy="100000" kx="0" ky="0" algn="bl" rotWithShape="0" blurRad="88900" dist="38100" dir="5400000">
+            <a:outerShdw blurRad="88900" dist="38100" dir="5400000" algn="bl" rotWithShape="0">
               <a:srgbClr val="000000">
                 <a:alpha val="10000"/>
               </a:srgbClr>
             </a:outerShdw>
           </a:effectLst>
         </p:spPr>
+        <p:txBody>
+          <a:bodyPr/>
+          <a:lstStyle/>
+          <a:p>
+            <a:endParaRPr lang="en-US"/>
+          </a:p>
+        </p:txBody>
       </p:sp>
       <p:sp>
         <p:nvSpPr>
@@ -5563,17 +5240,24 @@
           </a:solidFill>
           <a:ln/>
         </p:spPr>
+        <p:txBody>
+          <a:bodyPr/>
+          <a:lstStyle/>
+          <a:p>
+            <a:endParaRPr lang="en-US"/>
+          </a:p>
+        </p:txBody>
       </p:sp>
       <p:pic>
         <p:nvPicPr>
-          <p:cNvPr id="12" name="Image 2" descr="preencoded.png">    </p:cNvPr>
+          <p:cNvPr id="12" name="Image 2" descr="preencoded.png"/>
           <p:cNvPicPr>
             <a:picLocks noChangeAspect="1"/>
           </p:cNvPicPr>
           <p:nvPr/>
         </p:nvPicPr>
         <p:blipFill>
-          <a:blip r:embed="rId3"/>
+          <a:blip r:embed="rId4"/>
           <a:stretch>
             <a:fillRect/>
           </a:stretch>
@@ -5609,7 +5293,7 @@
           <a:bodyPr wrap="square" lIns="0" tIns="0" rIns="0" bIns="0" rtlCol="0" anchor="t"/>
           <a:lstStyle/>
           <a:p>
-            <a:pPr algn="ctr" indent="0" marL="0">
+            <a:pPr marL="0" indent="0" algn="ctr">
               <a:buNone/>
             </a:pPr>
             <a:r>
@@ -5648,7 +5332,7 @@
           <a:bodyPr wrap="square" lIns="0" tIns="0" rIns="0" bIns="0" rtlCol="0" anchor="ctr"/>
           <a:lstStyle/>
           <a:p>
-            <a:pPr algn="ctr" indent="0" marL="0">
+            <a:pPr marL="0" indent="0" algn="ctr">
               <a:buNone/>
             </a:pPr>
             <a:r>
@@ -5692,13 +5376,20 @@
             <a:prstDash val="solid"/>
           </a:ln>
           <a:effectLst>
-            <a:outerShdw sx="100000" sy="100000" kx="0" ky="0" algn="bl" rotWithShape="0" blurRad="88900" dist="38100" dir="5400000">
+            <a:outerShdw blurRad="88900" dist="38100" dir="5400000" algn="bl" rotWithShape="0">
               <a:srgbClr val="000000">
                 <a:alpha val="10000"/>
               </a:srgbClr>
             </a:outerShdw>
           </a:effectLst>
         </p:spPr>
+        <p:txBody>
+          <a:bodyPr/>
+          <a:lstStyle/>
+          <a:p>
+            <a:endParaRPr lang="en-US"/>
+          </a:p>
+        </p:txBody>
       </p:sp>
       <p:sp>
         <p:nvSpPr>
@@ -5719,17 +5410,24 @@
           </a:solidFill>
           <a:ln/>
         </p:spPr>
+        <p:txBody>
+          <a:bodyPr/>
+          <a:lstStyle/>
+          <a:p>
+            <a:endParaRPr lang="en-US"/>
+          </a:p>
+        </p:txBody>
       </p:sp>
       <p:pic>
         <p:nvPicPr>
-          <p:cNvPr id="17" name="Image 3" descr="preencoded.png">    </p:cNvPr>
+          <p:cNvPr id="17" name="Image 3" descr="preencoded.png"/>
           <p:cNvPicPr>
             <a:picLocks noChangeAspect="1"/>
           </p:cNvPicPr>
           <p:nvPr/>
         </p:nvPicPr>
         <p:blipFill>
-          <a:blip r:embed="rId4"/>
+          <a:blip r:embed="rId5"/>
           <a:stretch>
             <a:fillRect/>
           </a:stretch>
@@ -5765,7 +5463,7 @@
           <a:bodyPr wrap="square" lIns="0" tIns="0" rIns="0" bIns="0" rtlCol="0" anchor="t"/>
           <a:lstStyle/>
           <a:p>
-            <a:pPr algn="ctr" indent="0" marL="0">
+            <a:pPr marL="0" indent="0" algn="ctr">
               <a:buNone/>
             </a:pPr>
             <a:r>
@@ -5804,7 +5502,7 @@
           <a:bodyPr wrap="square" lIns="0" tIns="0" rIns="0" bIns="0" rtlCol="0" anchor="ctr"/>
           <a:lstStyle/>
           <a:p>
-            <a:pPr algn="ctr" indent="0" marL="0">
+            <a:pPr marL="0" indent="0" algn="ctr">
               <a:buNone/>
             </a:pPr>
             <a:r>
@@ -5848,13 +5546,20 @@
             <a:prstDash val="solid"/>
           </a:ln>
           <a:effectLst>
-            <a:outerShdw sx="100000" sy="100000" kx="0" ky="0" algn="bl" rotWithShape="0" blurRad="88900" dist="38100" dir="5400000">
+            <a:outerShdw blurRad="88900" dist="38100" dir="5400000" algn="bl" rotWithShape="0">
               <a:srgbClr val="000000">
                 <a:alpha val="10000"/>
               </a:srgbClr>
             </a:outerShdw>
           </a:effectLst>
         </p:spPr>
+        <p:txBody>
+          <a:bodyPr/>
+          <a:lstStyle/>
+          <a:p>
+            <a:endParaRPr lang="en-US"/>
+          </a:p>
+        </p:txBody>
       </p:sp>
       <p:sp>
         <p:nvSpPr>
@@ -5875,17 +5580,24 @@
           </a:solidFill>
           <a:ln/>
         </p:spPr>
+        <p:txBody>
+          <a:bodyPr/>
+          <a:lstStyle/>
+          <a:p>
+            <a:endParaRPr lang="en-US"/>
+          </a:p>
+        </p:txBody>
       </p:sp>
       <p:pic>
         <p:nvPicPr>
-          <p:cNvPr id="22" name="Image 4" descr="preencoded.png">    </p:cNvPr>
+          <p:cNvPr id="22" name="Image 4" descr="preencoded.png"/>
           <p:cNvPicPr>
             <a:picLocks noChangeAspect="1"/>
           </p:cNvPicPr>
           <p:nvPr/>
         </p:nvPicPr>
         <p:blipFill>
-          <a:blip r:embed="rId5"/>
+          <a:blip r:embed="rId6"/>
           <a:stretch>
             <a:fillRect/>
           </a:stretch>
@@ -5921,7 +5633,7 @@
           <a:bodyPr wrap="square" lIns="0" tIns="0" rIns="0" bIns="0" rtlCol="0" anchor="t"/>
           <a:lstStyle/>
           <a:p>
-            <a:pPr algn="ctr" indent="0" marL="0">
+            <a:pPr marL="0" indent="0" algn="ctr">
               <a:buNone/>
             </a:pPr>
             <a:r>
@@ -5960,7 +5672,7 @@
           <a:bodyPr wrap="square" lIns="0" tIns="0" rIns="0" bIns="0" rtlCol="0" anchor="ctr"/>
           <a:lstStyle/>
           <a:p>
-            <a:pPr algn="ctr" indent="0" marL="0">
+            <a:pPr marL="0" indent="0" algn="ctr">
               <a:buNone/>
             </a:pPr>
             <a:r>
@@ -6004,13 +5716,20 @@
             <a:prstDash val="solid"/>
           </a:ln>
           <a:effectLst>
-            <a:outerShdw sx="100000" sy="100000" kx="0" ky="0" algn="bl" rotWithShape="0" blurRad="88900" dist="38100" dir="5400000">
+            <a:outerShdw blurRad="88900" dist="38100" dir="5400000" algn="bl" rotWithShape="0">
               <a:srgbClr val="000000">
                 <a:alpha val="10000"/>
               </a:srgbClr>
             </a:outerShdw>
           </a:effectLst>
         </p:spPr>
+        <p:txBody>
+          <a:bodyPr/>
+          <a:lstStyle/>
+          <a:p>
+            <a:endParaRPr lang="en-US"/>
+          </a:p>
+        </p:txBody>
       </p:sp>
       <p:sp>
         <p:nvSpPr>
@@ -6031,17 +5750,24 @@
           </a:solidFill>
           <a:ln/>
         </p:spPr>
+        <p:txBody>
+          <a:bodyPr/>
+          <a:lstStyle/>
+          <a:p>
+            <a:endParaRPr lang="en-US"/>
+          </a:p>
+        </p:txBody>
       </p:sp>
       <p:pic>
         <p:nvPicPr>
-          <p:cNvPr id="27" name="Image 5" descr="preencoded.png">    </p:cNvPr>
+          <p:cNvPr id="27" name="Image 5" descr="preencoded.png"/>
           <p:cNvPicPr>
             <a:picLocks noChangeAspect="1"/>
           </p:cNvPicPr>
           <p:nvPr/>
         </p:nvPicPr>
         <p:blipFill>
-          <a:blip r:embed="rId6"/>
+          <a:blip r:embed="rId7"/>
           <a:stretch>
             <a:fillRect/>
           </a:stretch>
@@ -6077,7 +5803,7 @@
           <a:bodyPr wrap="square" lIns="0" tIns="0" rIns="0" bIns="0" rtlCol="0" anchor="t"/>
           <a:lstStyle/>
           <a:p>
-            <a:pPr algn="ctr" indent="0" marL="0">
+            <a:pPr marL="0" indent="0" algn="ctr">
               <a:buNone/>
             </a:pPr>
             <a:r>
@@ -6116,7 +5842,7 @@
           <a:bodyPr wrap="square" lIns="0" tIns="0" rIns="0" bIns="0" rtlCol="0" anchor="ctr"/>
           <a:lstStyle/>
           <a:p>
-            <a:pPr algn="ctr" indent="0" marL="0">
+            <a:pPr marL="0" indent="0" algn="ctr">
               <a:buNone/>
             </a:pPr>
             <a:r>
@@ -6160,13 +5886,20 @@
             <a:prstDash val="solid"/>
           </a:ln>
           <a:effectLst>
-            <a:outerShdw sx="100000" sy="100000" kx="0" ky="0" algn="bl" rotWithShape="0" blurRad="88900" dist="38100" dir="5400000">
+            <a:outerShdw blurRad="88900" dist="38100" dir="5400000" algn="bl" rotWithShape="0">
               <a:srgbClr val="000000">
                 <a:alpha val="10000"/>
               </a:srgbClr>
             </a:outerShdw>
           </a:effectLst>
         </p:spPr>
+        <p:txBody>
+          <a:bodyPr/>
+          <a:lstStyle/>
+          <a:p>
+            <a:endParaRPr lang="en-US"/>
+          </a:p>
+        </p:txBody>
       </p:sp>
       <p:sp>
         <p:nvSpPr>
@@ -6187,17 +5920,24 @@
           </a:solidFill>
           <a:ln/>
         </p:spPr>
+        <p:txBody>
+          <a:bodyPr/>
+          <a:lstStyle/>
+          <a:p>
+            <a:endParaRPr lang="en-US"/>
+          </a:p>
+        </p:txBody>
       </p:sp>
       <p:pic>
         <p:nvPicPr>
-          <p:cNvPr id="32" name="Image 6" descr="preencoded.png">    </p:cNvPr>
+          <p:cNvPr id="32" name="Image 6" descr="preencoded.png"/>
           <p:cNvPicPr>
             <a:picLocks noChangeAspect="1"/>
           </p:cNvPicPr>
           <p:nvPr/>
         </p:nvPicPr>
         <p:blipFill>
-          <a:blip r:embed="rId7"/>
+          <a:blip r:embed="rId8"/>
           <a:stretch>
             <a:fillRect/>
           </a:stretch>
@@ -6233,7 +5973,7 @@
           <a:bodyPr wrap="square" lIns="0" tIns="0" rIns="0" bIns="0" rtlCol="0" anchor="t"/>
           <a:lstStyle/>
           <a:p>
-            <a:pPr algn="ctr" indent="0" marL="0">
+            <a:pPr marL="0" indent="0" algn="ctr">
               <a:buNone/>
             </a:pPr>
             <a:r>
@@ -6272,7 +6012,7 @@
           <a:bodyPr wrap="square" lIns="0" tIns="0" rIns="0" bIns="0" rtlCol="0" anchor="ctr"/>
           <a:lstStyle/>
           <a:p>
-            <a:pPr algn="ctr" indent="0" marL="0">
+            <a:pPr marL="0" indent="0" algn="ctr">
               <a:buNone/>
             </a:pPr>
             <a:r>
@@ -6316,13 +6056,20 @@
             <a:prstDash val="solid"/>
           </a:ln>
           <a:effectLst>
-            <a:outerShdw sx="100000" sy="100000" kx="0" ky="0" algn="bl" rotWithShape="0" blurRad="88900" dist="38100" dir="5400000">
+            <a:outerShdw blurRad="88900" dist="38100" dir="5400000" algn="bl" rotWithShape="0">
               <a:srgbClr val="000000">
                 <a:alpha val="10000"/>
               </a:srgbClr>
             </a:outerShdw>
           </a:effectLst>
         </p:spPr>
+        <p:txBody>
+          <a:bodyPr/>
+          <a:lstStyle/>
+          <a:p>
+            <a:endParaRPr lang="en-US"/>
+          </a:p>
+        </p:txBody>
       </p:sp>
       <p:sp>
         <p:nvSpPr>
@@ -6343,17 +6090,24 @@
           </a:solidFill>
           <a:ln/>
         </p:spPr>
+        <p:txBody>
+          <a:bodyPr/>
+          <a:lstStyle/>
+          <a:p>
+            <a:endParaRPr lang="en-US"/>
+          </a:p>
+        </p:txBody>
       </p:sp>
       <p:pic>
         <p:nvPicPr>
-          <p:cNvPr id="37" name="Image 7" descr="preencoded.png">    </p:cNvPr>
+          <p:cNvPr id="37" name="Image 7" descr="preencoded.png"/>
           <p:cNvPicPr>
             <a:picLocks noChangeAspect="1"/>
           </p:cNvPicPr>
           <p:nvPr/>
         </p:nvPicPr>
         <p:blipFill>
-          <a:blip r:embed="rId8"/>
+          <a:blip r:embed="rId9"/>
           <a:stretch>
             <a:fillRect/>
           </a:stretch>
@@ -6389,7 +6143,7 @@
           <a:bodyPr wrap="square" lIns="0" tIns="0" rIns="0" bIns="0" rtlCol="0" anchor="t"/>
           <a:lstStyle/>
           <a:p>
-            <a:pPr algn="ctr" indent="0" marL="0">
+            <a:pPr marL="0" indent="0" algn="ctr">
               <a:buNone/>
             </a:pPr>
             <a:r>
@@ -6428,6 +6182,13 @@
           </a:solidFill>
           <a:ln/>
         </p:spPr>
+        <p:txBody>
+          <a:bodyPr/>
+          <a:lstStyle/>
+          <a:p>
+            <a:endParaRPr lang="en-US"/>
+          </a:p>
+        </p:txBody>
       </p:sp>
       <p:sp>
         <p:nvSpPr>
@@ -6450,7 +6211,7 @@
           <a:bodyPr wrap="square" lIns="0" tIns="0" rIns="0" bIns="0" rtlCol="0" anchor="ctr"/>
           <a:lstStyle/>
           <a:p>
-            <a:pPr algn="ctr" indent="0" marL="0">
+            <a:pPr marL="0" indent="0" algn="ctr">
               <a:buNone/>
             </a:pPr>
             <a:r>
@@ -6464,9 +6225,6 @@
               </a:rPr>
               <a:t>Ingest → store </a:t>
             </a:r>
-            <a:pPr algn="ctr" indent="0" marL="0">
-              <a:buNone/>
-            </a:pPr>
             <a:r>
               <a:rPr lang="en-US" sz="1350" dirty="0">
                 <a:solidFill>
@@ -6478,9 +6236,6 @@
               </a:rPr>
               <a:t>happens offline; </a:t>
             </a:r>
-            <a:pPr algn="ctr" indent="0" marL="0">
-              <a:buNone/>
-            </a:pPr>
             <a:r>
               <a:rPr lang="en-US" sz="1350" b="1" dirty="0">
                 <a:solidFill>
@@ -6492,9 +6247,6 @@
               </a:rPr>
               <a:t>retrieve → generate </a:t>
             </a:r>
-            <a:pPr algn="ctr" indent="0" marL="0">
-              <a:buNone/>
-            </a:pPr>
             <a:r>
               <a:rPr lang="en-US" sz="1350" dirty="0">
                 <a:solidFill>
@@ -6531,7 +6283,7 @@
           <a:bodyPr wrap="square" rtlCol="0" anchor="ctr"/>
           <a:lstStyle/>
           <a:p>
-            <a:pPr indent="0" marL="0">
+            <a:pPr marL="0" indent="0">
               <a:buNone/>
             </a:pPr>
             <a:r>
@@ -6570,7 +6322,7 @@
           <a:bodyPr wrap="square" rtlCol="0" anchor="ctr"/>
           <a:lstStyle/>
           <a:p>
-            <a:pPr algn="r" indent="0" marL="0">
+            <a:pPr marL="0" indent="0" algn="r">
               <a:buNone/>
             </a:pPr>
             <a:r>
@@ -6585,45 +6337,6 @@
               <a:t>Day 2 · Section 3  ·  4/12</a:t>
             </a:r>
             <a:endParaRPr lang="en-US" sz="900" dirty="0"/>
-          </a:p>
-        </p:txBody>
-      </p:sp>
-      <p:sp>
-        <p:nvSpPr>
-          <p:cNvPr id="43" name="Text 33"/>
-          <p:cNvSpPr/>
-          <p:nvPr/>
-        </p:nvSpPr>
-        <p:spPr>
-          <a:xfrm>
-            <a:off x="548640" y="4462272"/>
-            <a:ext cx="8046720" cy="274320"/>
-          </a:xfrm>
-          <a:prstGeom prst="rect">
-            <a:avLst/>
-          </a:prstGeom>
-          <a:noFill/>
-          <a:ln/>
-        </p:spPr>
-        <p:txBody>
-          <a:bodyPr wrap="square" lIns="0" tIns="0" rIns="0" bIns="0" rtlCol="0" anchor="ctr"/>
-          <a:lstStyle/>
-          <a:p>
-            <a:pPr indent="0" marL="0">
-              <a:buNone/>
-            </a:pPr>
-            <a:r>
-              <a:rPr lang="en-US" sz="1000" i="1" dirty="0">
-                <a:solidFill>
-                  <a:srgbClr val="615C52"/>
-                </a:solidFill>
-                <a:latin typeface="Inter" pitchFamily="34" charset="0"/>
-                <a:ea typeface="Inter" pitchFamily="34" charset="-122"/>
-                <a:cs typeface="Inter" pitchFamily="34" charset="-120"/>
-              </a:rPr>
-              <a:t>▸ Two phases: build the index once, then retrieve and generate on every request.</a:t>
-            </a:r>
-            <a:endParaRPr lang="en-US" sz="1000" dirty="0"/>
           </a:p>
         </p:txBody>
       </p:sp>
@@ -6643,6 +6356,7 @@
         <a:solidFill>
           <a:srgbClr val="1F1E1D"/>
         </a:solidFill>
+        <a:effectLst/>
       </p:bgPr>
     </p:bg>
     <p:spTree>
@@ -6661,14 +6375,14 @@
       </p:grpSpPr>
       <p:pic>
         <p:nvPicPr>
-          <p:cNvPr id="2" name="Image 0" descr="preencoded.png">    </p:cNvPr>
+          <p:cNvPr id="2" name="Image 0" descr="preencoded.png"/>
           <p:cNvPicPr>
             <a:picLocks noChangeAspect="1"/>
           </p:cNvPicPr>
           <p:nvPr/>
         </p:nvPicPr>
         <p:blipFill>
-          <a:blip r:embed="rId1"/>
+          <a:blip r:embed="rId2"/>
           <a:stretch>
             <a:fillRect/>
           </a:stretch>
@@ -6704,11 +6418,11 @@
           <a:bodyPr wrap="square" lIns="0" tIns="0" rIns="0" bIns="0" rtlCol="0" anchor="ctr"/>
           <a:lstStyle/>
           <a:p>
-            <a:pPr indent="0" marL="0">
-              <a:buNone/>
-            </a:pPr>
-            <a:r>
-              <a:rPr lang="en-US" sz="1300" b="1" spc="300" kern="0" dirty="0">
+            <a:pPr marL="0" indent="0">
+              <a:buNone/>
+            </a:pPr>
+            <a:r>
+              <a:rPr lang="en-US" sz="1300" b="1" kern="0" spc="300" dirty="0">
                 <a:solidFill>
                   <a:srgbClr val="D97757"/>
                 </a:solidFill>
@@ -6743,7 +6457,7 @@
           <a:bodyPr wrap="square" lIns="0" tIns="0" rIns="0" bIns="0" rtlCol="0" anchor="ctr"/>
           <a:lstStyle/>
           <a:p>
-            <a:pPr indent="0" marL="0">
+            <a:pPr marL="0" indent="0">
               <a:lnSpc>
                 <a:spcPct val="108000"/>
               </a:lnSpc>
@@ -6761,12 +6475,6 @@
               <a:t>RAG quality is determined by
 </a:t>
             </a:r>
-            <a:pPr indent="0" marL="0">
-              <a:lnSpc>
-                <a:spcPct val="108000"/>
-              </a:lnSpc>
-              <a:buNone/>
-            </a:pPr>
             <a:r>
               <a:rPr lang="en-US" sz="3600" b="1" dirty="0">
                 <a:solidFill>
@@ -6778,12 +6486,6 @@
               </a:rPr>
               <a:t>chunking</a:t>
             </a:r>
-            <a:pPr indent="0" marL="0">
-              <a:lnSpc>
-                <a:spcPct val="108000"/>
-              </a:lnSpc>
-              <a:buNone/>
-            </a:pPr>
             <a:r>
               <a:rPr lang="en-US" sz="3600" b="1" dirty="0">
                 <a:solidFill>
@@ -6820,7 +6522,7 @@
           <a:bodyPr wrap="square" lIns="0" tIns="0" rIns="0" bIns="0" rtlCol="0" anchor="ctr"/>
           <a:lstStyle/>
           <a:p>
-            <a:pPr indent="0" marL="0">
+            <a:pPr marL="0" indent="0">
               <a:buNone/>
             </a:pPr>
             <a:r>
@@ -6859,7 +6561,7 @@
           <a:bodyPr wrap="square" rtlCol="0" anchor="ctr"/>
           <a:lstStyle/>
           <a:p>
-            <a:pPr indent="0" marL="0">
+            <a:pPr marL="0" indent="0">
               <a:buNone/>
             </a:pPr>
             <a:r>
@@ -6898,7 +6600,7 @@
           <a:bodyPr wrap="square" rtlCol="0" anchor="ctr"/>
           <a:lstStyle/>
           <a:p>
-            <a:pPr algn="r" indent="0" marL="0">
+            <a:pPr marL="0" indent="0" algn="r">
               <a:buNone/>
             </a:pPr>
             <a:r>
@@ -6932,6 +6634,7 @@
         <a:solidFill>
           <a:srgbClr val="F0EEE6"/>
         </a:solidFill>
+        <a:effectLst/>
       </p:bgPr>
     </p:bg>
     <p:spTree>
@@ -6969,11 +6672,11 @@
           <a:bodyPr wrap="square" lIns="0" tIns="0" rIns="0" bIns="0" rtlCol="0" anchor="ctr"/>
           <a:lstStyle/>
           <a:p>
-            <a:pPr indent="0" marL="0">
-              <a:buNone/>
-            </a:pPr>
-            <a:r>
-              <a:rPr lang="en-US" sz="1100" b="1" spc="200" kern="0" dirty="0">
+            <a:pPr marL="0" indent="0">
+              <a:buNone/>
+            </a:pPr>
+            <a:r>
+              <a:rPr lang="en-US" sz="1100" b="1" kern="0" spc="200" dirty="0">
                 <a:solidFill>
                   <a:srgbClr val="C25E40"/>
                 </a:solidFill>
@@ -7008,7 +6711,7 @@
           <a:bodyPr wrap="square" lIns="0" tIns="0" rIns="0" bIns="0" rtlCol="0" anchor="ctr"/>
           <a:lstStyle/>
           <a:p>
-            <a:pPr indent="0" marL="0">
+            <a:pPr marL="0" indent="0">
               <a:buNone/>
             </a:pPr>
             <a:r>
@@ -7028,14 +6731,14 @@
       </p:sp>
       <p:pic>
         <p:nvPicPr>
-          <p:cNvPr id="4" name="Image 0" descr="preencoded.png">    </p:cNvPr>
+          <p:cNvPr id="4" name="Image 0" descr="preencoded.png"/>
           <p:cNvPicPr>
             <a:picLocks noChangeAspect="1"/>
           </p:cNvPicPr>
           <p:nvPr/>
         </p:nvPicPr>
         <p:blipFill>
-          <a:blip r:embed="rId1"/>
+          <a:blip r:embed="rId2"/>
           <a:stretch>
             <a:fillRect/>
           </a:stretch>
@@ -7076,13 +6779,20 @@
             <a:prstDash val="solid"/>
           </a:ln>
           <a:effectLst>
-            <a:outerShdw sx="100000" sy="100000" kx="0" ky="0" algn="bl" rotWithShape="0" blurRad="88900" dist="38100" dir="5400000">
+            <a:outerShdw blurRad="88900" dist="38100" dir="5400000" algn="bl" rotWithShape="0">
               <a:srgbClr val="000000">
                 <a:alpha val="10000"/>
               </a:srgbClr>
             </a:outerShdw>
           </a:effectLst>
         </p:spPr>
+        <p:txBody>
+          <a:bodyPr/>
+          <a:lstStyle/>
+          <a:p>
+            <a:endParaRPr lang="en-US"/>
+          </a:p>
+        </p:txBody>
       </p:sp>
       <p:sp>
         <p:nvSpPr>
@@ -7103,17 +6813,24 @@
           </a:solidFill>
           <a:ln/>
         </p:spPr>
+        <p:txBody>
+          <a:bodyPr/>
+          <a:lstStyle/>
+          <a:p>
+            <a:endParaRPr lang="en-US"/>
+          </a:p>
+        </p:txBody>
       </p:sp>
       <p:pic>
         <p:nvPicPr>
-          <p:cNvPr id="7" name="Image 1" descr="preencoded.png">    </p:cNvPr>
+          <p:cNvPr id="7" name="Image 1" descr="preencoded.png"/>
           <p:cNvPicPr>
             <a:picLocks noChangeAspect="1"/>
           </p:cNvPicPr>
           <p:nvPr/>
         </p:nvPicPr>
         <p:blipFill>
-          <a:blip r:embed="rId2"/>
+          <a:blip r:embed="rId3"/>
           <a:stretch>
             <a:fillRect/>
           </a:stretch>
@@ -7149,7 +6866,7 @@
           <a:bodyPr wrap="square" lIns="0" tIns="0" rIns="0" bIns="0" rtlCol="0" anchor="ctr"/>
           <a:lstStyle/>
           <a:p>
-            <a:pPr algn="ctr" indent="0" marL="0">
+            <a:pPr marL="0" indent="0" algn="ctr">
               <a:buNone/>
             </a:pPr>
             <a:r>
@@ -7188,7 +6905,7 @@
           <a:bodyPr wrap="square" lIns="0" tIns="0" rIns="0" bIns="0" rtlCol="0" anchor="ctr"/>
           <a:lstStyle/>
           <a:p>
-            <a:pPr algn="ctr" indent="0" marL="0">
+            <a:pPr marL="0" indent="0" algn="ctr">
               <a:buNone/>
             </a:pPr>
             <a:r>
@@ -7205,7 +6922,7 @@
             <a:endParaRPr lang="en-US" sz="1150" dirty="0"/>
           </a:p>
           <a:p>
-            <a:pPr algn="ctr" indent="0" marL="0">
+            <a:pPr marL="0" indent="0" algn="ctr">
               <a:buNone/>
             </a:pPr>
             <a:r>
@@ -7249,13 +6966,20 @@
             <a:prstDash val="solid"/>
           </a:ln>
           <a:effectLst>
-            <a:outerShdw sx="100000" sy="100000" kx="0" ky="0" algn="bl" rotWithShape="0" blurRad="88900" dist="38100" dir="5400000">
+            <a:outerShdw blurRad="88900" dist="38100" dir="5400000" algn="bl" rotWithShape="0">
               <a:srgbClr val="000000">
                 <a:alpha val="10000"/>
               </a:srgbClr>
             </a:outerShdw>
           </a:effectLst>
         </p:spPr>
+        <p:txBody>
+          <a:bodyPr/>
+          <a:lstStyle/>
+          <a:p>
+            <a:endParaRPr lang="en-US"/>
+          </a:p>
+        </p:txBody>
       </p:sp>
       <p:sp>
         <p:nvSpPr>
@@ -7276,17 +7000,24 @@
           </a:solidFill>
           <a:ln/>
         </p:spPr>
+        <p:txBody>
+          <a:bodyPr/>
+          <a:lstStyle/>
+          <a:p>
+            <a:endParaRPr lang="en-US"/>
+          </a:p>
+        </p:txBody>
       </p:sp>
       <p:pic>
         <p:nvPicPr>
-          <p:cNvPr id="12" name="Image 2" descr="preencoded.png">    </p:cNvPr>
+          <p:cNvPr id="12" name="Image 2" descr="preencoded.png"/>
           <p:cNvPicPr>
             <a:picLocks noChangeAspect="1"/>
           </p:cNvPicPr>
           <p:nvPr/>
         </p:nvPicPr>
         <p:blipFill>
-          <a:blip r:embed="rId3"/>
+          <a:blip r:embed="rId4"/>
           <a:stretch>
             <a:fillRect/>
           </a:stretch>
@@ -7322,7 +7053,7 @@
           <a:bodyPr wrap="square" lIns="0" tIns="0" rIns="0" bIns="0" rtlCol="0" anchor="ctr"/>
           <a:lstStyle/>
           <a:p>
-            <a:pPr algn="ctr" indent="0" marL="0">
+            <a:pPr marL="0" indent="0" algn="ctr">
               <a:buNone/>
             </a:pPr>
             <a:r>
@@ -7361,7 +7092,7 @@
           <a:bodyPr wrap="square" lIns="0" tIns="0" rIns="0" bIns="0" rtlCol="0" anchor="ctr"/>
           <a:lstStyle/>
           <a:p>
-            <a:pPr algn="ctr" indent="0" marL="0">
+            <a:pPr marL="0" indent="0" algn="ctr">
               <a:buNone/>
             </a:pPr>
             <a:r>
@@ -7378,7 +7109,7 @@
             <a:endParaRPr lang="en-US" sz="1150" dirty="0"/>
           </a:p>
           <a:p>
-            <a:pPr algn="ctr" indent="0" marL="0">
+            <a:pPr marL="0" indent="0" algn="ctr">
               <a:buNone/>
             </a:pPr>
             <a:r>
@@ -7422,13 +7153,20 @@
             <a:prstDash val="solid"/>
           </a:ln>
           <a:effectLst>
-            <a:outerShdw sx="100000" sy="100000" kx="0" ky="0" algn="bl" rotWithShape="0" blurRad="88900" dist="38100" dir="5400000">
+            <a:outerShdw blurRad="88900" dist="38100" dir="5400000" algn="bl" rotWithShape="0">
               <a:srgbClr val="000000">
                 <a:alpha val="10000"/>
               </a:srgbClr>
             </a:outerShdw>
           </a:effectLst>
         </p:spPr>
+        <p:txBody>
+          <a:bodyPr/>
+          <a:lstStyle/>
+          <a:p>
+            <a:endParaRPr lang="en-US"/>
+          </a:p>
+        </p:txBody>
       </p:sp>
       <p:sp>
         <p:nvSpPr>
@@ -7449,17 +7187,24 @@
           </a:solidFill>
           <a:ln/>
         </p:spPr>
+        <p:txBody>
+          <a:bodyPr/>
+          <a:lstStyle/>
+          <a:p>
+            <a:endParaRPr lang="en-US"/>
+          </a:p>
+        </p:txBody>
       </p:sp>
       <p:pic>
         <p:nvPicPr>
-          <p:cNvPr id="17" name="Image 3" descr="preencoded.png">    </p:cNvPr>
+          <p:cNvPr id="17" name="Image 3" descr="preencoded.png"/>
           <p:cNvPicPr>
             <a:picLocks noChangeAspect="1"/>
           </p:cNvPicPr>
           <p:nvPr/>
         </p:nvPicPr>
         <p:blipFill>
-          <a:blip r:embed="rId4"/>
+          <a:blip r:embed="rId5"/>
           <a:stretch>
             <a:fillRect/>
           </a:stretch>
@@ -7495,7 +7240,7 @@
           <a:bodyPr wrap="square" lIns="0" tIns="0" rIns="0" bIns="0" rtlCol="0" anchor="ctr"/>
           <a:lstStyle/>
           <a:p>
-            <a:pPr algn="ctr" indent="0" marL="0">
+            <a:pPr marL="0" indent="0" algn="ctr">
               <a:buNone/>
             </a:pPr>
             <a:r>
@@ -7534,7 +7279,7 @@
           <a:bodyPr wrap="square" lIns="0" tIns="0" rIns="0" bIns="0" rtlCol="0" anchor="ctr"/>
           <a:lstStyle/>
           <a:p>
-            <a:pPr algn="ctr" indent="0" marL="0">
+            <a:pPr marL="0" indent="0" algn="ctr">
               <a:buNone/>
             </a:pPr>
             <a:r>
@@ -7551,7 +7296,7 @@
             <a:endParaRPr lang="en-US" sz="1150" dirty="0"/>
           </a:p>
           <a:p>
-            <a:pPr algn="ctr" indent="0" marL="0">
+            <a:pPr marL="0" indent="0" algn="ctr">
               <a:buNone/>
             </a:pPr>
             <a:r>
@@ -7590,7 +7335,7 @@
           <a:bodyPr wrap="square" lIns="0" tIns="0" rIns="0" bIns="0" rtlCol="0" anchor="ctr"/>
           <a:lstStyle/>
           <a:p>
-            <a:pPr algn="ctr" indent="0" marL="0">
+            <a:pPr marL="0" indent="0" algn="ctr">
               <a:buNone/>
             </a:pPr>
             <a:r>
@@ -7629,7 +7374,7 @@
           <a:bodyPr wrap="square" rtlCol="0" anchor="ctr"/>
           <a:lstStyle/>
           <a:p>
-            <a:pPr indent="0" marL="0">
+            <a:pPr marL="0" indent="0">
               <a:buNone/>
             </a:pPr>
             <a:r>
@@ -7668,7 +7413,7 @@
           <a:bodyPr wrap="square" rtlCol="0" anchor="ctr"/>
           <a:lstStyle/>
           <a:p>
-            <a:pPr algn="r" indent="0" marL="0">
+            <a:pPr marL="0" indent="0" algn="r">
               <a:buNone/>
             </a:pPr>
             <a:r>
@@ -7683,45 +7428,6 @@
               <a:t>Day 2 · Section 3  ·  6/12</a:t>
             </a:r>
             <a:endParaRPr lang="en-US" sz="900" dirty="0"/>
-          </a:p>
-        </p:txBody>
-      </p:sp>
-      <p:sp>
-        <p:nvSpPr>
-          <p:cNvPr id="23" name="Text 17"/>
-          <p:cNvSpPr/>
-          <p:nvPr/>
-        </p:nvSpPr>
-        <p:spPr>
-          <a:xfrm>
-            <a:off x="548640" y="4462272"/>
-            <a:ext cx="8046720" cy="274320"/>
-          </a:xfrm>
-          <a:prstGeom prst="rect">
-            <a:avLst/>
-          </a:prstGeom>
-          <a:noFill/>
-          <a:ln/>
-        </p:spPr>
-        <p:txBody>
-          <a:bodyPr wrap="square" lIns="0" tIns="0" rIns="0" bIns="0" rtlCol="0" anchor="ctr"/>
-          <a:lstStyle/>
-          <a:p>
-            <a:pPr indent="0" marL="0">
-              <a:buNone/>
-            </a:pPr>
-            <a:r>
-              <a:rPr lang="en-US" sz="1000" i="1" dirty="0">
-                <a:solidFill>
-                  <a:srgbClr val="615C52"/>
-                </a:solidFill>
-                <a:latin typeface="Inter" pitchFamily="34" charset="0"/>
-                <a:ea typeface="Inter" pitchFamily="34" charset="-122"/>
-                <a:cs typeface="Inter" pitchFamily="34" charset="-120"/>
-              </a:rPr>
-              <a:t>▸ Size, overlap, and semantic boundaries are the three dials that set quality.</a:t>
-            </a:r>
-            <a:endParaRPr lang="en-US" sz="1000" dirty="0"/>
           </a:p>
         </p:txBody>
       </p:sp>
@@ -7741,6 +7447,7 @@
         <a:solidFill>
           <a:srgbClr val="F0EEE6"/>
         </a:solidFill>
+        <a:effectLst/>
       </p:bgPr>
     </p:bg>
     <p:spTree>
@@ -7778,11 +7485,11 @@
           <a:bodyPr wrap="square" lIns="0" tIns="0" rIns="0" bIns="0" rtlCol="0" anchor="ctr"/>
           <a:lstStyle/>
           <a:p>
-            <a:pPr indent="0" marL="0">
-              <a:buNone/>
-            </a:pPr>
-            <a:r>
-              <a:rPr lang="en-US" sz="1100" b="1" spc="200" kern="0" dirty="0">
+            <a:pPr marL="0" indent="0">
+              <a:buNone/>
+            </a:pPr>
+            <a:r>
+              <a:rPr lang="en-US" sz="1100" b="1" kern="0" spc="200" dirty="0">
                 <a:solidFill>
                   <a:srgbClr val="C25E40"/>
                 </a:solidFill>
@@ -7817,7 +7524,7 @@
           <a:bodyPr wrap="square" lIns="0" tIns="0" rIns="0" bIns="0" rtlCol="0" anchor="ctr"/>
           <a:lstStyle/>
           <a:p>
-            <a:pPr indent="0" marL="0">
+            <a:pPr marL="0" indent="0">
               <a:buNone/>
             </a:pPr>
             <a:r>
@@ -7837,312 +7544,7 @@
       </p:sp>
       <p:pic>
         <p:nvPicPr>
-          <p:cNvPr id="4" name="Image 0" descr="preencoded.png">    </p:cNvPr>
-          <p:cNvPicPr>
-            <a:picLocks noChangeAspect="1"/>
-          </p:cNvPicPr>
-          <p:nvPr/>
-        </p:nvPicPr>
-        <p:blipFill>
-          <a:blip r:embed="rId1"/>
-          <a:stretch>
-            <a:fillRect/>
-          </a:stretch>
-        </p:blipFill>
-        <p:spPr>
-          <a:xfrm>
-            <a:off x="8339328" y="402336"/>
-            <a:ext cx="310896" cy="310896"/>
-          </a:xfrm>
-          <a:prstGeom prst="rect">
-            <a:avLst/>
-          </a:prstGeom>
-        </p:spPr>
-      </p:pic>
-      <p:sp>
-        <p:nvSpPr>
-          <p:cNvPr id="5" name="Shape 2"/>
-          <p:cNvSpPr/>
-          <p:nvPr/>
-        </p:nvSpPr>
-        <p:spPr>
-          <a:xfrm>
-            <a:off x="548640" y="1371600"/>
-            <a:ext cx="5029200" cy="2331720"/>
-          </a:xfrm>
-          <a:prstGeom prst="roundRect">
-            <a:avLst>
-              <a:gd name="adj" fmla="val 3137"/>
-            </a:avLst>
-          </a:prstGeom>
-          <a:solidFill>
-            <a:srgbClr val="1F1E1D"/>
-          </a:solidFill>
-          <a:ln/>
-          <a:effectLst>
-            <a:outerShdw sx="100000" sy="100000" kx="0" ky="0" algn="bl" rotWithShape="0" blurRad="88900" dist="38100" dir="5400000">
-              <a:srgbClr val="000000">
-                <a:alpha val="10000"/>
-              </a:srgbClr>
-            </a:outerShdw>
-          </a:effectLst>
-        </p:spPr>
-      </p:sp>
-      <p:sp>
-        <p:nvSpPr>
-          <p:cNvPr id="6" name="Text 3"/>
-          <p:cNvSpPr/>
-          <p:nvPr/>
-        </p:nvSpPr>
-        <p:spPr>
-          <a:xfrm>
-            <a:off x="822960" y="1517904"/>
-            <a:ext cx="4480560" cy="256032"/>
-          </a:xfrm>
-          <a:prstGeom prst="rect">
-            <a:avLst/>
-          </a:prstGeom>
-          <a:noFill/>
-          <a:ln/>
-        </p:spPr>
-        <p:txBody>
-          <a:bodyPr wrap="square" lIns="0" tIns="0" rIns="0" bIns="0" rtlCol="0" anchor="ctr"/>
-          <a:lstStyle/>
-          <a:p>
-            <a:pPr indent="0" marL="0">
-              <a:buNone/>
-            </a:pPr>
-            <a:r>
-              <a:rPr lang="en-US" sz="1050" b="1" spc="50" kern="0" dirty="0">
-                <a:solidFill>
-                  <a:srgbClr val="D97757"/>
-                </a:solidFill>
-                <a:latin typeface="Courier New" pitchFamily="34" charset="0"/>
-                <a:ea typeface="Courier New" pitchFamily="34" charset="-122"/>
-                <a:cs typeface="Courier New" pitchFamily="34" charset="-120"/>
-              </a:rPr>
-              <a:t>// abstraction</a:t>
-            </a:r>
-            <a:endParaRPr lang="en-US" sz="1050" dirty="0"/>
-          </a:p>
-        </p:txBody>
-      </p:sp>
-      <p:sp>
-        <p:nvSpPr>
-          <p:cNvPr id="7" name="Text 4"/>
-          <p:cNvSpPr/>
-          <p:nvPr/>
-        </p:nvSpPr>
-        <p:spPr>
-          <a:xfrm>
-            <a:off x="841248" y="1828800"/>
-            <a:ext cx="4480560" cy="1691640"/>
-          </a:xfrm>
-          <a:prstGeom prst="rect">
-            <a:avLst/>
-          </a:prstGeom>
-          <a:noFill/>
-          <a:ln/>
-        </p:spPr>
-        <p:txBody>
-          <a:bodyPr wrap="square" lIns="0" tIns="0" rIns="0" bIns="0" rtlCol="0" anchor="t"/>
-          <a:lstStyle/>
-          <a:p>
-            <a:pPr indent="0" marL="0">
-              <a:lnSpc>
-                <a:spcPct val="128000"/>
-              </a:lnSpc>
-              <a:buNone/>
-            </a:pPr>
-            <a:r>
-              <a:rPr lang="en-US" sz="1300" dirty="0">
-                <a:solidFill>
-                  <a:srgbClr val="C58FE0"/>
-                </a:solidFill>
-                <a:latin typeface="Courier New" pitchFamily="34" charset="0"/>
-                <a:ea typeface="Courier New" pitchFamily="34" charset="-122"/>
-                <a:cs typeface="Courier New" pitchFamily="34" charset="-120"/>
-              </a:rPr>
-              <a:t>public interface </a:t>
-            </a:r>
-            <a:pPr indent="0" marL="0">
-              <a:lnSpc>
-                <a:spcPct val="128000"/>
-              </a:lnSpc>
-              <a:buNone/>
-            </a:pPr>
-            <a:r>
-              <a:rPr lang="en-US" sz="1300" dirty="0">
-                <a:solidFill>
-                  <a:srgbClr val="9FC3E0"/>
-                </a:solidFill>
-                <a:latin typeface="Courier New" pitchFamily="34" charset="0"/>
-                <a:ea typeface="Courier New" pitchFamily="34" charset="-122"/>
-                <a:cs typeface="Courier New" pitchFamily="34" charset="-120"/>
-              </a:rPr>
-              <a:t>IEmbeddingService</a:t>
-            </a:r>
-            <a:endParaRPr lang="en-US" sz="1300" dirty="0"/>
-          </a:p>
-          <a:p>
-            <a:pPr indent="0" marL="0">
-              <a:lnSpc>
-                <a:spcPct val="128000"/>
-              </a:lnSpc>
-              <a:buNone/>
-            </a:pPr>
-            <a:r>
-              <a:rPr lang="en-US" sz="1300" dirty="0">
-                <a:solidFill>
-                  <a:srgbClr val="E9E5DD"/>
-                </a:solidFill>
-                <a:latin typeface="Courier New" pitchFamily="34" charset="0"/>
-                <a:ea typeface="Courier New" pitchFamily="34" charset="-122"/>
-                <a:cs typeface="Courier New" pitchFamily="34" charset="-120"/>
-              </a:rPr>
-              <a:t>{</a:t>
-            </a:r>
-            <a:endParaRPr lang="en-US" sz="1300" dirty="0"/>
-          </a:p>
-          <a:p>
-            <a:pPr indent="0" marL="0">
-              <a:lnSpc>
-                <a:spcPct val="128000"/>
-              </a:lnSpc>
-              <a:buNone/>
-            </a:pPr>
-            <a:r>
-              <a:rPr lang="en-US" sz="1300" dirty="0">
-                <a:solidFill>
-                  <a:srgbClr val="E9E5DD"/>
-                </a:solidFill>
-                <a:latin typeface="Courier New" pitchFamily="34" charset="0"/>
-                <a:ea typeface="Courier New" pitchFamily="34" charset="-122"/>
-                <a:cs typeface="Courier New" pitchFamily="34" charset="-120"/>
-              </a:rPr>
-              <a:t>  Task&lt;float[]&gt; </a:t>
-            </a:r>
-            <a:pPr indent="0" marL="0">
-              <a:lnSpc>
-                <a:spcPct val="128000"/>
-              </a:lnSpc>
-              <a:buNone/>
-            </a:pPr>
-            <a:r>
-              <a:rPr lang="en-US" sz="1300" dirty="0">
-                <a:solidFill>
-                  <a:srgbClr val="9FC3E0"/>
-                </a:solidFill>
-                <a:latin typeface="Courier New" pitchFamily="34" charset="0"/>
-                <a:ea typeface="Courier New" pitchFamily="34" charset="-122"/>
-                <a:cs typeface="Courier New" pitchFamily="34" charset="-120"/>
-              </a:rPr>
-              <a:t>EmbedAsync</a:t>
-            </a:r>
-            <a:pPr indent="0" marL="0">
-              <a:lnSpc>
-                <a:spcPct val="128000"/>
-              </a:lnSpc>
-              <a:buNone/>
-            </a:pPr>
-            <a:r>
-              <a:rPr lang="en-US" sz="1300" dirty="0">
-                <a:solidFill>
-                  <a:srgbClr val="E9E5DD"/>
-                </a:solidFill>
-                <a:latin typeface="Courier New" pitchFamily="34" charset="0"/>
-                <a:ea typeface="Courier New" pitchFamily="34" charset="-122"/>
-                <a:cs typeface="Courier New" pitchFamily="34" charset="-120"/>
-              </a:rPr>
-              <a:t>(</a:t>
-            </a:r>
-            <a:endParaRPr lang="en-US" sz="1300" dirty="0"/>
-          </a:p>
-          <a:p>
-            <a:pPr indent="0" marL="0">
-              <a:lnSpc>
-                <a:spcPct val="128000"/>
-              </a:lnSpc>
-              <a:buNone/>
-            </a:pPr>
-            <a:r>
-              <a:rPr lang="en-US" sz="1300" dirty="0">
-                <a:solidFill>
-                  <a:srgbClr val="E9E5DD"/>
-                </a:solidFill>
-                <a:latin typeface="Courier New" pitchFamily="34" charset="0"/>
-                <a:ea typeface="Courier New" pitchFamily="34" charset="-122"/>
-                <a:cs typeface="Courier New" pitchFamily="34" charset="-120"/>
-              </a:rPr>
-              <a:t>     string text);</a:t>
-            </a:r>
-            <a:endParaRPr lang="en-US" sz="1300" dirty="0"/>
-          </a:p>
-          <a:p>
-            <a:pPr indent="0" marL="0">
-              <a:lnSpc>
-                <a:spcPct val="128000"/>
-              </a:lnSpc>
-              <a:buNone/>
-            </a:pPr>
-            <a:r>
-              <a:rPr lang="en-US" sz="1300" dirty="0">
-                <a:solidFill>
-                  <a:srgbClr val="E9E5DD"/>
-                </a:solidFill>
-                <a:latin typeface="Courier New" pitchFamily="34" charset="0"/>
-                <a:ea typeface="Courier New" pitchFamily="34" charset="-122"/>
-                <a:cs typeface="Courier New" pitchFamily="34" charset="-120"/>
-              </a:rPr>
-              <a:t>}</a:t>
-            </a:r>
-            <a:endParaRPr lang="en-US" sz="1300" dirty="0"/>
-          </a:p>
-          <a:p>
-            <a:pPr indent="0" marL="0">
-              <a:lnSpc>
-                <a:spcPct val="128000"/>
-              </a:lnSpc>
-              <a:buNone/>
-            </a:pPr>
-            <a:r>
-              <a:rPr lang="en-US" sz="1300" dirty="0">
-                <a:solidFill>
-                  <a:srgbClr val="9A958B"/>
-                </a:solidFill>
-                <a:latin typeface="Courier New" pitchFamily="34" charset="0"/>
-                <a:ea typeface="Courier New" pitchFamily="34" charset="-122"/>
-                <a:cs typeface="Courier New" pitchFamily="34" charset="-120"/>
-              </a:rPr>
-              <a:t>// default impl → OpenAI API</a:t>
-            </a:r>
-            <a:endParaRPr lang="en-US" sz="1300" dirty="0"/>
-          </a:p>
-        </p:txBody>
-      </p:sp>
-      <p:sp>
-        <p:nvSpPr>
-          <p:cNvPr id="8" name="Shape 5"/>
-          <p:cNvSpPr/>
-          <p:nvPr/>
-        </p:nvSpPr>
-        <p:spPr>
-          <a:xfrm>
-            <a:off x="5806440" y="1463040"/>
-            <a:ext cx="420624" cy="420624"/>
-          </a:xfrm>
-          <a:prstGeom prst="ellipse">
-            <a:avLst/>
-          </a:prstGeom>
-          <a:solidFill>
-            <a:srgbClr val="D97757"/>
-          </a:solidFill>
-          <a:ln/>
-        </p:spPr>
-      </p:sp>
-      <p:pic>
-        <p:nvPicPr>
-          <p:cNvPr id="9" name="Image 1" descr="preencoded.png">    </p:cNvPr>
+          <p:cNvPr id="4" name="Image 0" descr="preencoded.png"/>
           <p:cNvPicPr>
             <a:picLocks noChangeAspect="1"/>
           </p:cNvPicPr>
@@ -8156,8 +7558,8 @@
         </p:blipFill>
         <p:spPr>
           <a:xfrm>
-            <a:off x="5915802" y="1572402"/>
-            <a:ext cx="201900" cy="201900"/>
+            <a:off x="8339328" y="402336"/>
+            <a:ext cx="310896" cy="310896"/>
           </a:xfrm>
           <a:prstGeom prst="rect">
             <a:avLst/>
@@ -8166,14 +7568,50 @@
       </p:pic>
       <p:sp>
         <p:nvSpPr>
-          <p:cNvPr id="10" name="Text 6"/>
-          <p:cNvSpPr/>
-          <p:nvPr/>
-        </p:nvSpPr>
-        <p:spPr>
-          <a:xfrm>
-            <a:off x="6373368" y="1426464"/>
-            <a:ext cx="2743200" cy="292608"/>
+          <p:cNvPr id="5" name="Shape 2"/>
+          <p:cNvSpPr/>
+          <p:nvPr/>
+        </p:nvSpPr>
+        <p:spPr>
+          <a:xfrm>
+            <a:off x="548640" y="1371600"/>
+            <a:ext cx="5029200" cy="2331720"/>
+          </a:xfrm>
+          <a:prstGeom prst="roundRect">
+            <a:avLst>
+              <a:gd name="adj" fmla="val 3137"/>
+            </a:avLst>
+          </a:prstGeom>
+          <a:solidFill>
+            <a:srgbClr val="1F1E1D"/>
+          </a:solidFill>
+          <a:ln/>
+          <a:effectLst>
+            <a:outerShdw blurRad="88900" dist="38100" dir="5400000" algn="bl" rotWithShape="0">
+              <a:srgbClr val="000000">
+                <a:alpha val="10000"/>
+              </a:srgbClr>
+            </a:outerShdw>
+          </a:effectLst>
+        </p:spPr>
+        <p:txBody>
+          <a:bodyPr/>
+          <a:lstStyle/>
+          <a:p>
+            <a:endParaRPr lang="en-US"/>
+          </a:p>
+        </p:txBody>
+      </p:sp>
+      <p:sp>
+        <p:nvSpPr>
+          <p:cNvPr id="6" name="Text 3"/>
+          <p:cNvSpPr/>
+          <p:nvPr/>
+        </p:nvSpPr>
+        <p:spPr>
+          <a:xfrm>
+            <a:off x="822960" y="1517904"/>
+            <a:ext cx="4480560" cy="256032"/>
           </a:xfrm>
           <a:prstGeom prst="rect">
             <a:avLst/>
@@ -8185,72 +7623,208 @@
           <a:bodyPr wrap="square" lIns="0" tIns="0" rIns="0" bIns="0" rtlCol="0" anchor="ctr"/>
           <a:lstStyle/>
           <a:p>
-            <a:pPr indent="0" marL="0">
-              <a:buNone/>
-            </a:pPr>
-            <a:r>
-              <a:rPr lang="en-US" sz="1400" b="1" dirty="0">
-                <a:solidFill>
-                  <a:srgbClr val="141413"/>
-                </a:solidFill>
-                <a:latin typeface="Inter" pitchFamily="34" charset="0"/>
-                <a:ea typeface="Inter" pitchFamily="34" charset="-122"/>
-                <a:cs typeface="Inter" pitchFamily="34" charset="-120"/>
-              </a:rPr>
-              <a:t>One interface</a:t>
-            </a:r>
-            <a:endParaRPr lang="en-US" sz="1400" dirty="0"/>
-          </a:p>
-        </p:txBody>
-      </p:sp>
-      <p:sp>
-        <p:nvSpPr>
-          <p:cNvPr id="11" name="Text 7"/>
-          <p:cNvSpPr/>
-          <p:nvPr/>
-        </p:nvSpPr>
-        <p:spPr>
-          <a:xfrm>
-            <a:off x="6373368" y="1709928"/>
-            <a:ext cx="2788920" cy="411480"/>
-          </a:xfrm>
-          <a:prstGeom prst="rect">
-            <a:avLst/>
-          </a:prstGeom>
-          <a:noFill/>
-          <a:ln/>
-        </p:spPr>
-        <p:txBody>
-          <a:bodyPr wrap="square" lIns="0" tIns="0" rIns="0" bIns="0" rtlCol="0" anchor="ctr"/>
-          <a:lstStyle/>
-          <a:p>
-            <a:pPr indent="0" marL="0">
-              <a:buNone/>
-            </a:pPr>
-            <a:r>
-              <a:rPr lang="en-US" sz="1150" dirty="0">
-                <a:solidFill>
-                  <a:srgbClr val="615C52"/>
-                </a:solidFill>
-                <a:latin typeface="Inter" pitchFamily="34" charset="0"/>
-                <a:ea typeface="Inter" pitchFamily="34" charset="-122"/>
-                <a:cs typeface="Inter" pitchFamily="34" charset="-120"/>
-              </a:rPr>
-              <a:t>Hide the provider behind it</a:t>
-            </a:r>
-            <a:endParaRPr lang="en-US" sz="1150" dirty="0"/>
-          </a:p>
-        </p:txBody>
-      </p:sp>
-      <p:sp>
-        <p:nvSpPr>
-          <p:cNvPr id="12" name="Shape 8"/>
-          <p:cNvSpPr/>
-          <p:nvPr/>
-        </p:nvSpPr>
-        <p:spPr>
-          <a:xfrm>
-            <a:off x="5806440" y="2240280"/>
+            <a:pPr marL="0" indent="0">
+              <a:buNone/>
+            </a:pPr>
+            <a:r>
+              <a:rPr lang="en-US" sz="1050" b="1" kern="0" spc="50" dirty="0">
+                <a:solidFill>
+                  <a:srgbClr val="D97757"/>
+                </a:solidFill>
+                <a:latin typeface="Courier New" pitchFamily="34" charset="0"/>
+                <a:ea typeface="Courier New" pitchFamily="34" charset="-122"/>
+                <a:cs typeface="Courier New" pitchFamily="34" charset="-120"/>
+              </a:rPr>
+              <a:t>// abstraction</a:t>
+            </a:r>
+            <a:endParaRPr lang="en-US" sz="1050" dirty="0"/>
+          </a:p>
+        </p:txBody>
+      </p:sp>
+      <p:sp>
+        <p:nvSpPr>
+          <p:cNvPr id="7" name="Text 4"/>
+          <p:cNvSpPr/>
+          <p:nvPr/>
+        </p:nvSpPr>
+        <p:spPr>
+          <a:xfrm>
+            <a:off x="841248" y="1828800"/>
+            <a:ext cx="4480560" cy="1691640"/>
+          </a:xfrm>
+          <a:prstGeom prst="rect">
+            <a:avLst/>
+          </a:prstGeom>
+          <a:noFill/>
+          <a:ln/>
+        </p:spPr>
+        <p:txBody>
+          <a:bodyPr wrap="square" lIns="0" tIns="0" rIns="0" bIns="0" rtlCol="0" anchor="t"/>
+          <a:lstStyle/>
+          <a:p>
+            <a:pPr marL="0" indent="0">
+              <a:lnSpc>
+                <a:spcPct val="128000"/>
+              </a:lnSpc>
+              <a:buNone/>
+            </a:pPr>
+            <a:r>
+              <a:rPr lang="en-US" sz="1300" dirty="0">
+                <a:solidFill>
+                  <a:srgbClr val="C58FE0"/>
+                </a:solidFill>
+                <a:latin typeface="Courier New" pitchFamily="34" charset="0"/>
+                <a:ea typeface="Courier New" pitchFamily="34" charset="-122"/>
+                <a:cs typeface="Courier New" pitchFamily="34" charset="-120"/>
+              </a:rPr>
+              <a:t>public interface </a:t>
+            </a:r>
+            <a:r>
+              <a:rPr lang="en-US" sz="1300" dirty="0">
+                <a:solidFill>
+                  <a:srgbClr val="9FC3E0"/>
+                </a:solidFill>
+                <a:latin typeface="Courier New" pitchFamily="34" charset="0"/>
+                <a:ea typeface="Courier New" pitchFamily="34" charset="-122"/>
+                <a:cs typeface="Courier New" pitchFamily="34" charset="-120"/>
+              </a:rPr>
+              <a:t>IEmbeddingService</a:t>
+            </a:r>
+            <a:endParaRPr lang="en-US" sz="1300" dirty="0"/>
+          </a:p>
+          <a:p>
+            <a:pPr marL="0" indent="0">
+              <a:lnSpc>
+                <a:spcPct val="128000"/>
+              </a:lnSpc>
+              <a:buNone/>
+            </a:pPr>
+            <a:r>
+              <a:rPr lang="en-US" sz="1300" dirty="0">
+                <a:solidFill>
+                  <a:srgbClr val="E9E5DD"/>
+                </a:solidFill>
+                <a:latin typeface="Courier New" pitchFamily="34" charset="0"/>
+                <a:ea typeface="Courier New" pitchFamily="34" charset="-122"/>
+                <a:cs typeface="Courier New" pitchFamily="34" charset="-120"/>
+              </a:rPr>
+              <a:t>{</a:t>
+            </a:r>
+            <a:endParaRPr lang="en-US" sz="1300" dirty="0"/>
+          </a:p>
+          <a:p>
+            <a:pPr marL="0" indent="0">
+              <a:lnSpc>
+                <a:spcPct val="128000"/>
+              </a:lnSpc>
+              <a:buNone/>
+            </a:pPr>
+            <a:r>
+              <a:rPr lang="en-US" sz="1300" dirty="0">
+                <a:solidFill>
+                  <a:srgbClr val="E9E5DD"/>
+                </a:solidFill>
+                <a:latin typeface="Courier New" pitchFamily="34" charset="0"/>
+                <a:ea typeface="Courier New" pitchFamily="34" charset="-122"/>
+                <a:cs typeface="Courier New" pitchFamily="34" charset="-120"/>
+              </a:rPr>
+              <a:t>  Task&lt;float[]&gt; </a:t>
+            </a:r>
+            <a:r>
+              <a:rPr lang="en-US" sz="1300" dirty="0">
+                <a:solidFill>
+                  <a:srgbClr val="9FC3E0"/>
+                </a:solidFill>
+                <a:latin typeface="Courier New" pitchFamily="34" charset="0"/>
+                <a:ea typeface="Courier New" pitchFamily="34" charset="-122"/>
+                <a:cs typeface="Courier New" pitchFamily="34" charset="-120"/>
+              </a:rPr>
+              <a:t>EmbedAsync</a:t>
+            </a:r>
+            <a:r>
+              <a:rPr lang="en-US" sz="1300" dirty="0">
+                <a:solidFill>
+                  <a:srgbClr val="E9E5DD"/>
+                </a:solidFill>
+                <a:latin typeface="Courier New" pitchFamily="34" charset="0"/>
+                <a:ea typeface="Courier New" pitchFamily="34" charset="-122"/>
+                <a:cs typeface="Courier New" pitchFamily="34" charset="-120"/>
+              </a:rPr>
+              <a:t>(</a:t>
+            </a:r>
+            <a:endParaRPr lang="en-US" sz="1300" dirty="0"/>
+          </a:p>
+          <a:p>
+            <a:pPr marL="0" indent="0">
+              <a:lnSpc>
+                <a:spcPct val="128000"/>
+              </a:lnSpc>
+              <a:buNone/>
+            </a:pPr>
+            <a:r>
+              <a:rPr lang="en-US" sz="1300" dirty="0">
+                <a:solidFill>
+                  <a:srgbClr val="E9E5DD"/>
+                </a:solidFill>
+                <a:latin typeface="Courier New" pitchFamily="34" charset="0"/>
+                <a:ea typeface="Courier New" pitchFamily="34" charset="-122"/>
+                <a:cs typeface="Courier New" pitchFamily="34" charset="-120"/>
+              </a:rPr>
+              <a:t>     string text);</a:t>
+            </a:r>
+            <a:endParaRPr lang="en-US" sz="1300" dirty="0"/>
+          </a:p>
+          <a:p>
+            <a:pPr marL="0" indent="0">
+              <a:lnSpc>
+                <a:spcPct val="128000"/>
+              </a:lnSpc>
+              <a:buNone/>
+            </a:pPr>
+            <a:r>
+              <a:rPr lang="en-US" sz="1300" dirty="0">
+                <a:solidFill>
+                  <a:srgbClr val="E9E5DD"/>
+                </a:solidFill>
+                <a:latin typeface="Courier New" pitchFamily="34" charset="0"/>
+                <a:ea typeface="Courier New" pitchFamily="34" charset="-122"/>
+                <a:cs typeface="Courier New" pitchFamily="34" charset="-120"/>
+              </a:rPr>
+              <a:t>}</a:t>
+            </a:r>
+            <a:endParaRPr lang="en-US" sz="1300" dirty="0"/>
+          </a:p>
+          <a:p>
+            <a:pPr marL="0" indent="0">
+              <a:lnSpc>
+                <a:spcPct val="128000"/>
+              </a:lnSpc>
+              <a:buNone/>
+            </a:pPr>
+            <a:r>
+              <a:rPr lang="en-US" sz="1300" dirty="0">
+                <a:solidFill>
+                  <a:srgbClr val="9A958B"/>
+                </a:solidFill>
+                <a:latin typeface="Courier New" pitchFamily="34" charset="0"/>
+                <a:ea typeface="Courier New" pitchFamily="34" charset="-122"/>
+                <a:cs typeface="Courier New" pitchFamily="34" charset="-120"/>
+              </a:rPr>
+              <a:t>// default impl → OpenAI API</a:t>
+            </a:r>
+            <a:endParaRPr lang="en-US" sz="1300" dirty="0"/>
+          </a:p>
+        </p:txBody>
+      </p:sp>
+      <p:sp>
+        <p:nvSpPr>
+          <p:cNvPr id="8" name="Shape 5"/>
+          <p:cNvSpPr/>
+          <p:nvPr/>
+        </p:nvSpPr>
+        <p:spPr>
+          <a:xfrm>
+            <a:off x="5806440" y="1463040"/>
             <a:ext cx="420624" cy="420624"/>
           </a:xfrm>
           <a:prstGeom prst="ellipse">
@@ -8261,10 +7835,17 @@
           </a:solidFill>
           <a:ln/>
         </p:spPr>
+        <p:txBody>
+          <a:bodyPr/>
+          <a:lstStyle/>
+          <a:p>
+            <a:endParaRPr lang="en-US"/>
+          </a:p>
+        </p:txBody>
       </p:sp>
       <p:pic>
         <p:nvPicPr>
-          <p:cNvPr id="13" name="Image 2" descr="preencoded.png">    </p:cNvPr>
+          <p:cNvPr id="9" name="Image 1" descr="preencoded.png"/>
           <p:cNvPicPr>
             <a:picLocks noChangeAspect="1"/>
           </p:cNvPicPr>
@@ -8278,7 +7859,7 @@
         </p:blipFill>
         <p:spPr>
           <a:xfrm>
-            <a:off x="5915802" y="2349642"/>
+            <a:off x="5915802" y="1572402"/>
             <a:ext cx="201900" cy="201900"/>
           </a:xfrm>
           <a:prstGeom prst="rect">
@@ -8288,13 +7869,13 @@
       </p:pic>
       <p:sp>
         <p:nvSpPr>
-          <p:cNvPr id="14" name="Text 9"/>
-          <p:cNvSpPr/>
-          <p:nvPr/>
-        </p:nvSpPr>
-        <p:spPr>
-          <a:xfrm>
-            <a:off x="6373368" y="2203704"/>
+          <p:cNvPr id="10" name="Text 6"/>
+          <p:cNvSpPr/>
+          <p:nvPr/>
+        </p:nvSpPr>
+        <p:spPr>
+          <a:xfrm>
+            <a:off x="6373368" y="1426464"/>
             <a:ext cx="2743200" cy="292608"/>
           </a:xfrm>
           <a:prstGeom prst="rect">
@@ -8307,7 +7888,7 @@
           <a:bodyPr wrap="square" lIns="0" tIns="0" rIns="0" bIns="0" rtlCol="0" anchor="ctr"/>
           <a:lstStyle/>
           <a:p>
-            <a:pPr indent="0" marL="0">
+            <a:pPr marL="0" indent="0">
               <a:buNone/>
             </a:pPr>
             <a:r>
@@ -8319,7 +7900,7 @@
                 <a:ea typeface="Inter" pitchFamily="34" charset="-122"/>
                 <a:cs typeface="Inter" pitchFamily="34" charset="-120"/>
               </a:rPr>
-              <a:t>Default: OpenAI</a:t>
+              <a:t>One interface</a:t>
             </a:r>
             <a:endParaRPr lang="en-US" sz="1400" dirty="0"/>
           </a:p>
@@ -8327,13 +7908,13 @@
       </p:sp>
       <p:sp>
         <p:nvSpPr>
-          <p:cNvPr id="15" name="Text 10"/>
-          <p:cNvSpPr/>
-          <p:nvPr/>
-        </p:nvSpPr>
-        <p:spPr>
-          <a:xfrm>
-            <a:off x="6373368" y="2487168"/>
+          <p:cNvPr id="11" name="Text 7"/>
+          <p:cNvSpPr/>
+          <p:nvPr/>
+        </p:nvSpPr>
+        <p:spPr>
+          <a:xfrm>
+            <a:off x="6373368" y="1709928"/>
             <a:ext cx="2788920" cy="411480"/>
           </a:xfrm>
           <a:prstGeom prst="rect">
@@ -8346,7 +7927,7 @@
           <a:bodyPr wrap="square" lIns="0" tIns="0" rIns="0" bIns="0" rtlCol="0" anchor="ctr"/>
           <a:lstStyle/>
           <a:p>
-            <a:pPr indent="0" marL="0">
+            <a:pPr marL="0" indent="0">
               <a:buNone/>
             </a:pPr>
             <a:r>
@@ -8358,7 +7939,7 @@
                 <a:ea typeface="Inter" pitchFamily="34" charset="-122"/>
                 <a:cs typeface="Inter" pitchFamily="34" charset="-120"/>
               </a:rPr>
-              <a:t>Cloud embedding API</a:t>
+              <a:t>Hide the provider behind it</a:t>
             </a:r>
             <a:endParaRPr lang="en-US" sz="1150" dirty="0"/>
           </a:p>
@@ -8366,13 +7947,13 @@
       </p:sp>
       <p:sp>
         <p:nvSpPr>
-          <p:cNvPr id="16" name="Shape 11"/>
-          <p:cNvSpPr/>
-          <p:nvPr/>
-        </p:nvSpPr>
-        <p:spPr>
-          <a:xfrm>
-            <a:off x="5806440" y="3017520"/>
+          <p:cNvPr id="12" name="Shape 8"/>
+          <p:cNvSpPr/>
+          <p:nvPr/>
+        </p:nvSpPr>
+        <p:spPr>
+          <a:xfrm>
+            <a:off x="5806440" y="2240280"/>
             <a:ext cx="420624" cy="420624"/>
           </a:xfrm>
           <a:prstGeom prst="ellipse">
@@ -8383,10 +7964,17 @@
           </a:solidFill>
           <a:ln/>
         </p:spPr>
+        <p:txBody>
+          <a:bodyPr/>
+          <a:lstStyle/>
+          <a:p>
+            <a:endParaRPr lang="en-US"/>
+          </a:p>
+        </p:txBody>
       </p:sp>
       <p:pic>
         <p:nvPicPr>
-          <p:cNvPr id="17" name="Image 3" descr="preencoded.png">    </p:cNvPr>
+          <p:cNvPr id="13" name="Image 2" descr="preencoded.png"/>
           <p:cNvPicPr>
             <a:picLocks noChangeAspect="1"/>
           </p:cNvPicPr>
@@ -8400,6 +7988,135 @@
         </p:blipFill>
         <p:spPr>
           <a:xfrm>
+            <a:off x="5915802" y="2349642"/>
+            <a:ext cx="201900" cy="201900"/>
+          </a:xfrm>
+          <a:prstGeom prst="rect">
+            <a:avLst/>
+          </a:prstGeom>
+        </p:spPr>
+      </p:pic>
+      <p:sp>
+        <p:nvSpPr>
+          <p:cNvPr id="14" name="Text 9"/>
+          <p:cNvSpPr/>
+          <p:nvPr/>
+        </p:nvSpPr>
+        <p:spPr>
+          <a:xfrm>
+            <a:off x="6373368" y="2203704"/>
+            <a:ext cx="2743200" cy="292608"/>
+          </a:xfrm>
+          <a:prstGeom prst="rect">
+            <a:avLst/>
+          </a:prstGeom>
+          <a:noFill/>
+          <a:ln/>
+        </p:spPr>
+        <p:txBody>
+          <a:bodyPr wrap="square" lIns="0" tIns="0" rIns="0" bIns="0" rtlCol="0" anchor="ctr"/>
+          <a:lstStyle/>
+          <a:p>
+            <a:pPr marL="0" indent="0">
+              <a:buNone/>
+            </a:pPr>
+            <a:r>
+              <a:rPr lang="en-US" sz="1400" b="1" dirty="0">
+                <a:solidFill>
+                  <a:srgbClr val="141413"/>
+                </a:solidFill>
+                <a:latin typeface="Inter" pitchFamily="34" charset="0"/>
+                <a:ea typeface="Inter" pitchFamily="34" charset="-122"/>
+                <a:cs typeface="Inter" pitchFamily="34" charset="-120"/>
+              </a:rPr>
+              <a:t>Default: OpenAI</a:t>
+            </a:r>
+            <a:endParaRPr lang="en-US" sz="1400" dirty="0"/>
+          </a:p>
+        </p:txBody>
+      </p:sp>
+      <p:sp>
+        <p:nvSpPr>
+          <p:cNvPr id="15" name="Text 10"/>
+          <p:cNvSpPr/>
+          <p:nvPr/>
+        </p:nvSpPr>
+        <p:spPr>
+          <a:xfrm>
+            <a:off x="6373368" y="2487168"/>
+            <a:ext cx="2788920" cy="411480"/>
+          </a:xfrm>
+          <a:prstGeom prst="rect">
+            <a:avLst/>
+          </a:prstGeom>
+          <a:noFill/>
+          <a:ln/>
+        </p:spPr>
+        <p:txBody>
+          <a:bodyPr wrap="square" lIns="0" tIns="0" rIns="0" bIns="0" rtlCol="0" anchor="ctr"/>
+          <a:lstStyle/>
+          <a:p>
+            <a:pPr marL="0" indent="0">
+              <a:buNone/>
+            </a:pPr>
+            <a:r>
+              <a:rPr lang="en-US" sz="1150" dirty="0">
+                <a:solidFill>
+                  <a:srgbClr val="615C52"/>
+                </a:solidFill>
+                <a:latin typeface="Inter" pitchFamily="34" charset="0"/>
+                <a:ea typeface="Inter" pitchFamily="34" charset="-122"/>
+                <a:cs typeface="Inter" pitchFamily="34" charset="-120"/>
+              </a:rPr>
+              <a:t>Cloud embedding API</a:t>
+            </a:r>
+            <a:endParaRPr lang="en-US" sz="1150" dirty="0"/>
+          </a:p>
+        </p:txBody>
+      </p:sp>
+      <p:sp>
+        <p:nvSpPr>
+          <p:cNvPr id="16" name="Shape 11"/>
+          <p:cNvSpPr/>
+          <p:nvPr/>
+        </p:nvSpPr>
+        <p:spPr>
+          <a:xfrm>
+            <a:off x="5806440" y="3017520"/>
+            <a:ext cx="420624" cy="420624"/>
+          </a:xfrm>
+          <a:prstGeom prst="ellipse">
+            <a:avLst/>
+          </a:prstGeom>
+          <a:solidFill>
+            <a:srgbClr val="D97757"/>
+          </a:solidFill>
+          <a:ln/>
+        </p:spPr>
+        <p:txBody>
+          <a:bodyPr/>
+          <a:lstStyle/>
+          <a:p>
+            <a:endParaRPr lang="en-US"/>
+          </a:p>
+        </p:txBody>
+      </p:sp>
+      <p:pic>
+        <p:nvPicPr>
+          <p:cNvPr id="17" name="Image 3" descr="preencoded.png"/>
+          <p:cNvPicPr>
+            <a:picLocks noChangeAspect="1"/>
+          </p:cNvPicPr>
+          <p:nvPr/>
+        </p:nvPicPr>
+        <p:blipFill>
+          <a:blip r:embed="rId5"/>
+          <a:stretch>
+            <a:fillRect/>
+          </a:stretch>
+        </p:blipFill>
+        <p:spPr>
+          <a:xfrm>
             <a:off x="5915802" y="3126882"/>
             <a:ext cx="201900" cy="201900"/>
           </a:xfrm>
@@ -8429,7 +8146,7 @@
           <a:bodyPr wrap="square" lIns="0" tIns="0" rIns="0" bIns="0" rtlCol="0" anchor="ctr"/>
           <a:lstStyle/>
           <a:p>
-            <a:pPr indent="0" marL="0">
+            <a:pPr marL="0" indent="0">
               <a:buNone/>
             </a:pPr>
             <a:r>
@@ -8468,7 +8185,7 @@
           <a:bodyPr wrap="square" lIns="0" tIns="0" rIns="0" bIns="0" rtlCol="0" anchor="ctr"/>
           <a:lstStyle/>
           <a:p>
-            <a:pPr indent="0" marL="0">
+            <a:pPr marL="0" indent="0">
               <a:buNone/>
             </a:pPr>
             <a:r>
@@ -8507,7 +8224,7 @@
           <a:bodyPr wrap="square" rtlCol="0" anchor="ctr"/>
           <a:lstStyle/>
           <a:p>
-            <a:pPr indent="0" marL="0">
+            <a:pPr marL="0" indent="0">
               <a:buNone/>
             </a:pPr>
             <a:r>
@@ -8546,7 +8263,7 @@
           <a:bodyPr wrap="square" rtlCol="0" anchor="ctr"/>
           <a:lstStyle/>
           <a:p>
-            <a:pPr algn="r" indent="0" marL="0">
+            <a:pPr marL="0" indent="0" algn="r">
               <a:buNone/>
             </a:pPr>
             <a:r>
@@ -8561,45 +8278,6 @@
               <a:t>Day 2 · Section 3  ·  7/12</a:t>
             </a:r>
             <a:endParaRPr lang="en-US" sz="900" dirty="0"/>
-          </a:p>
-        </p:txBody>
-      </p:sp>
-      <p:sp>
-        <p:nvSpPr>
-          <p:cNvPr id="22" name="Text 16"/>
-          <p:cNvSpPr/>
-          <p:nvPr/>
-        </p:nvSpPr>
-        <p:spPr>
-          <a:xfrm>
-            <a:off x="548640" y="4462272"/>
-            <a:ext cx="8046720" cy="274320"/>
-          </a:xfrm>
-          <a:prstGeom prst="rect">
-            <a:avLst/>
-          </a:prstGeom>
-          <a:noFill/>
-          <a:ln/>
-        </p:spPr>
-        <p:txBody>
-          <a:bodyPr wrap="square" lIns="0" tIns="0" rIns="0" bIns="0" rtlCol="0" anchor="ctr"/>
-          <a:lstStyle/>
-          <a:p>
-            <a:pPr indent="0" marL="0">
-              <a:buNone/>
-            </a:pPr>
-            <a:r>
-              <a:rPr lang="en-US" sz="1000" i="1" dirty="0">
-                <a:solidFill>
-                  <a:srgbClr val="615C52"/>
-                </a:solidFill>
-                <a:latin typeface="Inter" pitchFamily="34" charset="0"/>
-                <a:ea typeface="Inter" pitchFamily="34" charset="-122"/>
-                <a:cs typeface="Inter" pitchFamily="34" charset="-120"/>
-              </a:rPr>
-              <a:t>▸ Program against IEmbeddingService — the provider becomes a swap, not a rewrite.</a:t>
-            </a:r>
-            <a:endParaRPr lang="en-US" sz="1000" dirty="0"/>
           </a:p>
         </p:txBody>
       </p:sp>
@@ -8619,6 +8297,7 @@
         <a:solidFill>
           <a:srgbClr val="F0EEE6"/>
         </a:solidFill>
+        <a:effectLst/>
       </p:bgPr>
     </p:bg>
     <p:spTree>
@@ -8656,11 +8335,11 @@
           <a:bodyPr wrap="square" lIns="0" tIns="0" rIns="0" bIns="0" rtlCol="0" anchor="ctr"/>
           <a:lstStyle/>
           <a:p>
-            <a:pPr indent="0" marL="0">
-              <a:buNone/>
-            </a:pPr>
-            <a:r>
-              <a:rPr lang="en-US" sz="1100" b="1" spc="200" kern="0" dirty="0">
+            <a:pPr marL="0" indent="0">
+              <a:buNone/>
+            </a:pPr>
+            <a:r>
+              <a:rPr lang="en-US" sz="1100" b="1" kern="0" spc="200" dirty="0">
                 <a:solidFill>
                   <a:srgbClr val="C25E40"/>
                 </a:solidFill>
@@ -8695,7 +8374,7 @@
           <a:bodyPr wrap="square" lIns="0" tIns="0" rIns="0" bIns="0" rtlCol="0" anchor="ctr"/>
           <a:lstStyle/>
           <a:p>
-            <a:pPr indent="0" marL="0">
+            <a:pPr marL="0" indent="0">
               <a:buNone/>
             </a:pPr>
             <a:r>
@@ -8715,80 +8394,7 @@
       </p:sp>
       <p:pic>
         <p:nvPicPr>
-          <p:cNvPr id="4" name="Image 0" descr="preencoded.png">    </p:cNvPr>
-          <p:cNvPicPr>
-            <a:picLocks noChangeAspect="1"/>
-          </p:cNvPicPr>
-          <p:nvPr/>
-        </p:nvPicPr>
-        <p:blipFill>
-          <a:blip r:embed="rId1"/>
-          <a:stretch>
-            <a:fillRect/>
-          </a:stretch>
-        </p:blipFill>
-        <p:spPr>
-          <a:xfrm>
-            <a:off x="8339328" y="402336"/>
-            <a:ext cx="310896" cy="310896"/>
-          </a:xfrm>
-          <a:prstGeom prst="rect">
-            <a:avLst/>
-          </a:prstGeom>
-        </p:spPr>
-      </p:pic>
-      <p:sp>
-        <p:nvSpPr>
-          <p:cNvPr id="5" name="Shape 2"/>
-          <p:cNvSpPr/>
-          <p:nvPr/>
-        </p:nvSpPr>
-        <p:spPr>
-          <a:xfrm>
-            <a:off x="548640" y="1417320"/>
-            <a:ext cx="8046720" cy="960120"/>
-          </a:xfrm>
-          <a:prstGeom prst="roundRect">
-            <a:avLst>
-              <a:gd name="adj" fmla="val 9524"/>
-            </a:avLst>
-          </a:prstGeom>
-          <a:solidFill>
-            <a:srgbClr val="F4E4DC"/>
-          </a:solidFill>
-          <a:ln/>
-          <a:effectLst>
-            <a:outerShdw sx="100000" sy="100000" kx="0" ky="0" algn="bl" rotWithShape="0" blurRad="88900" dist="38100" dir="5400000">
-              <a:srgbClr val="000000">
-                <a:alpha val="10000"/>
-              </a:srgbClr>
-            </a:outerShdw>
-          </a:effectLst>
-        </p:spPr>
-      </p:sp>
-      <p:sp>
-        <p:nvSpPr>
-          <p:cNvPr id="6" name="Shape 3"/>
-          <p:cNvSpPr/>
-          <p:nvPr/>
-        </p:nvSpPr>
-        <p:spPr>
-          <a:xfrm>
-            <a:off x="822960" y="1645920"/>
-            <a:ext cx="502920" cy="502920"/>
-          </a:xfrm>
-          <a:prstGeom prst="ellipse">
-            <a:avLst/>
-          </a:prstGeom>
-          <a:solidFill>
-            <a:srgbClr val="D97757"/>
-          </a:solidFill>
-          <a:ln/>
-        </p:spPr>
-      </p:sp>
-      <p:pic>
-        <p:nvPicPr>
-          <p:cNvPr id="7" name="Image 1" descr="preencoded.png">    </p:cNvPr>
+          <p:cNvPr id="4" name="Image 0" descr="preencoded.png"/>
           <p:cNvPicPr>
             <a:picLocks noChangeAspect="1"/>
           </p:cNvPicPr>
@@ -8802,6 +8408,93 @@
         </p:blipFill>
         <p:spPr>
           <a:xfrm>
+            <a:off x="8339328" y="402336"/>
+            <a:ext cx="310896" cy="310896"/>
+          </a:xfrm>
+          <a:prstGeom prst="rect">
+            <a:avLst/>
+          </a:prstGeom>
+        </p:spPr>
+      </p:pic>
+      <p:sp>
+        <p:nvSpPr>
+          <p:cNvPr id="5" name="Shape 2"/>
+          <p:cNvSpPr/>
+          <p:nvPr/>
+        </p:nvSpPr>
+        <p:spPr>
+          <a:xfrm>
+            <a:off x="548640" y="1417320"/>
+            <a:ext cx="8046720" cy="960120"/>
+          </a:xfrm>
+          <a:prstGeom prst="roundRect">
+            <a:avLst>
+              <a:gd name="adj" fmla="val 9524"/>
+            </a:avLst>
+          </a:prstGeom>
+          <a:solidFill>
+            <a:srgbClr val="F4E4DC"/>
+          </a:solidFill>
+          <a:ln/>
+          <a:effectLst>
+            <a:outerShdw blurRad="88900" dist="38100" dir="5400000" algn="bl" rotWithShape="0">
+              <a:srgbClr val="000000">
+                <a:alpha val="10000"/>
+              </a:srgbClr>
+            </a:outerShdw>
+          </a:effectLst>
+        </p:spPr>
+        <p:txBody>
+          <a:bodyPr/>
+          <a:lstStyle/>
+          <a:p>
+            <a:endParaRPr lang="en-US"/>
+          </a:p>
+        </p:txBody>
+      </p:sp>
+      <p:sp>
+        <p:nvSpPr>
+          <p:cNvPr id="6" name="Shape 3"/>
+          <p:cNvSpPr/>
+          <p:nvPr/>
+        </p:nvSpPr>
+        <p:spPr>
+          <a:xfrm>
+            <a:off x="822960" y="1645920"/>
+            <a:ext cx="502920" cy="502920"/>
+          </a:xfrm>
+          <a:prstGeom prst="ellipse">
+            <a:avLst/>
+          </a:prstGeom>
+          <a:solidFill>
+            <a:srgbClr val="D97757"/>
+          </a:solidFill>
+          <a:ln/>
+        </p:spPr>
+        <p:txBody>
+          <a:bodyPr/>
+          <a:lstStyle/>
+          <a:p>
+            <a:endParaRPr lang="en-US"/>
+          </a:p>
+        </p:txBody>
+      </p:sp>
+      <p:pic>
+        <p:nvPicPr>
+          <p:cNvPr id="7" name="Image 1" descr="preencoded.png"/>
+          <p:cNvPicPr>
+            <a:picLocks noChangeAspect="1"/>
+          </p:cNvPicPr>
+          <p:nvPr/>
+        </p:nvPicPr>
+        <p:blipFill>
+          <a:blip r:embed="rId3"/>
+          <a:stretch>
+            <a:fillRect/>
+          </a:stretch>
+        </p:blipFill>
+        <p:spPr>
+          <a:xfrm>
             <a:off x="953719" y="1776679"/>
             <a:ext cx="241402" cy="241402"/>
           </a:xfrm>
@@ -8831,7 +8524,7 @@
           <a:bodyPr wrap="square" lIns="0" tIns="0" rIns="0" bIns="0" rtlCol="0" anchor="ctr"/>
           <a:lstStyle/>
           <a:p>
-            <a:pPr indent="0" marL="0">
+            <a:pPr marL="0" indent="0">
               <a:buNone/>
             </a:pPr>
             <a:r>
@@ -8845,9 +8538,6 @@
               </a:rPr>
               <a:t>nomic-embed-text</a:t>
             </a:r>
-            <a:pPr indent="0" marL="0">
-              <a:buNone/>
-            </a:pPr>
             <a:r>
               <a:rPr lang="en-US" sz="1500" dirty="0">
                 <a:solidFill>
@@ -8889,6 +8579,13 @@
             <a:prstDash val="solid"/>
           </a:ln>
         </p:spPr>
+        <p:txBody>
+          <a:bodyPr/>
+          <a:lstStyle/>
+          <a:p>
+            <a:endParaRPr lang="en-US"/>
+          </a:p>
+        </p:txBody>
       </p:sp>
       <p:sp>
         <p:nvSpPr>
@@ -8909,17 +8606,24 @@
           </a:solidFill>
           <a:ln/>
         </p:spPr>
+        <p:txBody>
+          <a:bodyPr/>
+          <a:lstStyle/>
+          <a:p>
+            <a:endParaRPr lang="en-US"/>
+          </a:p>
+        </p:txBody>
       </p:sp>
       <p:pic>
         <p:nvPicPr>
-          <p:cNvPr id="11" name="Image 2" descr="preencoded.png">    </p:cNvPr>
+          <p:cNvPr id="11" name="Image 2" descr="preencoded.png"/>
           <p:cNvPicPr>
             <a:picLocks noChangeAspect="1"/>
           </p:cNvPicPr>
           <p:nvPr/>
         </p:nvPicPr>
         <p:blipFill>
-          <a:blip r:embed="rId3"/>
+          <a:blip r:embed="rId4"/>
           <a:stretch>
             <a:fillRect/>
           </a:stretch>
@@ -8955,7 +8659,7 @@
           <a:bodyPr wrap="square" lIns="0" tIns="0" rIns="0" bIns="0" rtlCol="0" anchor="ctr"/>
           <a:lstStyle/>
           <a:p>
-            <a:pPr indent="0" marL="0">
+            <a:pPr marL="0" indent="0">
               <a:buNone/>
             </a:pPr>
             <a:r>
@@ -8994,7 +8698,7 @@
           <a:bodyPr wrap="square" lIns="0" tIns="0" rIns="0" bIns="0" rtlCol="0" anchor="ctr"/>
           <a:lstStyle/>
           <a:p>
-            <a:pPr indent="0" marL="0">
+            <a:pPr marL="0" indent="0">
               <a:buNone/>
             </a:pPr>
             <a:r>
@@ -9038,6 +8742,13 @@
             <a:prstDash val="solid"/>
           </a:ln>
         </p:spPr>
+        <p:txBody>
+          <a:bodyPr/>
+          <a:lstStyle/>
+          <a:p>
+            <a:endParaRPr lang="en-US"/>
+          </a:p>
+        </p:txBody>
       </p:sp>
       <p:sp>
         <p:nvSpPr>
@@ -9058,17 +8769,24 @@
           </a:solidFill>
           <a:ln/>
         </p:spPr>
+        <p:txBody>
+          <a:bodyPr/>
+          <a:lstStyle/>
+          <a:p>
+            <a:endParaRPr lang="en-US"/>
+          </a:p>
+        </p:txBody>
       </p:sp>
       <p:pic>
         <p:nvPicPr>
-          <p:cNvPr id="16" name="Image 3" descr="preencoded.png">    </p:cNvPr>
+          <p:cNvPr id="16" name="Image 3" descr="preencoded.png"/>
           <p:cNvPicPr>
             <a:picLocks noChangeAspect="1"/>
           </p:cNvPicPr>
           <p:nvPr/>
         </p:nvPicPr>
         <p:blipFill>
-          <a:blip r:embed="rId4"/>
+          <a:blip r:embed="rId5"/>
           <a:stretch>
             <a:fillRect/>
           </a:stretch>
@@ -9104,7 +8822,7 @@
           <a:bodyPr wrap="square" lIns="0" tIns="0" rIns="0" bIns="0" rtlCol="0" anchor="ctr"/>
           <a:lstStyle/>
           <a:p>
-            <a:pPr indent="0" marL="0">
+            <a:pPr marL="0" indent="0">
               <a:buNone/>
             </a:pPr>
             <a:r>
@@ -9143,7 +8861,7 @@
           <a:bodyPr wrap="square" lIns="0" tIns="0" rIns="0" bIns="0" rtlCol="0" anchor="ctr"/>
           <a:lstStyle/>
           <a:p>
-            <a:pPr indent="0" marL="0">
+            <a:pPr marL="0" indent="0">
               <a:buNone/>
             </a:pPr>
             <a:r>
@@ -9187,6 +8905,13 @@
             <a:prstDash val="solid"/>
           </a:ln>
         </p:spPr>
+        <p:txBody>
+          <a:bodyPr/>
+          <a:lstStyle/>
+          <a:p>
+            <a:endParaRPr lang="en-US"/>
+          </a:p>
+        </p:txBody>
       </p:sp>
       <p:sp>
         <p:nvSpPr>
@@ -9207,17 +8932,24 @@
           </a:solidFill>
           <a:ln/>
         </p:spPr>
+        <p:txBody>
+          <a:bodyPr/>
+          <a:lstStyle/>
+          <a:p>
+            <a:endParaRPr lang="en-US"/>
+          </a:p>
+        </p:txBody>
       </p:sp>
       <p:pic>
         <p:nvPicPr>
-          <p:cNvPr id="21" name="Image 4" descr="preencoded.png">    </p:cNvPr>
+          <p:cNvPr id="21" name="Image 4" descr="preencoded.png"/>
           <p:cNvPicPr>
             <a:picLocks noChangeAspect="1"/>
           </p:cNvPicPr>
           <p:nvPr/>
         </p:nvPicPr>
         <p:blipFill>
-          <a:blip r:embed="rId5"/>
+          <a:blip r:embed="rId6"/>
           <a:stretch>
             <a:fillRect/>
           </a:stretch>
@@ -9253,7 +8985,7 @@
           <a:bodyPr wrap="square" lIns="0" tIns="0" rIns="0" bIns="0" rtlCol="0" anchor="ctr"/>
           <a:lstStyle/>
           <a:p>
-            <a:pPr indent="0" marL="0">
+            <a:pPr marL="0" indent="0">
               <a:buNone/>
             </a:pPr>
             <a:r>
@@ -9292,7 +9024,7 @@
           <a:bodyPr wrap="square" lIns="0" tIns="0" rIns="0" bIns="0" rtlCol="0" anchor="ctr"/>
           <a:lstStyle/>
           <a:p>
-            <a:pPr indent="0" marL="0">
+            <a:pPr marL="0" indent="0">
               <a:buNone/>
             </a:pPr>
             <a:r>
@@ -9331,7 +9063,7 @@
           <a:bodyPr wrap="square" rtlCol="0" anchor="ctr"/>
           <a:lstStyle/>
           <a:p>
-            <a:pPr indent="0" marL="0">
+            <a:pPr marL="0" indent="0">
               <a:buNone/>
             </a:pPr>
             <a:r>
@@ -9370,7 +9102,7 @@
           <a:bodyPr wrap="square" rtlCol="0" anchor="ctr"/>
           <a:lstStyle/>
           <a:p>
-            <a:pPr algn="r" indent="0" marL="0">
+            <a:pPr marL="0" indent="0" algn="r">
               <a:buNone/>
             </a:pPr>
             <a:r>
@@ -9385,45 +9117,6 @@
               <a:t>Day 2 · Section 3  ·  8/12</a:t>
             </a:r>
             <a:endParaRPr lang="en-US" sz="900" dirty="0"/>
-          </a:p>
-        </p:txBody>
-      </p:sp>
-      <p:sp>
-        <p:nvSpPr>
-          <p:cNvPr id="26" name="Text 19"/>
-          <p:cNvSpPr/>
-          <p:nvPr/>
-        </p:nvSpPr>
-        <p:spPr>
-          <a:xfrm>
-            <a:off x="548640" y="4462272"/>
-            <a:ext cx="8046720" cy="274320"/>
-          </a:xfrm>
-          <a:prstGeom prst="rect">
-            <a:avLst/>
-          </a:prstGeom>
-          <a:noFill/>
-          <a:ln/>
-        </p:spPr>
-        <p:txBody>
-          <a:bodyPr wrap="square" lIns="0" tIns="0" rIns="0" bIns="0" rtlCol="0" anchor="ctr"/>
-          <a:lstStyle/>
-          <a:p>
-            <a:pPr indent="0" marL="0">
-              <a:buNone/>
-            </a:pPr>
-            <a:r>
-              <a:rPr lang="en-US" sz="1000" i="1" dirty="0">
-                <a:solidFill>
-                  <a:srgbClr val="615C52"/>
-                </a:solidFill>
-                <a:latin typeface="Inter" pitchFamily="34" charset="0"/>
-                <a:ea typeface="Inter" pitchFamily="34" charset="-122"/>
-                <a:cs typeface="Inter" pitchFamily="34" charset="-120"/>
-              </a:rPr>
-              <a:t>▸ Critical: the collection's vector size must equal the model's dimensions (768).</a:t>
-            </a:r>
-            <a:endParaRPr lang="en-US" sz="1000" dirty="0"/>
           </a:p>
         </p:txBody>
       </p:sp>
@@ -9443,6 +9136,7 @@
         <a:solidFill>
           <a:srgbClr val="F0EEE6"/>
         </a:solidFill>
+        <a:effectLst/>
       </p:bgPr>
     </p:bg>
     <p:spTree>
@@ -9480,11 +9174,11 @@
           <a:bodyPr wrap="square" lIns="0" tIns="0" rIns="0" bIns="0" rtlCol="0" anchor="ctr"/>
           <a:lstStyle/>
           <a:p>
-            <a:pPr indent="0" marL="0">
-              <a:buNone/>
-            </a:pPr>
-            <a:r>
-              <a:rPr lang="en-US" sz="1100" b="1" spc="200" kern="0" dirty="0">
+            <a:pPr marL="0" indent="0">
+              <a:buNone/>
+            </a:pPr>
+            <a:r>
+              <a:rPr lang="en-US" sz="1100" b="1" kern="0" spc="200" dirty="0">
                 <a:solidFill>
                   <a:srgbClr val="C25E40"/>
                 </a:solidFill>
@@ -9519,7 +9213,7 @@
           <a:bodyPr wrap="square" lIns="0" tIns="0" rIns="0" bIns="0" rtlCol="0" anchor="ctr"/>
           <a:lstStyle/>
           <a:p>
-            <a:pPr indent="0" marL="0">
+            <a:pPr marL="0" indent="0">
               <a:buNone/>
             </a:pPr>
             <a:r>
@@ -9539,375 +9233,7 @@
       </p:sp>
       <p:pic>
         <p:nvPicPr>
-          <p:cNvPr id="4" name="Image 0" descr="preencoded.png">    </p:cNvPr>
-          <p:cNvPicPr>
-            <a:picLocks noChangeAspect="1"/>
-          </p:cNvPicPr>
-          <p:nvPr/>
-        </p:nvPicPr>
-        <p:blipFill>
-          <a:blip r:embed="rId1"/>
-          <a:stretch>
-            <a:fillRect/>
-          </a:stretch>
-        </p:blipFill>
-        <p:spPr>
-          <a:xfrm>
-            <a:off x="8339328" y="402336"/>
-            <a:ext cx="310896" cy="310896"/>
-          </a:xfrm>
-          <a:prstGeom prst="rect">
-            <a:avLst/>
-          </a:prstGeom>
-        </p:spPr>
-      </p:pic>
-      <p:sp>
-        <p:nvSpPr>
-          <p:cNvPr id="5" name="Shape 2"/>
-          <p:cNvSpPr/>
-          <p:nvPr/>
-        </p:nvSpPr>
-        <p:spPr>
-          <a:xfrm>
-            <a:off x="548640" y="1371600"/>
-            <a:ext cx="5120640" cy="2788920"/>
-          </a:xfrm>
-          <a:prstGeom prst="roundRect">
-            <a:avLst>
-              <a:gd name="adj" fmla="val 2623"/>
-            </a:avLst>
-          </a:prstGeom>
-          <a:solidFill>
-            <a:srgbClr val="1F1E1D"/>
-          </a:solidFill>
-          <a:ln/>
-          <a:effectLst>
-            <a:outerShdw sx="100000" sy="100000" kx="0" ky="0" algn="bl" rotWithShape="0" blurRad="88900" dist="38100" dir="5400000">
-              <a:srgbClr val="000000">
-                <a:alpha val="10000"/>
-              </a:srgbClr>
-            </a:outerShdw>
-          </a:effectLst>
-        </p:spPr>
-      </p:sp>
-      <p:sp>
-        <p:nvSpPr>
-          <p:cNvPr id="6" name="Text 3"/>
-          <p:cNvSpPr/>
-          <p:nvPr/>
-        </p:nvSpPr>
-        <p:spPr>
-          <a:xfrm>
-            <a:off x="822960" y="1517904"/>
-            <a:ext cx="4572000" cy="256032"/>
-          </a:xfrm>
-          <a:prstGeom prst="rect">
-            <a:avLst/>
-          </a:prstGeom>
-          <a:noFill/>
-          <a:ln/>
-        </p:spPr>
-        <p:txBody>
-          <a:bodyPr wrap="square" lIns="0" tIns="0" rIns="0" bIns="0" rtlCol="0" anchor="ctr"/>
-          <a:lstStyle/>
-          <a:p>
-            <a:pPr indent="0" marL="0">
-              <a:buNone/>
-            </a:pPr>
-            <a:r>
-              <a:rPr lang="en-US" sz="1050" b="1" spc="50" kern="0" dirty="0">
-                <a:solidFill>
-                  <a:srgbClr val="D97757"/>
-                </a:solidFill>
-                <a:latin typeface="Courier New" pitchFamily="34" charset="0"/>
-                <a:ea typeface="Courier New" pitchFamily="34" charset="-122"/>
-                <a:cs typeface="Courier New" pitchFamily="34" charset="-120"/>
-              </a:rPr>
-              <a:t>// run + use</a:t>
-            </a:r>
-            <a:endParaRPr lang="en-US" sz="1050" dirty="0"/>
-          </a:p>
-        </p:txBody>
-      </p:sp>
-      <p:sp>
-        <p:nvSpPr>
-          <p:cNvPr id="7" name="Text 4"/>
-          <p:cNvSpPr/>
-          <p:nvPr/>
-        </p:nvSpPr>
-        <p:spPr>
-          <a:xfrm>
-            <a:off x="841248" y="1828800"/>
-            <a:ext cx="4572000" cy="2148840"/>
-          </a:xfrm>
-          <a:prstGeom prst="rect">
-            <a:avLst/>
-          </a:prstGeom>
-          <a:noFill/>
-          <a:ln/>
-        </p:spPr>
-        <p:txBody>
-          <a:bodyPr wrap="square" lIns="0" tIns="0" rIns="0" bIns="0" rtlCol="0" anchor="t"/>
-          <a:lstStyle/>
-          <a:p>
-            <a:pPr indent="0" marL="0">
-              <a:lnSpc>
-                <a:spcPct val="128000"/>
-              </a:lnSpc>
-              <a:buNone/>
-            </a:pPr>
-            <a:r>
-              <a:rPr lang="en-US" sz="1250" b="1" dirty="0">
-                <a:solidFill>
-                  <a:srgbClr val="D97757"/>
-                </a:solidFill>
-                <a:latin typeface="Courier New" pitchFamily="34" charset="0"/>
-                <a:ea typeface="Courier New" pitchFamily="34" charset="-122"/>
-                <a:cs typeface="Courier New" pitchFamily="34" charset="-120"/>
-              </a:rPr>
-              <a:t>$ </a:t>
-            </a:r>
-            <a:pPr indent="0" marL="0">
-              <a:lnSpc>
-                <a:spcPct val="128000"/>
-              </a:lnSpc>
-              <a:buNone/>
-            </a:pPr>
-            <a:r>
-              <a:rPr lang="en-US" sz="1250" dirty="0">
-                <a:solidFill>
-                  <a:srgbClr val="E9E5DD"/>
-                </a:solidFill>
-                <a:latin typeface="Courier New" pitchFamily="34" charset="0"/>
-                <a:ea typeface="Courier New" pitchFamily="34" charset="-122"/>
-                <a:cs typeface="Courier New" pitchFamily="34" charset="-120"/>
-              </a:rPr>
-              <a:t>docker run -p </a:t>
-            </a:r>
-            <a:pPr indent="0" marL="0">
-              <a:lnSpc>
-                <a:spcPct val="128000"/>
-              </a:lnSpc>
-              <a:buNone/>
-            </a:pPr>
-            <a:r>
-              <a:rPr lang="en-US" sz="1250" dirty="0">
-                <a:solidFill>
-                  <a:srgbClr val="E0A04A"/>
-                </a:solidFill>
-                <a:latin typeface="Courier New" pitchFamily="34" charset="0"/>
-                <a:ea typeface="Courier New" pitchFamily="34" charset="-122"/>
-                <a:cs typeface="Courier New" pitchFamily="34" charset="-120"/>
-              </a:rPr>
-              <a:t>6333:6333 -p 6334:6334</a:t>
-            </a:r>
-            <a:endParaRPr lang="en-US" sz="1250" dirty="0"/>
-          </a:p>
-          <a:p>
-            <a:pPr indent="0" marL="0">
-              <a:lnSpc>
-                <a:spcPct val="128000"/>
-              </a:lnSpc>
-              <a:buNone/>
-            </a:pPr>
-            <a:r>
-              <a:rPr lang="en-US" sz="1250" dirty="0">
-                <a:solidFill>
-                  <a:srgbClr val="E9E5DD"/>
-                </a:solidFill>
-                <a:latin typeface="Courier New" pitchFamily="34" charset="0"/>
-                <a:ea typeface="Courier New" pitchFamily="34" charset="-122"/>
-                <a:cs typeface="Courier New" pitchFamily="34" charset="-120"/>
-              </a:rPr>
-              <a:t>    qdrant/qdrant</a:t>
-            </a:r>
-            <a:endParaRPr lang="en-US" sz="1250" dirty="0"/>
-          </a:p>
-          <a:p>
-            <a:pPr indent="0" marL="0">
-              <a:lnSpc>
-                <a:spcPct val="128000"/>
-              </a:lnSpc>
-              <a:buNone/>
-            </a:pPr>
-            <a:endParaRPr lang="en-US" sz="1250" dirty="0"/>
-          </a:p>
-          <a:p>
-            <a:pPr indent="0" marL="0">
-              <a:lnSpc>
-                <a:spcPct val="128000"/>
-              </a:lnSpc>
-              <a:buNone/>
-            </a:pPr>
-            <a:r>
-              <a:rPr lang="en-US" sz="1250" dirty="0">
-                <a:solidFill>
-                  <a:srgbClr val="9A958B"/>
-                </a:solidFill>
-                <a:latin typeface="Courier New" pitchFamily="34" charset="0"/>
-                <a:ea typeface="Courier New" pitchFamily="34" charset="-122"/>
-                <a:cs typeface="Courier New" pitchFamily="34" charset="-120"/>
-              </a:rPr>
-              <a:t>// 1. create collection (size 768)</a:t>
-            </a:r>
-            <a:endParaRPr lang="en-US" sz="1250" dirty="0"/>
-          </a:p>
-          <a:p>
-            <a:pPr indent="0" marL="0">
-              <a:lnSpc>
-                <a:spcPct val="128000"/>
-              </a:lnSpc>
-              <a:buNone/>
-            </a:pPr>
-            <a:r>
-              <a:rPr lang="en-US" sz="1250" dirty="0">
-                <a:solidFill>
-                  <a:srgbClr val="9A958B"/>
-                </a:solidFill>
-                <a:latin typeface="Courier New" pitchFamily="34" charset="0"/>
-                <a:ea typeface="Courier New" pitchFamily="34" charset="-122"/>
-                <a:cs typeface="Courier New" pitchFamily="34" charset="-120"/>
-              </a:rPr>
-              <a:t>// 2. upsert vectors + payload</a:t>
-            </a:r>
-            <a:endParaRPr lang="en-US" sz="1250" dirty="0"/>
-          </a:p>
-          <a:p>
-            <a:pPr indent="0" marL="0">
-              <a:lnSpc>
-                <a:spcPct val="128000"/>
-              </a:lnSpc>
-              <a:buNone/>
-            </a:pPr>
-            <a:r>
-              <a:rPr lang="en-US" sz="1250" dirty="0">
-                <a:solidFill>
-                  <a:srgbClr val="9A958B"/>
-                </a:solidFill>
-                <a:latin typeface="Courier New" pitchFamily="34" charset="0"/>
-                <a:ea typeface="Courier New" pitchFamily="34" charset="-122"/>
-                <a:cs typeface="Courier New" pitchFamily="34" charset="-120"/>
-              </a:rPr>
-              <a:t>// 3. query top-K by </a:t>
-            </a:r>
-            <a:pPr indent="0" marL="0">
-              <a:lnSpc>
-                <a:spcPct val="128000"/>
-              </a:lnSpc>
-              <a:buNone/>
-            </a:pPr>
-            <a:r>
-              <a:rPr lang="en-US" sz="1250" dirty="0">
-                <a:solidFill>
-                  <a:srgbClr val="9FC3E0"/>
-                </a:solidFill>
-                <a:latin typeface="Courier New" pitchFamily="34" charset="0"/>
-                <a:ea typeface="Courier New" pitchFamily="34" charset="-122"/>
-                <a:cs typeface="Courier New" pitchFamily="34" charset="-120"/>
-              </a:rPr>
-              <a:t>Cosine</a:t>
-            </a:r>
-            <a:endParaRPr lang="en-US" sz="1250" dirty="0"/>
-          </a:p>
-          <a:p>
-            <a:pPr indent="0" marL="0">
-              <a:lnSpc>
-                <a:spcPct val="128000"/>
-              </a:lnSpc>
-              <a:buNone/>
-            </a:pPr>
-            <a:r>
-              <a:rPr lang="en-US" sz="1250" dirty="0">
-                <a:solidFill>
-                  <a:srgbClr val="E9E5DD"/>
-                </a:solidFill>
-                <a:latin typeface="Courier New" pitchFamily="34" charset="0"/>
-                <a:ea typeface="Courier New" pitchFamily="34" charset="-122"/>
-                <a:cs typeface="Courier New" pitchFamily="34" charset="-120"/>
-              </a:rPr>
-              <a:t>await client.QueryAsync(</a:t>
-            </a:r>
-            <a:endParaRPr lang="en-US" sz="1250" dirty="0"/>
-          </a:p>
-          <a:p>
-            <a:pPr indent="0" marL="0">
-              <a:lnSpc>
-                <a:spcPct val="128000"/>
-              </a:lnSpc>
-              <a:buNone/>
-            </a:pPr>
-            <a:r>
-              <a:rPr lang="en-US" sz="1250" dirty="0">
-                <a:solidFill>
-                  <a:srgbClr val="E9E5DD"/>
-                </a:solidFill>
-                <a:latin typeface="Courier New" pitchFamily="34" charset="0"/>
-                <a:ea typeface="Courier New" pitchFamily="34" charset="-122"/>
-                <a:cs typeface="Courier New" pitchFamily="34" charset="-120"/>
-              </a:rPr>
-              <a:t>   collection, vector, limit: </a:t>
-            </a:r>
-            <a:pPr indent="0" marL="0">
-              <a:lnSpc>
-                <a:spcPct val="128000"/>
-              </a:lnSpc>
-              <a:buNone/>
-            </a:pPr>
-            <a:r>
-              <a:rPr lang="en-US" sz="1250" dirty="0">
-                <a:solidFill>
-                  <a:srgbClr val="E0A04A"/>
-                </a:solidFill>
-                <a:latin typeface="Courier New" pitchFamily="34" charset="0"/>
-                <a:ea typeface="Courier New" pitchFamily="34" charset="-122"/>
-                <a:cs typeface="Courier New" pitchFamily="34" charset="-120"/>
-              </a:rPr>
-              <a:t>5</a:t>
-            </a:r>
-            <a:pPr indent="0" marL="0">
-              <a:lnSpc>
-                <a:spcPct val="128000"/>
-              </a:lnSpc>
-              <a:buNone/>
-            </a:pPr>
-            <a:r>
-              <a:rPr lang="en-US" sz="1250" dirty="0">
-                <a:solidFill>
-                  <a:srgbClr val="E9E5DD"/>
-                </a:solidFill>
-                <a:latin typeface="Courier New" pitchFamily="34" charset="0"/>
-                <a:ea typeface="Courier New" pitchFamily="34" charset="-122"/>
-                <a:cs typeface="Courier New" pitchFamily="34" charset="-120"/>
-              </a:rPr>
-              <a:t>);</a:t>
-            </a:r>
-            <a:endParaRPr lang="en-US" sz="1250" dirty="0"/>
-          </a:p>
-        </p:txBody>
-      </p:sp>
-      <p:sp>
-        <p:nvSpPr>
-          <p:cNvPr id="8" name="Shape 5"/>
-          <p:cNvSpPr/>
-          <p:nvPr/>
-        </p:nvSpPr>
-        <p:spPr>
-          <a:xfrm>
-            <a:off x="5897880" y="1417320"/>
-            <a:ext cx="402336" cy="402336"/>
-          </a:xfrm>
-          <a:prstGeom prst="ellipse">
-            <a:avLst/>
-          </a:prstGeom>
-          <a:solidFill>
-            <a:srgbClr val="D97757"/>
-          </a:solidFill>
-          <a:ln/>
-        </p:spPr>
-      </p:sp>
-      <p:pic>
-        <p:nvPicPr>
-          <p:cNvPr id="9" name="Image 1" descr="preencoded.png">    </p:cNvPr>
+          <p:cNvPr id="4" name="Image 0" descr="preencoded.png"/>
           <p:cNvPicPr>
             <a:picLocks noChangeAspect="1"/>
           </p:cNvPicPr>
@@ -9921,8 +9247,8 @@
         </p:blipFill>
         <p:spPr>
           <a:xfrm>
-            <a:off x="6002487" y="1521927"/>
-            <a:ext cx="193121" cy="193121"/>
+            <a:off x="8339328" y="402336"/>
+            <a:ext cx="310896" cy="310896"/>
           </a:xfrm>
           <a:prstGeom prst="rect">
             <a:avLst/>
@@ -9931,14 +9257,50 @@
       </p:pic>
       <p:sp>
         <p:nvSpPr>
-          <p:cNvPr id="10" name="Text 6"/>
-          <p:cNvSpPr/>
-          <p:nvPr/>
-        </p:nvSpPr>
-        <p:spPr>
-          <a:xfrm>
-            <a:off x="6446520" y="1371600"/>
-            <a:ext cx="2697480" cy="274320"/>
+          <p:cNvPr id="5" name="Shape 2"/>
+          <p:cNvSpPr/>
+          <p:nvPr/>
+        </p:nvSpPr>
+        <p:spPr>
+          <a:xfrm>
+            <a:off x="548640" y="1371600"/>
+            <a:ext cx="5120640" cy="2788920"/>
+          </a:xfrm>
+          <a:prstGeom prst="roundRect">
+            <a:avLst>
+              <a:gd name="adj" fmla="val 2623"/>
+            </a:avLst>
+          </a:prstGeom>
+          <a:solidFill>
+            <a:srgbClr val="1F1E1D"/>
+          </a:solidFill>
+          <a:ln/>
+          <a:effectLst>
+            <a:outerShdw blurRad="88900" dist="38100" dir="5400000" algn="bl" rotWithShape="0">
+              <a:srgbClr val="000000">
+                <a:alpha val="10000"/>
+              </a:srgbClr>
+            </a:outerShdw>
+          </a:effectLst>
+        </p:spPr>
+        <p:txBody>
+          <a:bodyPr/>
+          <a:lstStyle/>
+          <a:p>
+            <a:endParaRPr lang="en-US"/>
+          </a:p>
+        </p:txBody>
+      </p:sp>
+      <p:sp>
+        <p:nvSpPr>
+          <p:cNvPr id="6" name="Text 3"/>
+          <p:cNvSpPr/>
+          <p:nvPr/>
+        </p:nvSpPr>
+        <p:spPr>
+          <a:xfrm>
+            <a:off x="822960" y="1517904"/>
+            <a:ext cx="4572000" cy="256032"/>
           </a:xfrm>
           <a:prstGeom prst="rect">
             <a:avLst/>
@@ -9950,72 +9312,259 @@
           <a:bodyPr wrap="square" lIns="0" tIns="0" rIns="0" bIns="0" rtlCol="0" anchor="ctr"/>
           <a:lstStyle/>
           <a:p>
-            <a:pPr indent="0" marL="0">
-              <a:buNone/>
-            </a:pPr>
-            <a:r>
-              <a:rPr lang="en-US" sz="1350" b="1" dirty="0">
-                <a:solidFill>
-                  <a:srgbClr val="141413"/>
-                </a:solidFill>
-                <a:latin typeface="Inter" pitchFamily="34" charset="0"/>
-                <a:ea typeface="Inter" pitchFamily="34" charset="-122"/>
-                <a:cs typeface="Inter" pitchFamily="34" charset="-120"/>
-              </a:rPr>
-              <a:t>Run the container</a:t>
-            </a:r>
-            <a:endParaRPr lang="en-US" sz="1350" dirty="0"/>
-          </a:p>
-        </p:txBody>
-      </p:sp>
-      <p:sp>
-        <p:nvSpPr>
-          <p:cNvPr id="11" name="Text 7"/>
-          <p:cNvSpPr/>
-          <p:nvPr/>
-        </p:nvSpPr>
-        <p:spPr>
-          <a:xfrm>
-            <a:off x="6446520" y="1645920"/>
-            <a:ext cx="2743200" cy="274320"/>
-          </a:xfrm>
-          <a:prstGeom prst="rect">
-            <a:avLst/>
-          </a:prstGeom>
-          <a:noFill/>
-          <a:ln/>
-        </p:spPr>
-        <p:txBody>
-          <a:bodyPr wrap="square" lIns="0" tIns="0" rIns="0" bIns="0" rtlCol="0" anchor="ctr"/>
-          <a:lstStyle/>
-          <a:p>
-            <a:pPr indent="0" marL="0">
-              <a:buNone/>
-            </a:pPr>
-            <a:r>
-              <a:rPr lang="en-US" sz="1100" dirty="0">
-                <a:solidFill>
-                  <a:srgbClr val="615C52"/>
-                </a:solidFill>
-                <a:latin typeface="Inter" pitchFamily="34" charset="0"/>
-                <a:ea typeface="Inter" pitchFamily="34" charset="-122"/>
-                <a:cs typeface="Inter" pitchFamily="34" charset="-120"/>
-              </a:rPr>
-              <a:t>Ports 6333 (REST) + 6334 (gRPC)</a:t>
-            </a:r>
-            <a:endParaRPr lang="en-US" sz="1100" dirty="0"/>
-          </a:p>
-        </p:txBody>
-      </p:sp>
-      <p:sp>
-        <p:nvSpPr>
-          <p:cNvPr id="12" name="Shape 8"/>
-          <p:cNvSpPr/>
-          <p:nvPr/>
-        </p:nvSpPr>
-        <p:spPr>
-          <a:xfrm>
-            <a:off x="5897880" y="2075688"/>
+            <a:pPr marL="0" indent="0">
+              <a:buNone/>
+            </a:pPr>
+            <a:r>
+              <a:rPr lang="en-US" sz="1050" b="1" kern="0" spc="50" dirty="0">
+                <a:solidFill>
+                  <a:srgbClr val="D97757"/>
+                </a:solidFill>
+                <a:latin typeface="Courier New" pitchFamily="34" charset="0"/>
+                <a:ea typeface="Courier New" pitchFamily="34" charset="-122"/>
+                <a:cs typeface="Courier New" pitchFamily="34" charset="-120"/>
+              </a:rPr>
+              <a:t>// run + use</a:t>
+            </a:r>
+            <a:endParaRPr lang="en-US" sz="1050" dirty="0"/>
+          </a:p>
+        </p:txBody>
+      </p:sp>
+      <p:sp>
+        <p:nvSpPr>
+          <p:cNvPr id="7" name="Text 4"/>
+          <p:cNvSpPr/>
+          <p:nvPr/>
+        </p:nvSpPr>
+        <p:spPr>
+          <a:xfrm>
+            <a:off x="841248" y="1828800"/>
+            <a:ext cx="4572000" cy="2148840"/>
+          </a:xfrm>
+          <a:prstGeom prst="rect">
+            <a:avLst/>
+          </a:prstGeom>
+          <a:noFill/>
+          <a:ln/>
+        </p:spPr>
+        <p:txBody>
+          <a:bodyPr wrap="square" lIns="0" tIns="0" rIns="0" bIns="0" rtlCol="0" anchor="t"/>
+          <a:lstStyle/>
+          <a:p>
+            <a:pPr marL="0" indent="0">
+              <a:lnSpc>
+                <a:spcPct val="128000"/>
+              </a:lnSpc>
+              <a:buNone/>
+            </a:pPr>
+            <a:r>
+              <a:rPr lang="en-US" sz="1250" b="1" dirty="0">
+                <a:solidFill>
+                  <a:srgbClr val="D97757"/>
+                </a:solidFill>
+                <a:latin typeface="Courier New" pitchFamily="34" charset="0"/>
+                <a:ea typeface="Courier New" pitchFamily="34" charset="-122"/>
+                <a:cs typeface="Courier New" pitchFamily="34" charset="-120"/>
+              </a:rPr>
+              <a:t>$ </a:t>
+            </a:r>
+            <a:r>
+              <a:rPr lang="en-US" sz="1250" dirty="0">
+                <a:solidFill>
+                  <a:srgbClr val="E9E5DD"/>
+                </a:solidFill>
+                <a:latin typeface="Courier New" pitchFamily="34" charset="0"/>
+                <a:ea typeface="Courier New" pitchFamily="34" charset="-122"/>
+                <a:cs typeface="Courier New" pitchFamily="34" charset="-120"/>
+              </a:rPr>
+              <a:t>docker run -p </a:t>
+            </a:r>
+            <a:r>
+              <a:rPr lang="en-US" sz="1250" dirty="0">
+                <a:solidFill>
+                  <a:srgbClr val="E0A04A"/>
+                </a:solidFill>
+                <a:latin typeface="Courier New" pitchFamily="34" charset="0"/>
+                <a:ea typeface="Courier New" pitchFamily="34" charset="-122"/>
+                <a:cs typeface="Courier New" pitchFamily="34" charset="-120"/>
+              </a:rPr>
+              <a:t>6333:6333 -p 6334:6334</a:t>
+            </a:r>
+            <a:endParaRPr lang="en-US" sz="1250" dirty="0"/>
+          </a:p>
+          <a:p>
+            <a:pPr marL="0" indent="0">
+              <a:lnSpc>
+                <a:spcPct val="128000"/>
+              </a:lnSpc>
+              <a:buNone/>
+            </a:pPr>
+            <a:r>
+              <a:rPr lang="en-US" sz="1250" dirty="0">
+                <a:solidFill>
+                  <a:srgbClr val="E9E5DD"/>
+                </a:solidFill>
+                <a:latin typeface="Courier New" pitchFamily="34" charset="0"/>
+                <a:ea typeface="Courier New" pitchFamily="34" charset="-122"/>
+                <a:cs typeface="Courier New" pitchFamily="34" charset="-120"/>
+              </a:rPr>
+              <a:t>    qdrant/qdrant</a:t>
+            </a:r>
+            <a:endParaRPr lang="en-US" sz="1250" dirty="0"/>
+          </a:p>
+          <a:p>
+            <a:pPr marL="0" indent="0">
+              <a:lnSpc>
+                <a:spcPct val="128000"/>
+              </a:lnSpc>
+              <a:buNone/>
+            </a:pPr>
+            <a:endParaRPr lang="en-US" sz="1250" dirty="0"/>
+          </a:p>
+          <a:p>
+            <a:pPr marL="0" indent="0">
+              <a:lnSpc>
+                <a:spcPct val="128000"/>
+              </a:lnSpc>
+              <a:buNone/>
+            </a:pPr>
+            <a:r>
+              <a:rPr lang="en-US" sz="1250" dirty="0">
+                <a:solidFill>
+                  <a:srgbClr val="9A958B"/>
+                </a:solidFill>
+                <a:latin typeface="Courier New" pitchFamily="34" charset="0"/>
+                <a:ea typeface="Courier New" pitchFamily="34" charset="-122"/>
+                <a:cs typeface="Courier New" pitchFamily="34" charset="-120"/>
+              </a:rPr>
+              <a:t>// 1. create collection (size 768)</a:t>
+            </a:r>
+            <a:endParaRPr lang="en-US" sz="1250" dirty="0"/>
+          </a:p>
+          <a:p>
+            <a:pPr marL="0" indent="0">
+              <a:lnSpc>
+                <a:spcPct val="128000"/>
+              </a:lnSpc>
+              <a:buNone/>
+            </a:pPr>
+            <a:r>
+              <a:rPr lang="en-US" sz="1250" dirty="0">
+                <a:solidFill>
+                  <a:srgbClr val="9A958B"/>
+                </a:solidFill>
+                <a:latin typeface="Courier New" pitchFamily="34" charset="0"/>
+                <a:ea typeface="Courier New" pitchFamily="34" charset="-122"/>
+                <a:cs typeface="Courier New" pitchFamily="34" charset="-120"/>
+              </a:rPr>
+              <a:t>// 2. upsert vectors + payload</a:t>
+            </a:r>
+            <a:endParaRPr lang="en-US" sz="1250" dirty="0"/>
+          </a:p>
+          <a:p>
+            <a:pPr marL="0" indent="0">
+              <a:lnSpc>
+                <a:spcPct val="128000"/>
+              </a:lnSpc>
+              <a:buNone/>
+            </a:pPr>
+            <a:r>
+              <a:rPr lang="en-US" sz="1250" dirty="0">
+                <a:solidFill>
+                  <a:srgbClr val="9A958B"/>
+                </a:solidFill>
+                <a:latin typeface="Courier New" pitchFamily="34" charset="0"/>
+                <a:ea typeface="Courier New" pitchFamily="34" charset="-122"/>
+                <a:cs typeface="Courier New" pitchFamily="34" charset="-120"/>
+              </a:rPr>
+              <a:t>// 3. query top-K by </a:t>
+            </a:r>
+            <a:r>
+              <a:rPr lang="en-US" sz="1250" dirty="0">
+                <a:solidFill>
+                  <a:srgbClr val="9FC3E0"/>
+                </a:solidFill>
+                <a:latin typeface="Courier New" pitchFamily="34" charset="0"/>
+                <a:ea typeface="Courier New" pitchFamily="34" charset="-122"/>
+                <a:cs typeface="Courier New" pitchFamily="34" charset="-120"/>
+              </a:rPr>
+              <a:t>Cosine</a:t>
+            </a:r>
+            <a:endParaRPr lang="en-US" sz="1250" dirty="0"/>
+          </a:p>
+          <a:p>
+            <a:pPr marL="0" indent="0">
+              <a:lnSpc>
+                <a:spcPct val="128000"/>
+              </a:lnSpc>
+              <a:buNone/>
+            </a:pPr>
+            <a:r>
+              <a:rPr lang="en-US" sz="1250" dirty="0">
+                <a:solidFill>
+                  <a:srgbClr val="E9E5DD"/>
+                </a:solidFill>
+                <a:latin typeface="Courier New" pitchFamily="34" charset="0"/>
+                <a:ea typeface="Courier New" pitchFamily="34" charset="-122"/>
+                <a:cs typeface="Courier New" pitchFamily="34" charset="-120"/>
+              </a:rPr>
+              <a:t>await client.QueryAsync(</a:t>
+            </a:r>
+            <a:endParaRPr lang="en-US" sz="1250" dirty="0"/>
+          </a:p>
+          <a:p>
+            <a:pPr marL="0" indent="0">
+              <a:lnSpc>
+                <a:spcPct val="128000"/>
+              </a:lnSpc>
+              <a:buNone/>
+            </a:pPr>
+            <a:r>
+              <a:rPr lang="en-US" sz="1250" dirty="0">
+                <a:solidFill>
+                  <a:srgbClr val="E9E5DD"/>
+                </a:solidFill>
+                <a:latin typeface="Courier New" pitchFamily="34" charset="0"/>
+                <a:ea typeface="Courier New" pitchFamily="34" charset="-122"/>
+                <a:cs typeface="Courier New" pitchFamily="34" charset="-120"/>
+              </a:rPr>
+              <a:t>   collection, vector, limit: </a:t>
+            </a:r>
+            <a:r>
+              <a:rPr lang="en-US" sz="1250" dirty="0">
+                <a:solidFill>
+                  <a:srgbClr val="E0A04A"/>
+                </a:solidFill>
+                <a:latin typeface="Courier New" pitchFamily="34" charset="0"/>
+                <a:ea typeface="Courier New" pitchFamily="34" charset="-122"/>
+                <a:cs typeface="Courier New" pitchFamily="34" charset="-120"/>
+              </a:rPr>
+              <a:t>5</a:t>
+            </a:r>
+            <a:r>
+              <a:rPr lang="en-US" sz="1250" dirty="0">
+                <a:solidFill>
+                  <a:srgbClr val="E9E5DD"/>
+                </a:solidFill>
+                <a:latin typeface="Courier New" pitchFamily="34" charset="0"/>
+                <a:ea typeface="Courier New" pitchFamily="34" charset="-122"/>
+                <a:cs typeface="Courier New" pitchFamily="34" charset="-120"/>
+              </a:rPr>
+              <a:t>);</a:t>
+            </a:r>
+            <a:endParaRPr lang="en-US" sz="1250" dirty="0"/>
+          </a:p>
+        </p:txBody>
+      </p:sp>
+      <p:sp>
+        <p:nvSpPr>
+          <p:cNvPr id="8" name="Shape 5"/>
+          <p:cNvSpPr/>
+          <p:nvPr/>
+        </p:nvSpPr>
+        <p:spPr>
+          <a:xfrm>
+            <a:off x="5897880" y="1417320"/>
             <a:ext cx="402336" cy="402336"/>
           </a:xfrm>
           <a:prstGeom prst="ellipse">
@@ -10026,10 +9575,17 @@
           </a:solidFill>
           <a:ln/>
         </p:spPr>
+        <p:txBody>
+          <a:bodyPr/>
+          <a:lstStyle/>
+          <a:p>
+            <a:endParaRPr lang="en-US"/>
+          </a:p>
+        </p:txBody>
       </p:sp>
       <p:pic>
         <p:nvPicPr>
-          <p:cNvPr id="13" name="Image 2" descr="preencoded.png">    </p:cNvPr>
+          <p:cNvPr id="9" name="Image 1" descr="preencoded.png"/>
           <p:cNvPicPr>
             <a:picLocks noChangeAspect="1"/>
           </p:cNvPicPr>
@@ -10043,7 +9599,7 @@
         </p:blipFill>
         <p:spPr>
           <a:xfrm>
-            <a:off x="6002487" y="2180295"/>
+            <a:off x="6002487" y="1521927"/>
             <a:ext cx="193121" cy="193121"/>
           </a:xfrm>
           <a:prstGeom prst="rect">
@@ -10053,13 +9609,13 @@
       </p:pic>
       <p:sp>
         <p:nvSpPr>
-          <p:cNvPr id="14" name="Text 9"/>
-          <p:cNvSpPr/>
-          <p:nvPr/>
-        </p:nvSpPr>
-        <p:spPr>
-          <a:xfrm>
-            <a:off x="6446520" y="2029968"/>
+          <p:cNvPr id="10" name="Text 6"/>
+          <p:cNvSpPr/>
+          <p:nvPr/>
+        </p:nvSpPr>
+        <p:spPr>
+          <a:xfrm>
+            <a:off x="6446520" y="1371600"/>
             <a:ext cx="2697480" cy="274320"/>
           </a:xfrm>
           <a:prstGeom prst="rect">
@@ -10072,7 +9628,7 @@
           <a:bodyPr wrap="square" lIns="0" tIns="0" rIns="0" bIns="0" rtlCol="0" anchor="ctr"/>
           <a:lstStyle/>
           <a:p>
-            <a:pPr indent="0" marL="0">
+            <a:pPr marL="0" indent="0">
               <a:buNone/>
             </a:pPr>
             <a:r>
@@ -10084,7 +9640,7 @@
                 <a:ea typeface="Inter" pitchFamily="34" charset="-122"/>
                 <a:cs typeface="Inter" pitchFamily="34" charset="-120"/>
               </a:rPr>
-              <a:t>Create collection</a:t>
+              <a:t>Run the container</a:t>
             </a:r>
             <a:endParaRPr lang="en-US" sz="1350" dirty="0"/>
           </a:p>
@@ -10092,13 +9648,13 @@
       </p:sp>
       <p:sp>
         <p:nvSpPr>
-          <p:cNvPr id="15" name="Text 10"/>
-          <p:cNvSpPr/>
-          <p:nvPr/>
-        </p:nvSpPr>
-        <p:spPr>
-          <a:xfrm>
-            <a:off x="6446520" y="2304288"/>
+          <p:cNvPr id="11" name="Text 7"/>
+          <p:cNvSpPr/>
+          <p:nvPr/>
+        </p:nvSpPr>
+        <p:spPr>
+          <a:xfrm>
+            <a:off x="6446520" y="1645920"/>
             <a:ext cx="2743200" cy="274320"/>
           </a:xfrm>
           <a:prstGeom prst="rect">
@@ -10111,7 +9667,7 @@
           <a:bodyPr wrap="square" lIns="0" tIns="0" rIns="0" bIns="0" rtlCol="0" anchor="ctr"/>
           <a:lstStyle/>
           <a:p>
-            <a:pPr indent="0" marL="0">
+            <a:pPr marL="0" indent="0">
               <a:buNone/>
             </a:pPr>
             <a:r>
@@ -10123,7 +9679,7 @@
                 <a:ea typeface="Inter" pitchFamily="34" charset="-122"/>
                 <a:cs typeface="Inter" pitchFamily="34" charset="-120"/>
               </a:rPr>
-              <a:t>Vector size + Cosine metric</a:t>
+              <a:t>Ports 6333 (REST) + 6334 (gRPC)</a:t>
             </a:r>
             <a:endParaRPr lang="en-US" sz="1100" dirty="0"/>
           </a:p>
@@ -10131,13 +9687,13 @@
       </p:sp>
       <p:sp>
         <p:nvSpPr>
-          <p:cNvPr id="16" name="Shape 11"/>
-          <p:cNvSpPr/>
-          <p:nvPr/>
-        </p:nvSpPr>
-        <p:spPr>
-          <a:xfrm>
-            <a:off x="5897880" y="2734056"/>
+          <p:cNvPr id="12" name="Shape 8"/>
+          <p:cNvSpPr/>
+          <p:nvPr/>
+        </p:nvSpPr>
+        <p:spPr>
+          <a:xfrm>
+            <a:off x="5897880" y="2075688"/>
             <a:ext cx="402336" cy="402336"/>
           </a:xfrm>
           <a:prstGeom prst="ellipse">
@@ -10148,10 +9704,17 @@
           </a:solidFill>
           <a:ln/>
         </p:spPr>
+        <p:txBody>
+          <a:bodyPr/>
+          <a:lstStyle/>
+          <a:p>
+            <a:endParaRPr lang="en-US"/>
+          </a:p>
+        </p:txBody>
       </p:sp>
       <p:pic>
         <p:nvPicPr>
-          <p:cNvPr id="17" name="Image 3" descr="preencoded.png">    </p:cNvPr>
+          <p:cNvPr id="13" name="Image 2" descr="preencoded.png"/>
           <p:cNvPicPr>
             <a:picLocks noChangeAspect="1"/>
           </p:cNvPicPr>
@@ -10165,6 +9728,135 @@
         </p:blipFill>
         <p:spPr>
           <a:xfrm>
+            <a:off x="6002487" y="2180295"/>
+            <a:ext cx="193121" cy="193121"/>
+          </a:xfrm>
+          <a:prstGeom prst="rect">
+            <a:avLst/>
+          </a:prstGeom>
+        </p:spPr>
+      </p:pic>
+      <p:sp>
+        <p:nvSpPr>
+          <p:cNvPr id="14" name="Text 9"/>
+          <p:cNvSpPr/>
+          <p:nvPr/>
+        </p:nvSpPr>
+        <p:spPr>
+          <a:xfrm>
+            <a:off x="6446520" y="2029968"/>
+            <a:ext cx="2697480" cy="274320"/>
+          </a:xfrm>
+          <a:prstGeom prst="rect">
+            <a:avLst/>
+          </a:prstGeom>
+          <a:noFill/>
+          <a:ln/>
+        </p:spPr>
+        <p:txBody>
+          <a:bodyPr wrap="square" lIns="0" tIns="0" rIns="0" bIns="0" rtlCol="0" anchor="ctr"/>
+          <a:lstStyle/>
+          <a:p>
+            <a:pPr marL="0" indent="0">
+              <a:buNone/>
+            </a:pPr>
+            <a:r>
+              <a:rPr lang="en-US" sz="1350" b="1" dirty="0">
+                <a:solidFill>
+                  <a:srgbClr val="141413"/>
+                </a:solidFill>
+                <a:latin typeface="Inter" pitchFamily="34" charset="0"/>
+                <a:ea typeface="Inter" pitchFamily="34" charset="-122"/>
+                <a:cs typeface="Inter" pitchFamily="34" charset="-120"/>
+              </a:rPr>
+              <a:t>Create collection</a:t>
+            </a:r>
+            <a:endParaRPr lang="en-US" sz="1350" dirty="0"/>
+          </a:p>
+        </p:txBody>
+      </p:sp>
+      <p:sp>
+        <p:nvSpPr>
+          <p:cNvPr id="15" name="Text 10"/>
+          <p:cNvSpPr/>
+          <p:nvPr/>
+        </p:nvSpPr>
+        <p:spPr>
+          <a:xfrm>
+            <a:off x="6446520" y="2304288"/>
+            <a:ext cx="2743200" cy="274320"/>
+          </a:xfrm>
+          <a:prstGeom prst="rect">
+            <a:avLst/>
+          </a:prstGeom>
+          <a:noFill/>
+          <a:ln/>
+        </p:spPr>
+        <p:txBody>
+          <a:bodyPr wrap="square" lIns="0" tIns="0" rIns="0" bIns="0" rtlCol="0" anchor="ctr"/>
+          <a:lstStyle/>
+          <a:p>
+            <a:pPr marL="0" indent="0">
+              <a:buNone/>
+            </a:pPr>
+            <a:r>
+              <a:rPr lang="en-US" sz="1100" dirty="0">
+                <a:solidFill>
+                  <a:srgbClr val="615C52"/>
+                </a:solidFill>
+                <a:latin typeface="Inter" pitchFamily="34" charset="0"/>
+                <a:ea typeface="Inter" pitchFamily="34" charset="-122"/>
+                <a:cs typeface="Inter" pitchFamily="34" charset="-120"/>
+              </a:rPr>
+              <a:t>Vector size + Cosine metric</a:t>
+            </a:r>
+            <a:endParaRPr lang="en-US" sz="1100" dirty="0"/>
+          </a:p>
+        </p:txBody>
+      </p:sp>
+      <p:sp>
+        <p:nvSpPr>
+          <p:cNvPr id="16" name="Shape 11"/>
+          <p:cNvSpPr/>
+          <p:nvPr/>
+        </p:nvSpPr>
+        <p:spPr>
+          <a:xfrm>
+            <a:off x="5897880" y="2734056"/>
+            <a:ext cx="402336" cy="402336"/>
+          </a:xfrm>
+          <a:prstGeom prst="ellipse">
+            <a:avLst/>
+          </a:prstGeom>
+          <a:solidFill>
+            <a:srgbClr val="D97757"/>
+          </a:solidFill>
+          <a:ln/>
+        </p:spPr>
+        <p:txBody>
+          <a:bodyPr/>
+          <a:lstStyle/>
+          <a:p>
+            <a:endParaRPr lang="en-US"/>
+          </a:p>
+        </p:txBody>
+      </p:sp>
+      <p:pic>
+        <p:nvPicPr>
+          <p:cNvPr id="17" name="Image 3" descr="preencoded.png"/>
+          <p:cNvPicPr>
+            <a:picLocks noChangeAspect="1"/>
+          </p:cNvPicPr>
+          <p:nvPr/>
+        </p:nvPicPr>
+        <p:blipFill>
+          <a:blip r:embed="rId5"/>
+          <a:stretch>
+            <a:fillRect/>
+          </a:stretch>
+        </p:blipFill>
+        <p:spPr>
+          <a:xfrm>
             <a:off x="6002487" y="2838663"/>
             <a:ext cx="193121" cy="193121"/>
           </a:xfrm>
@@ -10194,7 +9886,7 @@
           <a:bodyPr wrap="square" lIns="0" tIns="0" rIns="0" bIns="0" rtlCol="0" anchor="ctr"/>
           <a:lstStyle/>
           <a:p>
-            <a:pPr indent="0" marL="0">
+            <a:pPr marL="0" indent="0">
               <a:buNone/>
             </a:pPr>
             <a:r>
@@ -10233,7 +9925,7 @@
           <a:bodyPr wrap="square" lIns="0" tIns="0" rIns="0" bIns="0" rtlCol="0" anchor="ctr"/>
           <a:lstStyle/>
           <a:p>
-            <a:pPr indent="0" marL="0">
+            <a:pPr marL="0" indent="0">
               <a:buNone/>
             </a:pPr>
             <a:r>
@@ -10272,7 +9964,7 @@
           <a:bodyPr wrap="square" lIns="0" tIns="0" rIns="0" bIns="0" rtlCol="0" anchor="ctr"/>
           <a:lstStyle/>
           <a:p>
-            <a:pPr indent="0" marL="0">
+            <a:pPr marL="0" indent="0">
               <a:buNone/>
             </a:pPr>
             <a:r>
@@ -10311,7 +10003,7 @@
           <a:bodyPr wrap="square" rtlCol="0" anchor="ctr"/>
           <a:lstStyle/>
           <a:p>
-            <a:pPr indent="0" marL="0">
+            <a:pPr marL="0" indent="0">
               <a:buNone/>
             </a:pPr>
             <a:r>
@@ -10350,7 +10042,7 @@
           <a:bodyPr wrap="square" rtlCol="0" anchor="ctr"/>
           <a:lstStyle/>
           <a:p>
-            <a:pPr algn="r" indent="0" marL="0">
+            <a:pPr marL="0" indent="0" algn="r">
               <a:buNone/>
             </a:pPr>
             <a:r>
@@ -10365,45 +10057,6 @@
               <a:t>Day 2 · Section 3  ·  9/12</a:t>
             </a:r>
             <a:endParaRPr lang="en-US" sz="900" dirty="0"/>
-          </a:p>
-        </p:txBody>
-      </p:sp>
-      <p:sp>
-        <p:nvSpPr>
-          <p:cNvPr id="23" name="Text 17"/>
-          <p:cNvSpPr/>
-          <p:nvPr/>
-        </p:nvSpPr>
-        <p:spPr>
-          <a:xfrm>
-            <a:off x="548640" y="4462272"/>
-            <a:ext cx="8046720" cy="274320"/>
-          </a:xfrm>
-          <a:prstGeom prst="rect">
-            <a:avLst/>
-          </a:prstGeom>
-          <a:noFill/>
-          <a:ln/>
-        </p:spPr>
-        <p:txBody>
-          <a:bodyPr wrap="square" lIns="0" tIns="0" rIns="0" bIns="0" rtlCol="0" anchor="ctr"/>
-          <a:lstStyle/>
-          <a:p>
-            <a:pPr indent="0" marL="0">
-              <a:buNone/>
-            </a:pPr>
-            <a:r>
-              <a:rPr lang="en-US" sz="1000" i="1" dirty="0">
-                <a:solidFill>
-                  <a:srgbClr val="615C52"/>
-                </a:solidFill>
-                <a:latin typeface="Inter" pitchFamily="34" charset="0"/>
-                <a:ea typeface="Inter" pitchFamily="34" charset="-122"/>
-                <a:cs typeface="Inter" pitchFamily="34" charset="-120"/>
-              </a:rPr>
-              <a:t>▸ Cosine top-K is the whole query; in-memory fallback keeps offline teams moving.</a:t>
-            </a:r>
-            <a:endParaRPr lang="en-US" sz="1000" dirty="0"/>
           </a:p>
         </p:txBody>
       </p:sp>

--- a/decks/Day 2/Day2-Section3-RAG-Pipelines.pptx
+++ b/decks/Day 2/Day2-Section3-RAG-Pipelines.pptx
@@ -666,45 +666,6 @@
           </a:p>
         </p:txBody>
       </p:sp>
-      <p:sp>
-        <p:nvSpPr>
-          <p:cNvPr id="8" name="Text 5"/>
-          <p:cNvSpPr/>
-          <p:nvPr/>
-        </p:nvSpPr>
-        <p:spPr>
-          <a:xfrm>
-            <a:off x="640080" y="3639312"/>
-            <a:ext cx="7315200" cy="365760"/>
-          </a:xfrm>
-          <a:prstGeom prst="rect">
-            <a:avLst/>
-          </a:prstGeom>
-          <a:noFill/>
-          <a:ln/>
-        </p:spPr>
-        <p:txBody>
-          <a:bodyPr wrap="square" lIns="0" tIns="0" rIns="0" bIns="0" rtlCol="0" anchor="ctr"/>
-          <a:lstStyle/>
-          <a:p>
-            <a:pPr marL="0" indent="0">
-              <a:buNone/>
-            </a:pPr>
-            <a:r>
-              <a:rPr lang="en-US" sz="1600" dirty="0">
-                <a:solidFill>
-                  <a:srgbClr val="615C52"/>
-                </a:solidFill>
-                <a:latin typeface="Inter" pitchFamily="34" charset="0"/>
-                <a:ea typeface="Inter" pitchFamily="34" charset="-122"/>
-                <a:cs typeface="Inter" pitchFamily="34" charset="-120"/>
-              </a:rPr>
-              <a:t>75 min  ·  35 lecture / demo  +  40 lab</a:t>
-            </a:r>
-            <a:endParaRPr lang="en-US" sz="1600" dirty="0"/>
-          </a:p>
-        </p:txBody>
-      </p:sp>
     </p:spTree>
   </p:cSld>
   <p:clrMapOvr>
